--- a/Presentation1.pptx
+++ b/Presentation1.pptx
@@ -4,10 +4,19 @@
   <p:sldMasterIdLst>
     <p:sldMasterId id="2147483648" r:id="rId1"/>
   </p:sldMasterIdLst>
+  <p:notesMasterIdLst>
+    <p:notesMasterId r:id="rId11"/>
+  </p:notesMasterIdLst>
   <p:sldIdLst>
     <p:sldId id="256" r:id="rId2"/>
     <p:sldId id="257" r:id="rId3"/>
-    <p:sldId id="258" r:id="rId4"/>
+    <p:sldId id="259" r:id="rId4"/>
+    <p:sldId id="263" r:id="rId5"/>
+    <p:sldId id="258" r:id="rId6"/>
+    <p:sldId id="264" r:id="rId7"/>
+    <p:sldId id="260" r:id="rId8"/>
+    <p:sldId id="261" r:id="rId9"/>
+    <p:sldId id="262" r:id="rId10"/>
   </p:sldIdLst>
   <p:sldSz cx="12192000" cy="6858000"/>
   <p:notesSz cx="6858000" cy="9144000"/>
@@ -107,6 +116,439 @@
     </a:lvl9pPr>
   </p:defaultTextStyle>
 </p:presentation>
+</file>
+
+<file path=ppt/notesMasters/notesMaster1.xml><?xml version="1.0" encoding="utf-8"?>
+<p:notesMaster xmlns:a="http://schemas.openxmlformats.org/drawingml/2006/main" xmlns:r="http://schemas.openxmlformats.org/officeDocument/2006/relationships" xmlns:p="http://schemas.openxmlformats.org/presentationml/2006/main">
+  <p:cSld>
+    <p:bg>
+      <p:bgRef idx="1001">
+        <a:schemeClr val="bg1"/>
+      </p:bgRef>
+    </p:bg>
+    <p:spTree>
+      <p:nvGrpSpPr>
+        <p:cNvPr id="1" name=""/>
+        <p:cNvGrpSpPr/>
+        <p:nvPr/>
+      </p:nvGrpSpPr>
+      <p:grpSpPr>
+        <a:xfrm>
+          <a:off x="0" y="0"/>
+          <a:ext cx="0" cy="0"/>
+          <a:chOff x="0" y="0"/>
+          <a:chExt cx="0" cy="0"/>
+        </a:xfrm>
+      </p:grpSpPr>
+      <p:sp>
+        <p:nvSpPr>
+          <p:cNvPr id="2" name="Header Placeholder 1"/>
+          <p:cNvSpPr>
+            <a:spLocks noGrp="1"/>
+          </p:cNvSpPr>
+          <p:nvPr>
+            <p:ph type="hdr" sz="quarter"/>
+          </p:nvPr>
+        </p:nvSpPr>
+        <p:spPr>
+          <a:xfrm>
+            <a:off x="0" y="0"/>
+            <a:ext cx="2971800" cy="458788"/>
+          </a:xfrm>
+          <a:prstGeom prst="rect">
+            <a:avLst/>
+          </a:prstGeom>
+        </p:spPr>
+        <p:txBody>
+          <a:bodyPr vert="horz" lIns="91440" tIns="45720" rIns="91440" bIns="45720" rtlCol="0"/>
+          <a:lstStyle>
+            <a:lvl1pPr algn="l">
+              <a:defRPr sz="1200"/>
+            </a:lvl1pPr>
+          </a:lstStyle>
+          <a:p>
+            <a:endParaRPr lang="en-US"/>
+          </a:p>
+        </p:txBody>
+      </p:sp>
+      <p:sp>
+        <p:nvSpPr>
+          <p:cNvPr id="3" name="Date Placeholder 2"/>
+          <p:cNvSpPr>
+            <a:spLocks noGrp="1"/>
+          </p:cNvSpPr>
+          <p:nvPr>
+            <p:ph type="dt" idx="1"/>
+          </p:nvPr>
+        </p:nvSpPr>
+        <p:spPr>
+          <a:xfrm>
+            <a:off x="3884613" y="0"/>
+            <a:ext cx="2971800" cy="458788"/>
+          </a:xfrm>
+          <a:prstGeom prst="rect">
+            <a:avLst/>
+          </a:prstGeom>
+        </p:spPr>
+        <p:txBody>
+          <a:bodyPr vert="horz" lIns="91440" tIns="45720" rIns="91440" bIns="45720" rtlCol="0"/>
+          <a:lstStyle>
+            <a:lvl1pPr algn="r">
+              <a:defRPr sz="1200"/>
+            </a:lvl1pPr>
+          </a:lstStyle>
+          <a:p>
+            <a:fld id="{89E70A5B-2C87-1846-A4B4-85E86F9B06B4}" type="datetimeFigureOut">
+              <a:rPr lang="en-US" smtClean="0"/>
+              <a:t>5/6/26</a:t>
+            </a:fld>
+            <a:endParaRPr lang="en-US"/>
+          </a:p>
+        </p:txBody>
+      </p:sp>
+      <p:sp>
+        <p:nvSpPr>
+          <p:cNvPr id="4" name="Slide Image Placeholder 3"/>
+          <p:cNvSpPr>
+            <a:spLocks noGrp="1" noRot="1" noChangeAspect="1"/>
+          </p:cNvSpPr>
+          <p:nvPr>
+            <p:ph type="sldImg" idx="2"/>
+          </p:nvPr>
+        </p:nvSpPr>
+        <p:spPr>
+          <a:xfrm>
+            <a:off x="685800" y="1143000"/>
+            <a:ext cx="5486400" cy="3086100"/>
+          </a:xfrm>
+          <a:prstGeom prst="rect">
+            <a:avLst/>
+          </a:prstGeom>
+          <a:noFill/>
+          <a:ln w="12700">
+            <a:solidFill>
+              <a:prstClr val="black"/>
+            </a:solidFill>
+          </a:ln>
+        </p:spPr>
+        <p:txBody>
+          <a:bodyPr vert="horz" lIns="91440" tIns="45720" rIns="91440" bIns="45720" rtlCol="0" anchor="ctr"/>
+          <a:lstStyle/>
+          <a:p>
+            <a:endParaRPr lang="en-US"/>
+          </a:p>
+        </p:txBody>
+      </p:sp>
+      <p:sp>
+        <p:nvSpPr>
+          <p:cNvPr id="5" name="Notes Placeholder 4"/>
+          <p:cNvSpPr>
+            <a:spLocks noGrp="1"/>
+          </p:cNvSpPr>
+          <p:nvPr>
+            <p:ph type="body" sz="quarter" idx="3"/>
+          </p:nvPr>
+        </p:nvSpPr>
+        <p:spPr>
+          <a:xfrm>
+            <a:off x="685800" y="4400550"/>
+            <a:ext cx="5486400" cy="3600450"/>
+          </a:xfrm>
+          <a:prstGeom prst="rect">
+            <a:avLst/>
+          </a:prstGeom>
+        </p:spPr>
+        <p:txBody>
+          <a:bodyPr vert="horz" lIns="91440" tIns="45720" rIns="91440" bIns="45720" rtlCol="0"/>
+          <a:lstStyle/>
+          <a:p>
+            <a:pPr lvl="0"/>
+            <a:r>
+              <a:rPr lang="en-US"/>
+              <a:t>Click to edit Master text styles</a:t>
+            </a:r>
+          </a:p>
+          <a:p>
+            <a:pPr lvl="1"/>
+            <a:r>
+              <a:rPr lang="en-US"/>
+              <a:t>Second level</a:t>
+            </a:r>
+          </a:p>
+          <a:p>
+            <a:pPr lvl="2"/>
+            <a:r>
+              <a:rPr lang="en-US"/>
+              <a:t>Third level</a:t>
+            </a:r>
+          </a:p>
+          <a:p>
+            <a:pPr lvl="3"/>
+            <a:r>
+              <a:rPr lang="en-US"/>
+              <a:t>Fourth level</a:t>
+            </a:r>
+          </a:p>
+          <a:p>
+            <a:pPr lvl="4"/>
+            <a:r>
+              <a:rPr lang="en-US"/>
+              <a:t>Fifth level</a:t>
+            </a:r>
+          </a:p>
+        </p:txBody>
+      </p:sp>
+      <p:sp>
+        <p:nvSpPr>
+          <p:cNvPr id="6" name="Footer Placeholder 5"/>
+          <p:cNvSpPr>
+            <a:spLocks noGrp="1"/>
+          </p:cNvSpPr>
+          <p:nvPr>
+            <p:ph type="ftr" sz="quarter" idx="4"/>
+          </p:nvPr>
+        </p:nvSpPr>
+        <p:spPr>
+          <a:xfrm>
+            <a:off x="0" y="8685213"/>
+            <a:ext cx="2971800" cy="458787"/>
+          </a:xfrm>
+          <a:prstGeom prst="rect">
+            <a:avLst/>
+          </a:prstGeom>
+        </p:spPr>
+        <p:txBody>
+          <a:bodyPr vert="horz" lIns="91440" tIns="45720" rIns="91440" bIns="45720" rtlCol="0" anchor="b"/>
+          <a:lstStyle>
+            <a:lvl1pPr algn="l">
+              <a:defRPr sz="1200"/>
+            </a:lvl1pPr>
+          </a:lstStyle>
+          <a:p>
+            <a:endParaRPr lang="en-US"/>
+          </a:p>
+        </p:txBody>
+      </p:sp>
+      <p:sp>
+        <p:nvSpPr>
+          <p:cNvPr id="7" name="Slide Number Placeholder 6"/>
+          <p:cNvSpPr>
+            <a:spLocks noGrp="1"/>
+          </p:cNvSpPr>
+          <p:nvPr>
+            <p:ph type="sldNum" sz="quarter" idx="5"/>
+          </p:nvPr>
+        </p:nvSpPr>
+        <p:spPr>
+          <a:xfrm>
+            <a:off x="3884613" y="8685213"/>
+            <a:ext cx="2971800" cy="458787"/>
+          </a:xfrm>
+          <a:prstGeom prst="rect">
+            <a:avLst/>
+          </a:prstGeom>
+        </p:spPr>
+        <p:txBody>
+          <a:bodyPr vert="horz" lIns="91440" tIns="45720" rIns="91440" bIns="45720" rtlCol="0" anchor="b"/>
+          <a:lstStyle>
+            <a:lvl1pPr algn="r">
+              <a:defRPr sz="1200"/>
+            </a:lvl1pPr>
+          </a:lstStyle>
+          <a:p>
+            <a:fld id="{0E3764EE-0FA6-4C47-A4F7-560EC47D34E6}" type="slidenum">
+              <a:rPr lang="en-US" smtClean="0"/>
+              <a:t>‹#›</a:t>
+            </a:fld>
+            <a:endParaRPr lang="en-US"/>
+          </a:p>
+        </p:txBody>
+      </p:sp>
+    </p:spTree>
+    <p:extLst>
+      <p:ext uri="{BB962C8B-B14F-4D97-AF65-F5344CB8AC3E}">
+        <p14:creationId xmlns:p14="http://schemas.microsoft.com/office/powerpoint/2010/main" val="2208177218"/>
+      </p:ext>
+    </p:extLst>
+  </p:cSld>
+  <p:clrMap bg1="lt1" tx1="dk1" bg2="lt2" tx2="dk2" accent1="accent1" accent2="accent2" accent3="accent3" accent4="accent4" accent5="accent5" accent6="accent6" hlink="hlink" folHlink="folHlink"/>
+  <p:notesStyle>
+    <a:lvl1pPr marL="0" algn="l" defTabSz="914400" rtl="0" eaLnBrk="1" latinLnBrk="0" hangingPunct="1">
+      <a:defRPr sz="1200" kern="1200">
+        <a:solidFill>
+          <a:schemeClr val="tx1"/>
+        </a:solidFill>
+        <a:latin typeface="+mn-lt"/>
+        <a:ea typeface="+mn-ea"/>
+        <a:cs typeface="+mn-cs"/>
+      </a:defRPr>
+    </a:lvl1pPr>
+    <a:lvl2pPr marL="457200" algn="l" defTabSz="914400" rtl="0" eaLnBrk="1" latinLnBrk="0" hangingPunct="1">
+      <a:defRPr sz="1200" kern="1200">
+        <a:solidFill>
+          <a:schemeClr val="tx1"/>
+        </a:solidFill>
+        <a:latin typeface="+mn-lt"/>
+        <a:ea typeface="+mn-ea"/>
+        <a:cs typeface="+mn-cs"/>
+      </a:defRPr>
+    </a:lvl2pPr>
+    <a:lvl3pPr marL="914400" algn="l" defTabSz="914400" rtl="0" eaLnBrk="1" latinLnBrk="0" hangingPunct="1">
+      <a:defRPr sz="1200" kern="1200">
+        <a:solidFill>
+          <a:schemeClr val="tx1"/>
+        </a:solidFill>
+        <a:latin typeface="+mn-lt"/>
+        <a:ea typeface="+mn-ea"/>
+        <a:cs typeface="+mn-cs"/>
+      </a:defRPr>
+    </a:lvl3pPr>
+    <a:lvl4pPr marL="1371600" algn="l" defTabSz="914400" rtl="0" eaLnBrk="1" latinLnBrk="0" hangingPunct="1">
+      <a:defRPr sz="1200" kern="1200">
+        <a:solidFill>
+          <a:schemeClr val="tx1"/>
+        </a:solidFill>
+        <a:latin typeface="+mn-lt"/>
+        <a:ea typeface="+mn-ea"/>
+        <a:cs typeface="+mn-cs"/>
+      </a:defRPr>
+    </a:lvl4pPr>
+    <a:lvl5pPr marL="1828800" algn="l" defTabSz="914400" rtl="0" eaLnBrk="1" latinLnBrk="0" hangingPunct="1">
+      <a:defRPr sz="1200" kern="1200">
+        <a:solidFill>
+          <a:schemeClr val="tx1"/>
+        </a:solidFill>
+        <a:latin typeface="+mn-lt"/>
+        <a:ea typeface="+mn-ea"/>
+        <a:cs typeface="+mn-cs"/>
+      </a:defRPr>
+    </a:lvl5pPr>
+    <a:lvl6pPr marL="2286000" algn="l" defTabSz="914400" rtl="0" eaLnBrk="1" latinLnBrk="0" hangingPunct="1">
+      <a:defRPr sz="1200" kern="1200">
+        <a:solidFill>
+          <a:schemeClr val="tx1"/>
+        </a:solidFill>
+        <a:latin typeface="+mn-lt"/>
+        <a:ea typeface="+mn-ea"/>
+        <a:cs typeface="+mn-cs"/>
+      </a:defRPr>
+    </a:lvl6pPr>
+    <a:lvl7pPr marL="2743200" algn="l" defTabSz="914400" rtl="0" eaLnBrk="1" latinLnBrk="0" hangingPunct="1">
+      <a:defRPr sz="1200" kern="1200">
+        <a:solidFill>
+          <a:schemeClr val="tx1"/>
+        </a:solidFill>
+        <a:latin typeface="+mn-lt"/>
+        <a:ea typeface="+mn-ea"/>
+        <a:cs typeface="+mn-cs"/>
+      </a:defRPr>
+    </a:lvl7pPr>
+    <a:lvl8pPr marL="3200400" algn="l" defTabSz="914400" rtl="0" eaLnBrk="1" latinLnBrk="0" hangingPunct="1">
+      <a:defRPr sz="1200" kern="1200">
+        <a:solidFill>
+          <a:schemeClr val="tx1"/>
+        </a:solidFill>
+        <a:latin typeface="+mn-lt"/>
+        <a:ea typeface="+mn-ea"/>
+        <a:cs typeface="+mn-cs"/>
+      </a:defRPr>
+    </a:lvl8pPr>
+    <a:lvl9pPr marL="3657600" algn="l" defTabSz="914400" rtl="0" eaLnBrk="1" latinLnBrk="0" hangingPunct="1">
+      <a:defRPr sz="1200" kern="1200">
+        <a:solidFill>
+          <a:schemeClr val="tx1"/>
+        </a:solidFill>
+        <a:latin typeface="+mn-lt"/>
+        <a:ea typeface="+mn-ea"/>
+        <a:cs typeface="+mn-cs"/>
+      </a:defRPr>
+    </a:lvl9pPr>
+  </p:notesStyle>
+</p:notesMaster>
+</file>
+
+<file path=ppt/notesSlides/notesSlide1.xml><?xml version="1.0" encoding="utf-8"?>
+<p:notes xmlns:a="http://schemas.openxmlformats.org/drawingml/2006/main" xmlns:r="http://schemas.openxmlformats.org/officeDocument/2006/relationships" xmlns:p="http://schemas.openxmlformats.org/presentationml/2006/main">
+  <p:cSld>
+    <p:spTree>
+      <p:nvGrpSpPr>
+        <p:cNvPr id="1" name=""/>
+        <p:cNvGrpSpPr/>
+        <p:nvPr/>
+      </p:nvGrpSpPr>
+      <p:grpSpPr>
+        <a:xfrm>
+          <a:off x="0" y="0"/>
+          <a:ext cx="0" cy="0"/>
+          <a:chOff x="0" y="0"/>
+          <a:chExt cx="0" cy="0"/>
+        </a:xfrm>
+      </p:grpSpPr>
+      <p:sp>
+        <p:nvSpPr>
+          <p:cNvPr id="2" name="Slide Image Placeholder 1"/>
+          <p:cNvSpPr>
+            <a:spLocks noGrp="1" noRot="1" noChangeAspect="1"/>
+          </p:cNvSpPr>
+          <p:nvPr>
+            <p:ph type="sldImg"/>
+          </p:nvPr>
+        </p:nvSpPr>
+        <p:spPr/>
+      </p:sp>
+      <p:sp>
+        <p:nvSpPr>
+          <p:cNvPr id="3" name="Notes Placeholder 2"/>
+          <p:cNvSpPr>
+            <a:spLocks noGrp="1"/>
+          </p:cNvSpPr>
+          <p:nvPr>
+            <p:ph type="body" idx="1"/>
+          </p:nvPr>
+        </p:nvSpPr>
+        <p:spPr/>
+        <p:txBody>
+          <a:bodyPr/>
+          <a:lstStyle/>
+          <a:p>
+            <a:endParaRPr lang="en-US" dirty="0"/>
+          </a:p>
+        </p:txBody>
+      </p:sp>
+      <p:sp>
+        <p:nvSpPr>
+          <p:cNvPr id="4" name="Slide Number Placeholder 3"/>
+          <p:cNvSpPr>
+            <a:spLocks noGrp="1"/>
+          </p:cNvSpPr>
+          <p:nvPr>
+            <p:ph type="sldNum" sz="quarter" idx="5"/>
+          </p:nvPr>
+        </p:nvSpPr>
+        <p:spPr/>
+        <p:txBody>
+          <a:bodyPr/>
+          <a:lstStyle/>
+          <a:p>
+            <a:fld id="{0E3764EE-0FA6-4C47-A4F7-560EC47D34E6}" type="slidenum">
+              <a:rPr lang="en-US" smtClean="0"/>
+              <a:t>7</a:t>
+            </a:fld>
+            <a:endParaRPr lang="en-US"/>
+          </a:p>
+        </p:txBody>
+      </p:sp>
+    </p:spTree>
+    <p:extLst>
+      <p:ext uri="{BB962C8B-B14F-4D97-AF65-F5344CB8AC3E}">
+        <p14:creationId xmlns:p14="http://schemas.microsoft.com/office/powerpoint/2010/main" val="2442484002"/>
+      </p:ext>
+    </p:extLst>
+  </p:cSld>
+  <p:clrMapOvr>
+    <a:masterClrMapping/>
+  </p:clrMapOvr>
+</p:notes>
 </file>
 
 <file path=ppt/slideLayouts/slideLayout1.xml><?xml version="1.0" encoding="utf-8"?>
@@ -3919,7 +4361,7 @@
         </p:nvSpPr>
         <p:spPr>
           <a:xfrm>
-            <a:off x="328810" y="3429000"/>
+            <a:off x="186630" y="3429000"/>
             <a:ext cx="11721011" cy="646331"/>
           </a:xfrm>
           <a:prstGeom prst="rect">
@@ -3965,7 +4407,19 @@
             </a:r>
             <a:r>
               <a:rPr lang="en-US" dirty="0"/>
-              <a:t>  599.303 </a:t>
+              <a:t>  </a:t>
+            </a:r>
+            <a:r>
+              <a:rPr lang="en-US" dirty="0">
+                <a:solidFill>
+                  <a:srgbClr val="0070C0"/>
+                </a:solidFill>
+              </a:rPr>
+              <a:t>599.303</a:t>
+            </a:r>
+            <a:r>
+              <a:rPr lang="en-US" dirty="0"/>
+              <a:t> </a:t>
             </a:r>
             <a:r>
               <a:rPr lang="en-US" dirty="0">
@@ -3975,7 +4429,19 @@
             </a:r>
             <a:r>
               <a:rPr lang="en-US" dirty="0"/>
-              <a:t>  793.38 </a:t>
+              <a:t>  </a:t>
+            </a:r>
+            <a:r>
+              <a:rPr lang="en-US" dirty="0">
+                <a:solidFill>
+                  <a:srgbClr val="0070C0"/>
+                </a:solidFill>
+              </a:rPr>
+              <a:t>793.38</a:t>
+            </a:r>
+            <a:r>
+              <a:rPr lang="en-US" dirty="0"/>
+              <a:t> </a:t>
             </a:r>
             <a:r>
               <a:rPr lang="en-US" dirty="0">
@@ -4005,7 +4471,19 @@
             </a:r>
             <a:r>
               <a:rPr lang="en-US" dirty="0"/>
-              <a:t>  1107.506 </a:t>
+              <a:t>  </a:t>
+            </a:r>
+            <a:r>
+              <a:rPr lang="en-US" dirty="0">
+                <a:solidFill>
+                  <a:srgbClr val="0070C0"/>
+                </a:solidFill>
+              </a:rPr>
+              <a:t>1107.506</a:t>
+            </a:r>
+            <a:r>
+              <a:rPr lang="en-US" dirty="0"/>
+              <a:t> </a:t>
             </a:r>
             <a:r>
               <a:rPr lang="en-US" dirty="0">
@@ -4015,7 +4493,19 @@
             </a:r>
             <a:r>
               <a:rPr lang="en-US" dirty="0"/>
-              <a:t>  1206.575 </a:t>
+              <a:t>  </a:t>
+            </a:r>
+            <a:r>
+              <a:rPr lang="en-US" dirty="0">
+                <a:solidFill>
+                  <a:srgbClr val="0070C0"/>
+                </a:solidFill>
+              </a:rPr>
+              <a:t>1206.575</a:t>
+            </a:r>
+            <a:r>
+              <a:rPr lang="en-US" dirty="0"/>
+              <a:t> </a:t>
             </a:r>
             <a:r>
               <a:rPr lang="en-US" dirty="0">
@@ -4092,7 +4582,7 @@
             <a:r>
               <a:rPr lang="en-US" sz="1800" b="0" i="0" u="none" strike="noStrike" dirty="0">
                 <a:solidFill>
-                  <a:srgbClr val="000000"/>
+                  <a:srgbClr val="0070C0"/>
                 </a:solidFill>
                 <a:effectLst/>
               </a:rPr>
@@ -4101,7 +4591,7 @@
             <a:r>
               <a:rPr lang="zh-CN" altLang="en-US" sz="1800" b="0" i="0" u="none" strike="noStrike" dirty="0">
                 <a:solidFill>
-                  <a:srgbClr val="000000"/>
+                  <a:srgbClr val="0070C0"/>
                 </a:solidFill>
                 <a:effectLst/>
               </a:rPr>
@@ -4146,7 +4636,7 @@
             <a:r>
               <a:rPr lang="en-US" dirty="0">
                 <a:solidFill>
-                  <a:srgbClr val="000000"/>
+                  <a:srgbClr val="0070C0"/>
                 </a:solidFill>
               </a:rPr>
               <a:t>, </a:t>
@@ -4154,7 +4644,7 @@
             <a:r>
               <a:rPr lang="en-US" sz="1800" b="0" i="0" u="none" strike="noStrike" dirty="0">
                 <a:solidFill>
-                  <a:srgbClr val="000000"/>
+                  <a:srgbClr val="0070C0"/>
                 </a:solidFill>
                 <a:effectLst/>
               </a:rPr>
@@ -4212,7 +4702,7 @@
             <a:r>
               <a:rPr lang="en-US" sz="1800" b="0" i="0" u="none" strike="noStrike" dirty="0">
                 <a:solidFill>
-                  <a:srgbClr val="000000"/>
+                  <a:srgbClr val="0070C0"/>
                 </a:solidFill>
                 <a:effectLst/>
               </a:rPr>
@@ -4270,7 +4760,7 @@
             <a:r>
               <a:rPr lang="en-US" sz="1800" b="0" i="0" u="none" strike="noStrike" dirty="0">
                 <a:solidFill>
-                  <a:srgbClr val="000000"/>
+                  <a:srgbClr val="0070C0"/>
                 </a:solidFill>
                 <a:effectLst/>
               </a:rPr>
@@ -4302,7 +4792,7 @@
             </a:r>
             <a:endParaRPr lang="en-US" b="0" i="0" u="none" strike="noStrike" dirty="0">
               <a:solidFill>
-                <a:srgbClr val="000000"/>
+                <a:srgbClr val="0070C0"/>
               </a:solidFill>
               <a:effectLst/>
             </a:endParaRPr>
@@ -4318,6 +4808,256 @@
               <a:rPr lang="en-US" dirty="0"/>
             </a:br>
             <a:endParaRPr lang="en-US" dirty="0"/>
+          </a:p>
+        </p:txBody>
+      </p:sp>
+      <p:sp>
+        <p:nvSpPr>
+          <p:cNvPr id="20" name="TextBox 19">
+            <a:extLst>
+              <a:ext uri="{FF2B5EF4-FFF2-40B4-BE49-F238E27FC236}">
+                <a16:creationId xmlns:a16="http://schemas.microsoft.com/office/drawing/2014/main" id="{B95E9448-87C4-1E75-E980-9BD2C5069E74}"/>
+              </a:ext>
+            </a:extLst>
+          </p:cNvPr>
+          <p:cNvSpPr txBox="1"/>
+          <p:nvPr/>
+        </p:nvSpPr>
+        <p:spPr>
+          <a:xfrm>
+            <a:off x="235493" y="4783217"/>
+            <a:ext cx="11721011" cy="646331"/>
+          </a:xfrm>
+          <a:prstGeom prst="rect">
+            <a:avLst/>
+          </a:prstGeom>
+          <a:noFill/>
+        </p:spPr>
+        <p:txBody>
+          <a:bodyPr wrap="square">
+            <a:spAutoFit/>
+          </a:bodyPr>
+          <a:lstStyle/>
+          <a:p>
+            <a:r>
+              <a:rPr lang="en-US" dirty="0"/>
+              <a:t>300.155 </a:t>
+            </a:r>
+            <a:r>
+              <a:rPr lang="en-US" dirty="0">
+                <a:sym typeface="Symbol" pitchFamily="2" charset="2"/>
+              </a:rPr>
+              <a:t></a:t>
+            </a:r>
+            <a:r>
+              <a:rPr lang="en-US" dirty="0"/>
+              <a:t> 415.182 </a:t>
+            </a:r>
+            <a:r>
+              <a:rPr lang="en-US" dirty="0">
+                <a:sym typeface="Symbol" pitchFamily="2" charset="2"/>
+              </a:rPr>
+              <a:t></a:t>
+            </a:r>
+            <a:r>
+              <a:rPr lang="en-US" dirty="0"/>
+              <a:t>  528.266 </a:t>
+            </a:r>
+            <a:r>
+              <a:rPr lang="en-US" dirty="0">
+                <a:sym typeface="Symbol" pitchFamily="2" charset="2"/>
+              </a:rPr>
+              <a:t></a:t>
+            </a:r>
+            <a:r>
+              <a:rPr lang="en-US" dirty="0"/>
+              <a:t>  </a:t>
+            </a:r>
+            <a:r>
+              <a:rPr lang="en-US" dirty="0">
+                <a:solidFill>
+                  <a:srgbClr val="0070C0"/>
+                </a:solidFill>
+              </a:rPr>
+              <a:t>599.303</a:t>
+            </a:r>
+            <a:r>
+              <a:rPr lang="en-US" dirty="0"/>
+              <a:t> </a:t>
+            </a:r>
+            <a:r>
+              <a:rPr lang="en-US" dirty="0">
+                <a:sym typeface="Symbol" pitchFamily="2" charset="2"/>
+              </a:rPr>
+              <a:t></a:t>
+            </a:r>
+            <a:r>
+              <a:rPr lang="en-US" dirty="0"/>
+              <a:t>  </a:t>
+            </a:r>
+            <a:r>
+              <a:rPr lang="en-US" dirty="0">
+                <a:solidFill>
+                  <a:srgbClr val="0070C0"/>
+                </a:solidFill>
+              </a:rPr>
+              <a:t>793.38</a:t>
+            </a:r>
+            <a:r>
+              <a:rPr lang="en-US" dirty="0"/>
+              <a:t> </a:t>
+            </a:r>
+            <a:r>
+              <a:rPr lang="en-US" dirty="0">
+                <a:sym typeface="Symbol" pitchFamily="2" charset="2"/>
+              </a:rPr>
+              <a:t></a:t>
+            </a:r>
+            <a:r>
+              <a:rPr lang="en-US" dirty="0"/>
+              <a:t>  850.405 </a:t>
+            </a:r>
+            <a:r>
+              <a:rPr lang="en-US" dirty="0">
+                <a:sym typeface="Symbol" pitchFamily="2" charset="2"/>
+              </a:rPr>
+              <a:t></a:t>
+            </a:r>
+            <a:r>
+              <a:rPr lang="en-US" dirty="0"/>
+              <a:t>  978.464 </a:t>
+            </a:r>
+            <a:r>
+              <a:rPr lang="en-US" dirty="0">
+                <a:sym typeface="Symbol" pitchFamily="2" charset="2"/>
+              </a:rPr>
+              <a:t></a:t>
+            </a:r>
+            <a:r>
+              <a:rPr lang="en-US" dirty="0"/>
+              <a:t>  1107.506 </a:t>
+            </a:r>
+            <a:r>
+              <a:rPr lang="en-US" dirty="0">
+                <a:sym typeface="Symbol" pitchFamily="2" charset="2"/>
+              </a:rPr>
+              <a:t></a:t>
+            </a:r>
+            <a:r>
+              <a:rPr lang="en-US" dirty="0"/>
+              <a:t>  </a:t>
+            </a:r>
+            <a:r>
+              <a:rPr lang="en-US" dirty="0">
+                <a:solidFill>
+                  <a:srgbClr val="0070C0"/>
+                </a:solidFill>
+              </a:rPr>
+              <a:t>1206.575</a:t>
+            </a:r>
+            <a:r>
+              <a:rPr lang="en-US" dirty="0"/>
+              <a:t> </a:t>
+            </a:r>
+            <a:r>
+              <a:rPr lang="en-US" dirty="0">
+                <a:sym typeface="Symbol" pitchFamily="2" charset="2"/>
+              </a:rPr>
+              <a:t></a:t>
+            </a:r>
+            <a:r>
+              <a:rPr lang="en-US" dirty="0"/>
+              <a:t> 1606.869</a:t>
+            </a:r>
+          </a:p>
+          <a:p>
+            <a:r>
+              <a:rPr lang="en-US" dirty="0"/>
+              <a:t> </a:t>
+            </a:r>
+          </a:p>
+        </p:txBody>
+      </p:sp>
+      <p:sp>
+        <p:nvSpPr>
+          <p:cNvPr id="21" name="TextBox 20">
+            <a:extLst>
+              <a:ext uri="{FF2B5EF4-FFF2-40B4-BE49-F238E27FC236}">
+                <a16:creationId xmlns:a16="http://schemas.microsoft.com/office/drawing/2014/main" id="{34DCFB0A-8D76-C9A4-85B1-95ED2B33526F}"/>
+              </a:ext>
+            </a:extLst>
+          </p:cNvPr>
+          <p:cNvSpPr txBox="1"/>
+          <p:nvPr/>
+        </p:nvSpPr>
+        <p:spPr>
+          <a:xfrm>
+            <a:off x="2484853" y="5269990"/>
+            <a:ext cx="6183460" cy="369332"/>
+          </a:xfrm>
+          <a:prstGeom prst="rect">
+            <a:avLst/>
+          </a:prstGeom>
+          <a:noFill/>
+        </p:spPr>
+        <p:txBody>
+          <a:bodyPr wrap="square">
+            <a:spAutoFit/>
+          </a:bodyPr>
+          <a:lstStyle/>
+          <a:p>
+            <a:pPr>
+              <a:spcBef>
+                <a:spcPts val="1200"/>
+              </a:spcBef>
+              <a:spcAft>
+                <a:spcPts val="1200"/>
+              </a:spcAft>
+            </a:pPr>
+            <a:r>
+              <a:rPr lang="en-US" dirty="0"/>
+              <a:t>501.356, </a:t>
+            </a:r>
+            <a:r>
+              <a:rPr lang="en-US" dirty="0">
+                <a:solidFill>
+                  <a:srgbClr val="0070C0"/>
+                </a:solidFill>
+              </a:rPr>
+              <a:t>599.303</a:t>
+            </a:r>
+            <a:r>
+              <a:rPr lang="en-US" dirty="0"/>
+              <a:t>, </a:t>
+            </a:r>
+            <a:r>
+              <a:rPr lang="en-US" dirty="0">
+                <a:solidFill>
+                  <a:srgbClr val="0070C0"/>
+                </a:solidFill>
+              </a:rPr>
+              <a:t>793.384</a:t>
+            </a:r>
+            <a:r>
+              <a:rPr lang="en-US" dirty="0"/>
+              <a:t>, 914.547,</a:t>
+            </a:r>
+            <a:r>
+              <a:rPr lang="zh-CN" altLang="en-US" dirty="0"/>
+              <a:t> </a:t>
+            </a:r>
+            <a:r>
+              <a:rPr lang="en-US" dirty="0"/>
+              <a:t>1108.627, </a:t>
+            </a:r>
+            <a:r>
+              <a:rPr lang="en-US" dirty="0">
+                <a:solidFill>
+                  <a:srgbClr val="0070C0"/>
+                </a:solidFill>
+              </a:rPr>
+              <a:t>1206.575</a:t>
+            </a:r>
           </a:p>
         </p:txBody>
       </p:sp>
@@ -4335,6 +5075,1107 @@
 </file>
 
 <file path=ppt/slides/slide3.xml><?xml version="1.0" encoding="utf-8"?>
+<p:sld xmlns:a="http://schemas.openxmlformats.org/drawingml/2006/main" xmlns:r="http://schemas.openxmlformats.org/officeDocument/2006/relationships" xmlns:p="http://schemas.openxmlformats.org/presentationml/2006/main">
+  <p:cSld>
+    <p:spTree>
+      <p:nvGrpSpPr>
+        <p:cNvPr id="1" name=""/>
+        <p:cNvGrpSpPr/>
+        <p:nvPr/>
+      </p:nvGrpSpPr>
+      <p:grpSpPr>
+        <a:xfrm>
+          <a:off x="0" y="0"/>
+          <a:ext cx="0" cy="0"/>
+          <a:chOff x="0" y="0"/>
+          <a:chExt cx="0" cy="0"/>
+        </a:xfrm>
+      </p:grpSpPr>
+      <p:sp>
+        <p:nvSpPr>
+          <p:cNvPr id="3" name="TextBox 2">
+            <a:extLst>
+              <a:ext uri="{FF2B5EF4-FFF2-40B4-BE49-F238E27FC236}">
+                <a16:creationId xmlns:a16="http://schemas.microsoft.com/office/drawing/2014/main" id="{641CCCE6-2F94-5269-293D-E25CCBD37253}"/>
+              </a:ext>
+            </a:extLst>
+          </p:cNvPr>
+          <p:cNvSpPr txBox="1"/>
+          <p:nvPr/>
+        </p:nvSpPr>
+        <p:spPr>
+          <a:xfrm>
+            <a:off x="264694" y="1591543"/>
+            <a:ext cx="11718759" cy="369332"/>
+          </a:xfrm>
+          <a:prstGeom prst="rect">
+            <a:avLst/>
+          </a:prstGeom>
+          <a:noFill/>
+        </p:spPr>
+        <p:txBody>
+          <a:bodyPr wrap="square">
+            <a:spAutoFit/>
+          </a:bodyPr>
+          <a:lstStyle/>
+          <a:p>
+            <a:r>
+              <a:rPr lang="en-US" dirty="0"/>
+              <a:t>300.155 </a:t>
+            </a:r>
+            <a:r>
+              <a:rPr lang="en-US" dirty="0">
+                <a:sym typeface="Symbol" pitchFamily="2" charset="2"/>
+              </a:rPr>
+              <a:t></a:t>
+            </a:r>
+            <a:r>
+              <a:rPr lang="en-US" dirty="0"/>
+              <a:t> 415.182 </a:t>
+            </a:r>
+            <a:r>
+              <a:rPr lang="en-US" dirty="0">
+                <a:sym typeface="Symbol" pitchFamily="2" charset="2"/>
+              </a:rPr>
+              <a:t></a:t>
+            </a:r>
+            <a:r>
+              <a:rPr lang="en-US" dirty="0"/>
+              <a:t>  528.266 </a:t>
+            </a:r>
+            <a:r>
+              <a:rPr lang="en-US" dirty="0">
+                <a:sym typeface="Symbol" pitchFamily="2" charset="2"/>
+              </a:rPr>
+              <a:t></a:t>
+            </a:r>
+            <a:r>
+              <a:rPr lang="en-US" dirty="0"/>
+              <a:t>  </a:t>
+            </a:r>
+            <a:r>
+              <a:rPr lang="en-US" dirty="0">
+                <a:solidFill>
+                  <a:srgbClr val="00B050"/>
+                </a:solidFill>
+              </a:rPr>
+              <a:t>599.303</a:t>
+            </a:r>
+            <a:r>
+              <a:rPr lang="en-US" dirty="0"/>
+              <a:t> </a:t>
+            </a:r>
+            <a:r>
+              <a:rPr lang="en-US" dirty="0">
+                <a:sym typeface="Symbol" pitchFamily="2" charset="2"/>
+              </a:rPr>
+              <a:t></a:t>
+            </a:r>
+            <a:r>
+              <a:rPr lang="en-US" dirty="0"/>
+              <a:t>  </a:t>
+            </a:r>
+            <a:r>
+              <a:rPr lang="en-US" dirty="0">
+                <a:solidFill>
+                  <a:srgbClr val="00B050"/>
+                </a:solidFill>
+              </a:rPr>
+              <a:t>793.38</a:t>
+            </a:r>
+            <a:r>
+              <a:rPr lang="en-US" dirty="0"/>
+              <a:t> </a:t>
+            </a:r>
+            <a:r>
+              <a:rPr lang="en-US" dirty="0">
+                <a:sym typeface="Symbol" pitchFamily="2" charset="2"/>
+              </a:rPr>
+              <a:t></a:t>
+            </a:r>
+            <a:r>
+              <a:rPr lang="en-US" dirty="0"/>
+              <a:t>  </a:t>
+            </a:r>
+            <a:r>
+              <a:rPr lang="en-US" dirty="0">
+                <a:solidFill>
+                  <a:srgbClr val="00B050"/>
+                </a:solidFill>
+              </a:rPr>
+              <a:t>850.405</a:t>
+            </a:r>
+            <a:r>
+              <a:rPr lang="en-US" dirty="0"/>
+              <a:t> </a:t>
+            </a:r>
+            <a:r>
+              <a:rPr lang="en-US" dirty="0">
+                <a:sym typeface="Symbol" pitchFamily="2" charset="2"/>
+              </a:rPr>
+              <a:t></a:t>
+            </a:r>
+            <a:r>
+              <a:rPr lang="en-US" dirty="0"/>
+              <a:t>  </a:t>
+            </a:r>
+            <a:r>
+              <a:rPr lang="en-US" dirty="0">
+                <a:solidFill>
+                  <a:srgbClr val="00B050"/>
+                </a:solidFill>
+              </a:rPr>
+              <a:t>978.464</a:t>
+            </a:r>
+            <a:r>
+              <a:rPr lang="en-US" dirty="0"/>
+              <a:t> </a:t>
+            </a:r>
+            <a:r>
+              <a:rPr lang="en-US" dirty="0">
+                <a:sym typeface="Symbol" pitchFamily="2" charset="2"/>
+              </a:rPr>
+              <a:t></a:t>
+            </a:r>
+            <a:r>
+              <a:rPr lang="en-US" dirty="0"/>
+              <a:t>  </a:t>
+            </a:r>
+            <a:r>
+              <a:rPr lang="en-US" dirty="0">
+                <a:solidFill>
+                  <a:srgbClr val="00B050"/>
+                </a:solidFill>
+              </a:rPr>
+              <a:t>1107.506</a:t>
+            </a:r>
+            <a:r>
+              <a:rPr lang="en-US" dirty="0"/>
+              <a:t> </a:t>
+            </a:r>
+            <a:r>
+              <a:rPr lang="en-US" dirty="0">
+                <a:sym typeface="Symbol" pitchFamily="2" charset="2"/>
+              </a:rPr>
+              <a:t></a:t>
+            </a:r>
+            <a:r>
+              <a:rPr lang="en-US" dirty="0"/>
+              <a:t>  </a:t>
+            </a:r>
+            <a:r>
+              <a:rPr lang="en-US" dirty="0">
+                <a:solidFill>
+                  <a:srgbClr val="00B050"/>
+                </a:solidFill>
+              </a:rPr>
+              <a:t>1206.575</a:t>
+            </a:r>
+            <a:r>
+              <a:rPr lang="en-US" dirty="0"/>
+              <a:t> </a:t>
+            </a:r>
+            <a:r>
+              <a:rPr lang="en-US" dirty="0">
+                <a:sym typeface="Symbol" pitchFamily="2" charset="2"/>
+              </a:rPr>
+              <a:t></a:t>
+            </a:r>
+            <a:r>
+              <a:rPr lang="en-US" dirty="0"/>
+              <a:t> 1606.869</a:t>
+            </a:r>
+          </a:p>
+        </p:txBody>
+      </p:sp>
+      <p:sp>
+        <p:nvSpPr>
+          <p:cNvPr id="7" name="TextBox 6">
+            <a:extLst>
+              <a:ext uri="{FF2B5EF4-FFF2-40B4-BE49-F238E27FC236}">
+                <a16:creationId xmlns:a16="http://schemas.microsoft.com/office/drawing/2014/main" id="{1494A77B-FEEB-23FE-3DEC-25DF392CA79D}"/>
+              </a:ext>
+            </a:extLst>
+          </p:cNvPr>
+          <p:cNvSpPr txBox="1"/>
+          <p:nvPr/>
+        </p:nvSpPr>
+        <p:spPr>
+          <a:xfrm>
+            <a:off x="457201" y="2228671"/>
+            <a:ext cx="11526252" cy="1200329"/>
+          </a:xfrm>
+          <a:prstGeom prst="rect">
+            <a:avLst/>
+          </a:prstGeom>
+          <a:noFill/>
+        </p:spPr>
+        <p:txBody>
+          <a:bodyPr wrap="square">
+            <a:spAutoFit/>
+          </a:bodyPr>
+          <a:lstStyle/>
+          <a:p>
+            <a:r>
+              <a:rPr lang="en-US" dirty="0"/>
+              <a:t>175.119, 288.203, </a:t>
+            </a:r>
+            <a:r>
+              <a:rPr lang="en-US" dirty="0">
+                <a:solidFill>
+                  <a:srgbClr val="00B050"/>
+                </a:solidFill>
+              </a:rPr>
+              <a:t>370.191 + 229.11</a:t>
+            </a:r>
+            <a:r>
+              <a:rPr lang="en-US" dirty="0"/>
+              <a:t>, 401.287, 427.213, 500.355, </a:t>
+            </a:r>
+            <a:r>
+              <a:rPr lang="en-US" dirty="0">
+                <a:solidFill>
+                  <a:srgbClr val="00B050"/>
+                </a:solidFill>
+              </a:rPr>
+              <a:t>564.272 + 229.11</a:t>
+            </a:r>
+            <a:r>
+              <a:rPr lang="en-US" dirty="0"/>
+              <a:t>, </a:t>
+            </a:r>
+            <a:r>
+              <a:rPr lang="en-US" dirty="0">
+                <a:solidFill>
+                  <a:srgbClr val="00B050"/>
+                </a:solidFill>
+              </a:rPr>
+              <a:t>621.293 + 229.11</a:t>
+            </a:r>
+            <a:r>
+              <a:rPr lang="en-US" dirty="0"/>
+              <a:t>, 629.398, </a:t>
+            </a:r>
+            <a:r>
+              <a:rPr lang="en-US" dirty="0">
+                <a:solidFill>
+                  <a:srgbClr val="00B050"/>
+                </a:solidFill>
+              </a:rPr>
+              <a:t>749.352 + 229.11</a:t>
+            </a:r>
+            <a:r>
+              <a:rPr lang="en-US" dirty="0"/>
+              <a:t>, 757.457, 814.478, </a:t>
+            </a:r>
+            <a:r>
+              <a:rPr lang="en-US" dirty="0">
+                <a:solidFill>
+                  <a:srgbClr val="00B050"/>
+                </a:solidFill>
+              </a:rPr>
+              <a:t>878.394 + 229.11</a:t>
+            </a:r>
+            <a:r>
+              <a:rPr lang="en-US" dirty="0"/>
+              <a:t>, 951.537, </a:t>
+            </a:r>
+            <a:r>
+              <a:rPr lang="en-US" dirty="0">
+                <a:solidFill>
+                  <a:srgbClr val="00B050"/>
+                </a:solidFill>
+              </a:rPr>
+              <a:t>977.463 + 229.11</a:t>
+            </a:r>
+            <a:r>
+              <a:rPr lang="en-US" dirty="0"/>
+              <a:t>, 1008.558, 1090.547, 1203.631</a:t>
+            </a:r>
+            <a:br>
+              <a:rPr lang="en-US" dirty="0"/>
+            </a:br>
+            <a:br>
+              <a:rPr lang="en-US" dirty="0"/>
+            </a:br>
+            <a:endParaRPr lang="en-US" dirty="0"/>
+          </a:p>
+        </p:txBody>
+      </p:sp>
+      <p:sp>
+        <p:nvSpPr>
+          <p:cNvPr id="9" name="TextBox 8">
+            <a:extLst>
+              <a:ext uri="{FF2B5EF4-FFF2-40B4-BE49-F238E27FC236}">
+                <a16:creationId xmlns:a16="http://schemas.microsoft.com/office/drawing/2014/main" id="{F648B409-FD6F-2953-3774-96259F23F478}"/>
+              </a:ext>
+            </a:extLst>
+          </p:cNvPr>
+          <p:cNvSpPr txBox="1"/>
+          <p:nvPr/>
+        </p:nvSpPr>
+        <p:spPr>
+          <a:xfrm>
+            <a:off x="1157038" y="3477945"/>
+            <a:ext cx="9623257" cy="369332"/>
+          </a:xfrm>
+          <a:prstGeom prst="rect">
+            <a:avLst/>
+          </a:prstGeom>
+          <a:noFill/>
+        </p:spPr>
+        <p:txBody>
+          <a:bodyPr wrap="square">
+            <a:spAutoFit/>
+          </a:bodyPr>
+          <a:lstStyle/>
+          <a:p>
+            <a:r>
+              <a:rPr lang="en-US" dirty="0"/>
+              <a:t>{300.155, 415.182, 528.266, 599.303, 793.38, 850.405, 978.464, 1107.506, 1206.575, 1606.869}</a:t>
+            </a:r>
+          </a:p>
+        </p:txBody>
+      </p:sp>
+      <p:sp>
+        <p:nvSpPr>
+          <p:cNvPr id="11" name="TextBox 10">
+            <a:extLst>
+              <a:ext uri="{FF2B5EF4-FFF2-40B4-BE49-F238E27FC236}">
+                <a16:creationId xmlns:a16="http://schemas.microsoft.com/office/drawing/2014/main" id="{35E9818F-0FAF-B6BB-3D90-2F1AA48E7B09}"/>
+              </a:ext>
+            </a:extLst>
+          </p:cNvPr>
+          <p:cNvSpPr txBox="1"/>
+          <p:nvPr/>
+        </p:nvSpPr>
+        <p:spPr>
+          <a:xfrm>
+            <a:off x="1157037" y="4352330"/>
+            <a:ext cx="6393689" cy="369332"/>
+          </a:xfrm>
+          <a:prstGeom prst="rect">
+            <a:avLst/>
+          </a:prstGeom>
+          <a:noFill/>
+        </p:spPr>
+        <p:txBody>
+          <a:bodyPr wrap="square">
+            <a:spAutoFit/>
+          </a:bodyPr>
+          <a:lstStyle/>
+          <a:p>
+            <a:r>
+              <a:rPr lang="en-US" sz="1800" b="0" i="0" u="none" strike="noStrike" dirty="0">
+                <a:solidFill>
+                  <a:srgbClr val="0070C0"/>
+                </a:solidFill>
+                <a:effectLst/>
+                <a:latin typeface="Arial" panose="020B0604020202020204" pitchFamily="34" charset="0"/>
+              </a:rPr>
+              <a:t>{401.287, 499.234, 693.315, 814.478, 1008.558, 1106.506}</a:t>
+            </a:r>
+            <a:endParaRPr lang="en-US" dirty="0">
+              <a:solidFill>
+                <a:srgbClr val="0070C0"/>
+              </a:solidFill>
+            </a:endParaRPr>
+          </a:p>
+        </p:txBody>
+      </p:sp>
+      <p:sp>
+        <p:nvSpPr>
+          <p:cNvPr id="13" name="TextBox 12">
+            <a:extLst>
+              <a:ext uri="{FF2B5EF4-FFF2-40B4-BE49-F238E27FC236}">
+                <a16:creationId xmlns:a16="http://schemas.microsoft.com/office/drawing/2014/main" id="{4E6D6985-3C8B-E906-9C4E-FA1EF0560026}"/>
+              </a:ext>
+            </a:extLst>
+          </p:cNvPr>
+          <p:cNvSpPr txBox="1"/>
+          <p:nvPr/>
+        </p:nvSpPr>
+        <p:spPr>
+          <a:xfrm>
+            <a:off x="1157038" y="5388409"/>
+            <a:ext cx="7048500" cy="1908215"/>
+          </a:xfrm>
+          <a:prstGeom prst="rect">
+            <a:avLst/>
+          </a:prstGeom>
+          <a:noFill/>
+        </p:spPr>
+        <p:txBody>
+          <a:bodyPr wrap="square">
+            <a:spAutoFit/>
+          </a:bodyPr>
+          <a:lstStyle/>
+          <a:p>
+            <a:pPr algn="l" rtl="0">
+              <a:spcBef>
+                <a:spcPts val="1200"/>
+              </a:spcBef>
+              <a:spcAft>
+                <a:spcPts val="1200"/>
+              </a:spcAft>
+              <a:buNone/>
+            </a:pPr>
+            <a:r>
+              <a:rPr lang="en-US" sz="1800" b="0" i="0" u="none" strike="noStrike" dirty="0">
+                <a:solidFill>
+                  <a:srgbClr val="00B050"/>
+                </a:solidFill>
+                <a:effectLst/>
+                <a:latin typeface="Arial" panose="020B0604020202020204" pitchFamily="34" charset="0"/>
+              </a:rPr>
+              <a:t>{175.119, 288.203, 370.191, 401.287, 427.213, 500.355, 564.272, 621.293, 629.398, 749.352, 757.457, 814.478, 878.394, 951.537, 977.463, 1008.558, 1090.547, 1203.631}</a:t>
+            </a:r>
+            <a:endParaRPr lang="en-US" b="0" i="0" u="none" strike="noStrike" dirty="0">
+              <a:solidFill>
+                <a:srgbClr val="00B050"/>
+              </a:solidFill>
+              <a:effectLst/>
+            </a:endParaRPr>
+          </a:p>
+          <a:p>
+            <a:pPr>
+              <a:buNone/>
+            </a:pPr>
+            <a:br>
+              <a:rPr lang="en-US" dirty="0"/>
+            </a:br>
+            <a:br>
+              <a:rPr lang="en-US" dirty="0"/>
+            </a:br>
+            <a:endParaRPr lang="en-US" dirty="0"/>
+          </a:p>
+        </p:txBody>
+      </p:sp>
+      <mc:AlternateContent xmlns:mc="http://schemas.openxmlformats.org/markup-compatibility/2006">
+        <mc:Choice xmlns:a14="http://schemas.microsoft.com/office/drawing/2010/main" Requires="a14">
+          <p:sp>
+            <p:nvSpPr>
+              <p:cNvPr id="15" name="TextBox 14">
+                <a:extLst>
+                  <a:ext uri="{FF2B5EF4-FFF2-40B4-BE49-F238E27FC236}">
+                    <a16:creationId xmlns:a16="http://schemas.microsoft.com/office/drawing/2014/main" id="{4164A055-4FA1-1EE3-252E-1F80796E07A0}"/>
+                  </a:ext>
+                </a:extLst>
+              </p:cNvPr>
+              <p:cNvSpPr txBox="1"/>
+              <p:nvPr/>
+            </p:nvSpPr>
+            <p:spPr>
+              <a:xfrm>
+                <a:off x="4094833" y="3966451"/>
+                <a:ext cx="224420" cy="276999"/>
+              </a:xfrm>
+              <a:prstGeom prst="rect">
+                <a:avLst/>
+              </a:prstGeom>
+              <a:noFill/>
+            </p:spPr>
+            <p:txBody>
+              <a:bodyPr wrap="none" lIns="0" tIns="0" rIns="0" bIns="0" rtlCol="0">
+                <a:spAutoFit/>
+              </a:bodyPr>
+              <a:lstStyle/>
+              <a:p>
+                <a14:m>
+                  <m:oMathPara xmlns:m="http://schemas.openxmlformats.org/officeDocument/2006/math">
+                    <m:oMathParaPr>
+                      <m:jc m:val="centerGroup"/>
+                    </m:oMathParaPr>
+                    <m:oMath xmlns:m="http://schemas.openxmlformats.org/officeDocument/2006/math">
+                      <m:r>
+                        <a:rPr lang="en-US" i="1" smtClean="0">
+                          <a:latin typeface="Cambria Math" panose="02040503050406030204" pitchFamily="18" charset="0"/>
+                          <a:ea typeface="Cambria Math" panose="02040503050406030204" pitchFamily="18" charset="0"/>
+                        </a:rPr>
+                        <m:t>⋃</m:t>
+                      </m:r>
+                    </m:oMath>
+                  </m:oMathPara>
+                </a14:m>
+                <a:endParaRPr lang="en-US" dirty="0"/>
+              </a:p>
+            </p:txBody>
+          </p:sp>
+        </mc:Choice>
+        <mc:Fallback>
+          <p:sp>
+            <p:nvSpPr>
+              <p:cNvPr id="15" name="TextBox 14">
+                <a:extLst>
+                  <a:ext uri="{FF2B5EF4-FFF2-40B4-BE49-F238E27FC236}">
+                    <a16:creationId xmlns:a16="http://schemas.microsoft.com/office/drawing/2014/main" id="{4164A055-4FA1-1EE3-252E-1F80796E07A0}"/>
+                  </a:ext>
+                </a:extLst>
+              </p:cNvPr>
+              <p:cNvSpPr txBox="1">
+                <a:spLocks noRot="1" noChangeAspect="1" noMove="1" noResize="1" noEditPoints="1" noAdjustHandles="1" noChangeArrowheads="1" noChangeShapeType="1" noTextEdit="1"/>
+              </p:cNvSpPr>
+              <p:nvPr/>
+            </p:nvSpPr>
+            <p:spPr>
+              <a:xfrm>
+                <a:off x="4094833" y="3966451"/>
+                <a:ext cx="224420" cy="276999"/>
+              </a:xfrm>
+              <a:prstGeom prst="rect">
+                <a:avLst/>
+              </a:prstGeom>
+              <a:blipFill>
+                <a:blip r:embed="rId2"/>
+                <a:stretch>
+                  <a:fillRect l="-26316" r="-26316" b="-13043"/>
+                </a:stretch>
+              </a:blipFill>
+            </p:spPr>
+            <p:txBody>
+              <a:bodyPr/>
+              <a:lstStyle/>
+              <a:p>
+                <a:r>
+                  <a:rPr lang="en-US">
+                    <a:noFill/>
+                  </a:rPr>
+                  <a:t> </a:t>
+                </a:r>
+              </a:p>
+            </p:txBody>
+          </p:sp>
+        </mc:Fallback>
+      </mc:AlternateContent>
+      <mc:AlternateContent xmlns:mc="http://schemas.openxmlformats.org/markup-compatibility/2006">
+        <mc:Choice xmlns:a14="http://schemas.microsoft.com/office/drawing/2010/main" Requires="a14">
+          <p:sp>
+            <p:nvSpPr>
+              <p:cNvPr id="16" name="TextBox 15">
+                <a:extLst>
+                  <a:ext uri="{FF2B5EF4-FFF2-40B4-BE49-F238E27FC236}">
+                    <a16:creationId xmlns:a16="http://schemas.microsoft.com/office/drawing/2014/main" id="{7A099735-A945-B219-BFDD-68EF6147295E}"/>
+                  </a:ext>
+                </a:extLst>
+              </p:cNvPr>
+              <p:cNvSpPr txBox="1"/>
+              <p:nvPr/>
+            </p:nvSpPr>
+            <p:spPr>
+              <a:xfrm>
+                <a:off x="4102854" y="4935947"/>
+                <a:ext cx="224420" cy="276999"/>
+              </a:xfrm>
+              <a:prstGeom prst="rect">
+                <a:avLst/>
+              </a:prstGeom>
+              <a:noFill/>
+            </p:spPr>
+            <p:txBody>
+              <a:bodyPr wrap="none" lIns="0" tIns="0" rIns="0" bIns="0" rtlCol="0">
+                <a:spAutoFit/>
+              </a:bodyPr>
+              <a:lstStyle/>
+              <a:p>
+                <a14:m>
+                  <m:oMathPara xmlns:m="http://schemas.openxmlformats.org/officeDocument/2006/math">
+                    <m:oMathParaPr>
+                      <m:jc m:val="centerGroup"/>
+                    </m:oMathParaPr>
+                    <m:oMath xmlns:m="http://schemas.openxmlformats.org/officeDocument/2006/math">
+                      <m:r>
+                        <a:rPr lang="en-US" i="1" smtClean="0">
+                          <a:latin typeface="Cambria Math" panose="02040503050406030204" pitchFamily="18" charset="0"/>
+                          <a:ea typeface="Cambria Math" panose="02040503050406030204" pitchFamily="18" charset="0"/>
+                        </a:rPr>
+                        <m:t>⋃</m:t>
+                      </m:r>
+                    </m:oMath>
+                  </m:oMathPara>
+                </a14:m>
+                <a:endParaRPr lang="en-US" dirty="0"/>
+              </a:p>
+            </p:txBody>
+          </p:sp>
+        </mc:Choice>
+        <mc:Fallback>
+          <p:sp>
+            <p:nvSpPr>
+              <p:cNvPr id="16" name="TextBox 15">
+                <a:extLst>
+                  <a:ext uri="{FF2B5EF4-FFF2-40B4-BE49-F238E27FC236}">
+                    <a16:creationId xmlns:a16="http://schemas.microsoft.com/office/drawing/2014/main" id="{7A099735-A945-B219-BFDD-68EF6147295E}"/>
+                  </a:ext>
+                </a:extLst>
+              </p:cNvPr>
+              <p:cNvSpPr txBox="1">
+                <a:spLocks noRot="1" noChangeAspect="1" noMove="1" noResize="1" noEditPoints="1" noAdjustHandles="1" noChangeArrowheads="1" noChangeShapeType="1" noTextEdit="1"/>
+              </p:cNvSpPr>
+              <p:nvPr/>
+            </p:nvSpPr>
+            <p:spPr>
+              <a:xfrm>
+                <a:off x="4102854" y="4935947"/>
+                <a:ext cx="224420" cy="276999"/>
+              </a:xfrm>
+              <a:prstGeom prst="rect">
+                <a:avLst/>
+              </a:prstGeom>
+              <a:blipFill>
+                <a:blip r:embed="rId3"/>
+                <a:stretch>
+                  <a:fillRect l="-33333" r="-33333" b="-13043"/>
+                </a:stretch>
+              </a:blipFill>
+            </p:spPr>
+            <p:txBody>
+              <a:bodyPr/>
+              <a:lstStyle/>
+              <a:p>
+                <a:r>
+                  <a:rPr lang="en-US">
+                    <a:noFill/>
+                  </a:rPr>
+                  <a:t> </a:t>
+                </a:r>
+              </a:p>
+            </p:txBody>
+          </p:sp>
+        </mc:Fallback>
+      </mc:AlternateContent>
+      <p:sp>
+        <p:nvSpPr>
+          <p:cNvPr id="17" name="TextBox 16">
+            <a:extLst>
+              <a:ext uri="{FF2B5EF4-FFF2-40B4-BE49-F238E27FC236}">
+                <a16:creationId xmlns:a16="http://schemas.microsoft.com/office/drawing/2014/main" id="{916892DE-383D-5E95-F950-66EB46824153}"/>
+              </a:ext>
+            </a:extLst>
+          </p:cNvPr>
+          <p:cNvSpPr txBox="1"/>
+          <p:nvPr/>
+        </p:nvSpPr>
+        <p:spPr>
+          <a:xfrm>
+            <a:off x="8734927" y="4566615"/>
+            <a:ext cx="1887455" cy="369332"/>
+          </a:xfrm>
+          <a:prstGeom prst="rect">
+            <a:avLst/>
+          </a:prstGeom>
+          <a:noFill/>
+        </p:spPr>
+        <p:txBody>
+          <a:bodyPr wrap="square" rtlCol="0">
+            <a:spAutoFit/>
+          </a:bodyPr>
+          <a:lstStyle/>
+          <a:p>
+            <a:r>
+              <a:rPr lang="en-US" dirty="0">
+                <a:solidFill>
+                  <a:srgbClr val="0070C0"/>
+                </a:solidFill>
+              </a:rPr>
+              <a:t>+100.069</a:t>
+            </a:r>
+          </a:p>
+        </p:txBody>
+      </p:sp>
+      <p:sp>
+        <p:nvSpPr>
+          <p:cNvPr id="18" name="TextBox 17">
+            <a:extLst>
+              <a:ext uri="{FF2B5EF4-FFF2-40B4-BE49-F238E27FC236}">
+                <a16:creationId xmlns:a16="http://schemas.microsoft.com/office/drawing/2014/main" id="{DA280170-1E75-CF00-8C2B-C611EEB89D84}"/>
+              </a:ext>
+            </a:extLst>
+          </p:cNvPr>
+          <p:cNvSpPr txBox="1"/>
+          <p:nvPr/>
+        </p:nvSpPr>
+        <p:spPr>
+          <a:xfrm>
+            <a:off x="8734927" y="5655285"/>
+            <a:ext cx="1887455" cy="369332"/>
+          </a:xfrm>
+          <a:prstGeom prst="rect">
+            <a:avLst/>
+          </a:prstGeom>
+          <a:noFill/>
+        </p:spPr>
+        <p:txBody>
+          <a:bodyPr wrap="square" rtlCol="0">
+            <a:spAutoFit/>
+          </a:bodyPr>
+          <a:lstStyle/>
+          <a:p>
+            <a:r>
+              <a:rPr lang="en-US" dirty="0">
+                <a:solidFill>
+                  <a:srgbClr val="00B050"/>
+                </a:solidFill>
+              </a:rPr>
+              <a:t>+229.112</a:t>
+            </a:r>
+          </a:p>
+        </p:txBody>
+      </p:sp>
+    </p:spTree>
+    <p:extLst>
+      <p:ext uri="{BB962C8B-B14F-4D97-AF65-F5344CB8AC3E}">
+        <p14:creationId xmlns:p14="http://schemas.microsoft.com/office/powerpoint/2010/main" val="3317361740"/>
+      </p:ext>
+    </p:extLst>
+  </p:cSld>
+  <p:clrMapOvr>
+    <a:masterClrMapping/>
+  </p:clrMapOvr>
+</p:sld>
+</file>
+
+<file path=ppt/slides/slide4.xml><?xml version="1.0" encoding="utf-8"?>
+<p:sld xmlns:a="http://schemas.openxmlformats.org/drawingml/2006/main" xmlns:r="http://schemas.openxmlformats.org/officeDocument/2006/relationships" xmlns:p="http://schemas.openxmlformats.org/presentationml/2006/main">
+  <p:cSld>
+    <p:spTree>
+      <p:nvGrpSpPr>
+        <p:cNvPr id="1" name=""/>
+        <p:cNvGrpSpPr/>
+        <p:nvPr/>
+      </p:nvGrpSpPr>
+      <p:grpSpPr>
+        <a:xfrm>
+          <a:off x="0" y="0"/>
+          <a:ext cx="0" cy="0"/>
+          <a:chOff x="0" y="0"/>
+          <a:chExt cx="0" cy="0"/>
+        </a:xfrm>
+      </p:grpSpPr>
+      <p:sp>
+        <p:nvSpPr>
+          <p:cNvPr id="2" name="TextBox 1">
+            <a:extLst>
+              <a:ext uri="{FF2B5EF4-FFF2-40B4-BE49-F238E27FC236}">
+                <a16:creationId xmlns:a16="http://schemas.microsoft.com/office/drawing/2014/main" id="{4267C95D-D797-5B44-8277-6E2F8FDDCF3D}"/>
+              </a:ext>
+            </a:extLst>
+          </p:cNvPr>
+          <p:cNvSpPr txBox="1"/>
+          <p:nvPr/>
+        </p:nvSpPr>
+        <p:spPr>
+          <a:xfrm>
+            <a:off x="264694" y="1591543"/>
+            <a:ext cx="11718759" cy="369332"/>
+          </a:xfrm>
+          <a:prstGeom prst="rect">
+            <a:avLst/>
+          </a:prstGeom>
+          <a:noFill/>
+        </p:spPr>
+        <p:txBody>
+          <a:bodyPr wrap="square">
+            <a:spAutoFit/>
+          </a:bodyPr>
+          <a:lstStyle/>
+          <a:p>
+            <a:r>
+              <a:rPr lang="en-US" dirty="0"/>
+              <a:t>300.155 </a:t>
+            </a:r>
+            <a:r>
+              <a:rPr lang="en-US" dirty="0">
+                <a:sym typeface="Symbol" pitchFamily="2" charset="2"/>
+              </a:rPr>
+              <a:t></a:t>
+            </a:r>
+            <a:r>
+              <a:rPr lang="en-US" dirty="0"/>
+              <a:t> 415.182 </a:t>
+            </a:r>
+            <a:r>
+              <a:rPr lang="en-US" dirty="0">
+                <a:sym typeface="Symbol" pitchFamily="2" charset="2"/>
+              </a:rPr>
+              <a:t></a:t>
+            </a:r>
+            <a:r>
+              <a:rPr lang="en-US" dirty="0"/>
+              <a:t>  528.266 </a:t>
+            </a:r>
+            <a:r>
+              <a:rPr lang="en-US" dirty="0">
+                <a:sym typeface="Symbol" pitchFamily="2" charset="2"/>
+              </a:rPr>
+              <a:t></a:t>
+            </a:r>
+            <a:r>
+              <a:rPr lang="en-US" dirty="0"/>
+              <a:t>  </a:t>
+            </a:r>
+            <a:r>
+              <a:rPr lang="en-US" dirty="0">
+                <a:solidFill>
+                  <a:srgbClr val="00B050"/>
+                </a:solidFill>
+              </a:rPr>
+              <a:t>599.303</a:t>
+            </a:r>
+            <a:r>
+              <a:rPr lang="en-US" dirty="0"/>
+              <a:t> </a:t>
+            </a:r>
+            <a:r>
+              <a:rPr lang="en-US" dirty="0">
+                <a:sym typeface="Symbol" pitchFamily="2" charset="2"/>
+              </a:rPr>
+              <a:t></a:t>
+            </a:r>
+            <a:r>
+              <a:rPr lang="en-US" dirty="0"/>
+              <a:t>  </a:t>
+            </a:r>
+            <a:r>
+              <a:rPr lang="en-US" dirty="0">
+                <a:solidFill>
+                  <a:srgbClr val="00B050"/>
+                </a:solidFill>
+              </a:rPr>
+              <a:t>793.38</a:t>
+            </a:r>
+            <a:r>
+              <a:rPr lang="en-US" dirty="0"/>
+              <a:t> </a:t>
+            </a:r>
+            <a:r>
+              <a:rPr lang="en-US" dirty="0">
+                <a:sym typeface="Symbol" pitchFamily="2" charset="2"/>
+              </a:rPr>
+              <a:t></a:t>
+            </a:r>
+            <a:r>
+              <a:rPr lang="en-US" dirty="0"/>
+              <a:t>  </a:t>
+            </a:r>
+            <a:r>
+              <a:rPr lang="en-US" dirty="0">
+                <a:solidFill>
+                  <a:srgbClr val="00B050"/>
+                </a:solidFill>
+              </a:rPr>
+              <a:t>850.405</a:t>
+            </a:r>
+            <a:r>
+              <a:rPr lang="en-US" dirty="0"/>
+              <a:t> </a:t>
+            </a:r>
+            <a:r>
+              <a:rPr lang="en-US" dirty="0">
+                <a:sym typeface="Symbol" pitchFamily="2" charset="2"/>
+              </a:rPr>
+              <a:t></a:t>
+            </a:r>
+            <a:r>
+              <a:rPr lang="en-US" dirty="0"/>
+              <a:t>  </a:t>
+            </a:r>
+            <a:r>
+              <a:rPr lang="en-US" dirty="0">
+                <a:solidFill>
+                  <a:srgbClr val="00B050"/>
+                </a:solidFill>
+              </a:rPr>
+              <a:t>978.464</a:t>
+            </a:r>
+            <a:r>
+              <a:rPr lang="en-US" dirty="0"/>
+              <a:t> </a:t>
+            </a:r>
+            <a:r>
+              <a:rPr lang="en-US" dirty="0">
+                <a:sym typeface="Symbol" pitchFamily="2" charset="2"/>
+              </a:rPr>
+              <a:t></a:t>
+            </a:r>
+            <a:r>
+              <a:rPr lang="en-US" dirty="0"/>
+              <a:t>  </a:t>
+            </a:r>
+            <a:r>
+              <a:rPr lang="en-US" dirty="0">
+                <a:solidFill>
+                  <a:srgbClr val="00B050"/>
+                </a:solidFill>
+              </a:rPr>
+              <a:t>1107.506</a:t>
+            </a:r>
+            <a:r>
+              <a:rPr lang="en-US" dirty="0"/>
+              <a:t> </a:t>
+            </a:r>
+            <a:r>
+              <a:rPr lang="en-US" dirty="0">
+                <a:sym typeface="Symbol" pitchFamily="2" charset="2"/>
+              </a:rPr>
+              <a:t></a:t>
+            </a:r>
+            <a:r>
+              <a:rPr lang="en-US" dirty="0"/>
+              <a:t>  </a:t>
+            </a:r>
+            <a:r>
+              <a:rPr lang="en-US" dirty="0">
+                <a:solidFill>
+                  <a:srgbClr val="00B050"/>
+                </a:solidFill>
+              </a:rPr>
+              <a:t>1206.575</a:t>
+            </a:r>
+            <a:r>
+              <a:rPr lang="en-US" dirty="0"/>
+              <a:t> </a:t>
+            </a:r>
+            <a:r>
+              <a:rPr lang="en-US" dirty="0">
+                <a:sym typeface="Symbol" pitchFamily="2" charset="2"/>
+              </a:rPr>
+              <a:t></a:t>
+            </a:r>
+            <a:r>
+              <a:rPr lang="en-US" dirty="0"/>
+              <a:t> 1606.869</a:t>
+            </a:r>
+          </a:p>
+        </p:txBody>
+      </p:sp>
+      <p:sp>
+        <p:nvSpPr>
+          <p:cNvPr id="5" name="TextBox 4">
+            <a:extLst>
+              <a:ext uri="{FF2B5EF4-FFF2-40B4-BE49-F238E27FC236}">
+                <a16:creationId xmlns:a16="http://schemas.microsoft.com/office/drawing/2014/main" id="{18DCC78D-EE54-95D5-9955-8FD9185717FB}"/>
+              </a:ext>
+            </a:extLst>
+          </p:cNvPr>
+          <p:cNvSpPr txBox="1"/>
+          <p:nvPr/>
+        </p:nvSpPr>
+        <p:spPr>
+          <a:xfrm>
+            <a:off x="457201" y="2228671"/>
+            <a:ext cx="11526252" cy="1200329"/>
+          </a:xfrm>
+          <a:prstGeom prst="rect">
+            <a:avLst/>
+          </a:prstGeom>
+          <a:noFill/>
+        </p:spPr>
+        <p:txBody>
+          <a:bodyPr wrap="square">
+            <a:spAutoFit/>
+          </a:bodyPr>
+          <a:lstStyle/>
+          <a:p>
+            <a:r>
+              <a:rPr lang="en-US" dirty="0"/>
+              <a:t>404.229, 517.313, </a:t>
+            </a:r>
+            <a:r>
+              <a:rPr lang="en-US" dirty="0">
+                <a:solidFill>
+                  <a:srgbClr val="00B050"/>
+                </a:solidFill>
+              </a:rPr>
+              <a:t>599.301</a:t>
+            </a:r>
+            <a:r>
+              <a:rPr lang="en-US" dirty="0"/>
+              <a:t>, 630.397, 656.323, 729.465, </a:t>
+            </a:r>
+            <a:r>
+              <a:rPr lang="en-US" dirty="0">
+                <a:solidFill>
+                  <a:srgbClr val="00B050"/>
+                </a:solidFill>
+              </a:rPr>
+              <a:t>793.382</a:t>
+            </a:r>
+            <a:r>
+              <a:rPr lang="en-US" dirty="0"/>
+              <a:t>, </a:t>
+            </a:r>
+            <a:r>
+              <a:rPr lang="en-US" dirty="0">
+                <a:solidFill>
+                  <a:srgbClr val="00B050"/>
+                </a:solidFill>
+              </a:rPr>
+              <a:t>850.403</a:t>
+            </a:r>
+            <a:r>
+              <a:rPr lang="en-US" dirty="0"/>
+              <a:t>, 858.508, </a:t>
+            </a:r>
+            <a:r>
+              <a:rPr lang="en-US" dirty="0">
+                <a:solidFill>
+                  <a:srgbClr val="00B050"/>
+                </a:solidFill>
+              </a:rPr>
+              <a:t>978.462</a:t>
+            </a:r>
+            <a:r>
+              <a:rPr lang="en-US" dirty="0"/>
+              <a:t>, 986.567, 1043.588, </a:t>
+            </a:r>
+            <a:r>
+              <a:rPr lang="en-US" dirty="0">
+                <a:solidFill>
+                  <a:srgbClr val="00B050"/>
+                </a:solidFill>
+              </a:rPr>
+              <a:t>1107.504</a:t>
+            </a:r>
+            <a:r>
+              <a:rPr lang="en-US" dirty="0"/>
+              <a:t>, 1180.647, </a:t>
+            </a:r>
+            <a:r>
+              <a:rPr lang="en-US" dirty="0">
+                <a:solidFill>
+                  <a:srgbClr val="00B050"/>
+                </a:solidFill>
+              </a:rPr>
+              <a:t>1206.573</a:t>
+            </a:r>
+            <a:r>
+              <a:rPr lang="en-US" dirty="0"/>
+              <a:t>, 1237.668, 1319.657, 1432.741</a:t>
+            </a:r>
+            <a:br>
+              <a:rPr lang="en-US" dirty="0"/>
+            </a:br>
+            <a:br>
+              <a:rPr lang="en-US" dirty="0"/>
+            </a:br>
+            <a:endParaRPr lang="en-US" dirty="0"/>
+          </a:p>
+        </p:txBody>
+      </p:sp>
+    </p:spTree>
+    <p:extLst>
+      <p:ext uri="{BB962C8B-B14F-4D97-AF65-F5344CB8AC3E}">
+        <p14:creationId xmlns:p14="http://schemas.microsoft.com/office/powerpoint/2010/main" val="1173353205"/>
+      </p:ext>
+    </p:extLst>
+  </p:cSld>
+  <p:clrMapOvr>
+    <a:masterClrMapping/>
+  </p:clrMapOvr>
+</p:sld>
+</file>
+
+<file path=ppt/slides/slide5.xml><?xml version="1.0" encoding="utf-8"?>
 <p:sld xmlns:a="http://schemas.openxmlformats.org/drawingml/2006/main" xmlns:r="http://schemas.openxmlformats.org/officeDocument/2006/relationships" xmlns:p="http://schemas.openxmlformats.org/presentationml/2006/main">
   <p:cSld>
     <p:spTree>
@@ -6394,6 +8235,4957 @@
     <p:extLst>
       <p:ext uri="{BB962C8B-B14F-4D97-AF65-F5344CB8AC3E}">
         <p14:creationId xmlns:p14="http://schemas.microsoft.com/office/powerpoint/2010/main" val="717998576"/>
+      </p:ext>
+    </p:extLst>
+  </p:cSld>
+  <p:clrMapOvr>
+    <a:masterClrMapping/>
+  </p:clrMapOvr>
+</p:sld>
+</file>
+
+<file path=ppt/slides/slide6.xml><?xml version="1.0" encoding="utf-8"?>
+<p:sld xmlns:a="http://schemas.openxmlformats.org/drawingml/2006/main" xmlns:r="http://schemas.openxmlformats.org/officeDocument/2006/relationships" xmlns:p="http://schemas.openxmlformats.org/presentationml/2006/main">
+  <p:cSld>
+    <p:spTree>
+      <p:nvGrpSpPr>
+        <p:cNvPr id="1" name=""/>
+        <p:cNvGrpSpPr/>
+        <p:nvPr/>
+      </p:nvGrpSpPr>
+      <p:grpSpPr>
+        <a:xfrm>
+          <a:off x="0" y="0"/>
+          <a:ext cx="0" cy="0"/>
+          <a:chOff x="0" y="0"/>
+          <a:chExt cx="0" cy="0"/>
+        </a:xfrm>
+      </p:grpSpPr>
+      <p:grpSp>
+        <p:nvGrpSpPr>
+          <p:cNvPr id="12" name="Group 11">
+            <a:extLst>
+              <a:ext uri="{FF2B5EF4-FFF2-40B4-BE49-F238E27FC236}">
+                <a16:creationId xmlns:a16="http://schemas.microsoft.com/office/drawing/2014/main" id="{2FC26566-9D28-8759-E86A-11B3C3175D01}"/>
+              </a:ext>
+            </a:extLst>
+          </p:cNvPr>
+          <p:cNvGrpSpPr/>
+          <p:nvPr/>
+        </p:nvGrpSpPr>
+        <p:grpSpPr>
+          <a:xfrm>
+            <a:off x="3569970" y="1500911"/>
+            <a:ext cx="2526030" cy="1513670"/>
+            <a:chOff x="3241965" y="1191762"/>
+            <a:chExt cx="4003962" cy="2950747"/>
+          </a:xfrm>
+        </p:grpSpPr>
+        <p:grpSp>
+          <p:nvGrpSpPr>
+            <p:cNvPr id="2" name="Group 1">
+              <a:extLst>
+                <a:ext uri="{FF2B5EF4-FFF2-40B4-BE49-F238E27FC236}">
+                  <a16:creationId xmlns:a16="http://schemas.microsoft.com/office/drawing/2014/main" id="{383902B2-65A4-14ED-DEE8-954FAC6B1C52}"/>
+                </a:ext>
+              </a:extLst>
+            </p:cNvPr>
+            <p:cNvGrpSpPr/>
+            <p:nvPr/>
+          </p:nvGrpSpPr>
+          <p:grpSpPr>
+            <a:xfrm>
+              <a:off x="3241965" y="1191762"/>
+              <a:ext cx="4003962" cy="2950747"/>
+              <a:chOff x="4266007" y="2155669"/>
+              <a:chExt cx="2831492" cy="1882483"/>
+            </a:xfrm>
+          </p:grpSpPr>
+          <p:cxnSp>
+            <p:nvCxnSpPr>
+              <p:cNvPr id="3" name="Straight Connector 2">
+                <a:extLst>
+                  <a:ext uri="{FF2B5EF4-FFF2-40B4-BE49-F238E27FC236}">
+                    <a16:creationId xmlns:a16="http://schemas.microsoft.com/office/drawing/2014/main" id="{80FFD551-6FC6-0E54-0087-9DC616FD6732}"/>
+                  </a:ext>
+                </a:extLst>
+              </p:cNvPr>
+              <p:cNvCxnSpPr/>
+              <p:nvPr/>
+            </p:nvCxnSpPr>
+            <p:spPr>
+              <a:xfrm>
+                <a:off x="4266007" y="2155669"/>
+                <a:ext cx="0" cy="1866378"/>
+              </a:xfrm>
+              <a:prstGeom prst="line">
+                <a:avLst/>
+              </a:prstGeom>
+            </p:spPr>
+            <p:style>
+              <a:lnRef idx="2">
+                <a:schemeClr val="accent1"/>
+              </a:lnRef>
+              <a:fillRef idx="0">
+                <a:schemeClr val="accent1"/>
+              </a:fillRef>
+              <a:effectRef idx="1">
+                <a:schemeClr val="accent1"/>
+              </a:effectRef>
+              <a:fontRef idx="minor">
+                <a:schemeClr val="tx1"/>
+              </a:fontRef>
+            </p:style>
+          </p:cxnSp>
+          <p:cxnSp>
+            <p:nvCxnSpPr>
+              <p:cNvPr id="4" name="Straight Connector 3">
+                <a:extLst>
+                  <a:ext uri="{FF2B5EF4-FFF2-40B4-BE49-F238E27FC236}">
+                    <a16:creationId xmlns:a16="http://schemas.microsoft.com/office/drawing/2014/main" id="{9D74BFA1-7D02-3D9F-36DD-583899131D0E}"/>
+                  </a:ext>
+                </a:extLst>
+              </p:cNvPr>
+              <p:cNvCxnSpPr>
+                <a:cxnSpLocks/>
+              </p:cNvCxnSpPr>
+              <p:nvPr/>
+            </p:nvCxnSpPr>
+            <p:spPr>
+              <a:xfrm flipH="1">
+                <a:off x="4266007" y="4038152"/>
+                <a:ext cx="2831492" cy="0"/>
+              </a:xfrm>
+              <a:prstGeom prst="line">
+                <a:avLst/>
+              </a:prstGeom>
+            </p:spPr>
+            <p:style>
+              <a:lnRef idx="2">
+                <a:schemeClr val="accent1"/>
+              </a:lnRef>
+              <a:fillRef idx="0">
+                <a:schemeClr val="accent1"/>
+              </a:fillRef>
+              <a:effectRef idx="1">
+                <a:schemeClr val="accent1"/>
+              </a:effectRef>
+              <a:fontRef idx="minor">
+                <a:schemeClr val="tx1"/>
+              </a:fontRef>
+            </p:style>
+          </p:cxnSp>
+          <p:cxnSp>
+            <p:nvCxnSpPr>
+              <p:cNvPr id="5" name="Straight Connector 4">
+                <a:extLst>
+                  <a:ext uri="{FF2B5EF4-FFF2-40B4-BE49-F238E27FC236}">
+                    <a16:creationId xmlns:a16="http://schemas.microsoft.com/office/drawing/2014/main" id="{B1E5A394-9D2D-68F5-5171-2DCF2DB238D7}"/>
+                  </a:ext>
+                </a:extLst>
+              </p:cNvPr>
+              <p:cNvCxnSpPr>
+                <a:cxnSpLocks/>
+              </p:cNvCxnSpPr>
+              <p:nvPr/>
+            </p:nvCxnSpPr>
+            <p:spPr>
+              <a:xfrm>
+                <a:off x="5276222" y="2732314"/>
+                <a:ext cx="0" cy="1305838"/>
+              </a:xfrm>
+              <a:prstGeom prst="line">
+                <a:avLst/>
+              </a:prstGeom>
+            </p:spPr>
+            <p:style>
+              <a:lnRef idx="2">
+                <a:schemeClr val="accent4"/>
+              </a:lnRef>
+              <a:fillRef idx="0">
+                <a:schemeClr val="accent4"/>
+              </a:fillRef>
+              <a:effectRef idx="1">
+                <a:schemeClr val="accent4"/>
+              </a:effectRef>
+              <a:fontRef idx="minor">
+                <a:schemeClr val="tx1"/>
+              </a:fontRef>
+            </p:style>
+          </p:cxnSp>
+          <p:cxnSp>
+            <p:nvCxnSpPr>
+              <p:cNvPr id="6" name="Straight Connector 5">
+                <a:extLst>
+                  <a:ext uri="{FF2B5EF4-FFF2-40B4-BE49-F238E27FC236}">
+                    <a16:creationId xmlns:a16="http://schemas.microsoft.com/office/drawing/2014/main" id="{3347A331-FC25-88E1-D440-D6A810E2E54B}"/>
+                  </a:ext>
+                </a:extLst>
+              </p:cNvPr>
+              <p:cNvCxnSpPr>
+                <a:cxnSpLocks/>
+              </p:cNvCxnSpPr>
+              <p:nvPr/>
+            </p:nvCxnSpPr>
+            <p:spPr>
+              <a:xfrm>
+                <a:off x="5769343" y="2269597"/>
+                <a:ext cx="0" cy="1768555"/>
+              </a:xfrm>
+              <a:prstGeom prst="line">
+                <a:avLst/>
+              </a:prstGeom>
+            </p:spPr>
+            <p:style>
+              <a:lnRef idx="2">
+                <a:schemeClr val="accent4"/>
+              </a:lnRef>
+              <a:fillRef idx="0">
+                <a:schemeClr val="accent4"/>
+              </a:fillRef>
+              <a:effectRef idx="1">
+                <a:schemeClr val="accent4"/>
+              </a:effectRef>
+              <a:fontRef idx="minor">
+                <a:schemeClr val="tx1"/>
+              </a:fontRef>
+            </p:style>
+          </p:cxnSp>
+          <p:cxnSp>
+            <p:nvCxnSpPr>
+              <p:cNvPr id="7" name="Straight Connector 6">
+                <a:extLst>
+                  <a:ext uri="{FF2B5EF4-FFF2-40B4-BE49-F238E27FC236}">
+                    <a16:creationId xmlns:a16="http://schemas.microsoft.com/office/drawing/2014/main" id="{F09239CC-3774-5A04-79E0-5C69E5EF9CF1}"/>
+                  </a:ext>
+                </a:extLst>
+              </p:cNvPr>
+              <p:cNvCxnSpPr>
+                <a:cxnSpLocks/>
+              </p:cNvCxnSpPr>
+              <p:nvPr/>
+            </p:nvCxnSpPr>
+            <p:spPr>
+              <a:xfrm>
+                <a:off x="6284302" y="3037114"/>
+                <a:ext cx="0" cy="1001038"/>
+              </a:xfrm>
+              <a:prstGeom prst="line">
+                <a:avLst/>
+              </a:prstGeom>
+            </p:spPr>
+            <p:style>
+              <a:lnRef idx="2">
+                <a:schemeClr val="accent4"/>
+              </a:lnRef>
+              <a:fillRef idx="0">
+                <a:schemeClr val="accent4"/>
+              </a:fillRef>
+              <a:effectRef idx="1">
+                <a:schemeClr val="accent4"/>
+              </a:effectRef>
+              <a:fontRef idx="minor">
+                <a:schemeClr val="tx1"/>
+              </a:fontRef>
+            </p:style>
+          </p:cxnSp>
+        </p:grpSp>
+        <p:cxnSp>
+          <p:nvCxnSpPr>
+            <p:cNvPr id="9" name="Straight Connector 8">
+              <a:extLst>
+                <a:ext uri="{FF2B5EF4-FFF2-40B4-BE49-F238E27FC236}">
+                  <a16:creationId xmlns:a16="http://schemas.microsoft.com/office/drawing/2014/main" id="{FC434C84-C8A1-A9B6-FD75-66F0CC01DE97}"/>
+                </a:ext>
+              </a:extLst>
+            </p:cNvPr>
+            <p:cNvCxnSpPr>
+              <a:cxnSpLocks/>
+            </p:cNvCxnSpPr>
+            <p:nvPr/>
+          </p:nvCxnSpPr>
+          <p:spPr>
+            <a:xfrm>
+              <a:off x="3950056" y="3020291"/>
+              <a:ext cx="0" cy="1122218"/>
+            </a:xfrm>
+            <a:prstGeom prst="line">
+              <a:avLst/>
+            </a:prstGeom>
+          </p:spPr>
+          <p:style>
+            <a:lnRef idx="2">
+              <a:schemeClr val="accent4"/>
+            </a:lnRef>
+            <a:fillRef idx="0">
+              <a:schemeClr val="accent4"/>
+            </a:fillRef>
+            <a:effectRef idx="1">
+              <a:schemeClr val="accent4"/>
+            </a:effectRef>
+            <a:fontRef idx="minor">
+              <a:schemeClr val="tx1"/>
+            </a:fontRef>
+          </p:style>
+        </p:cxnSp>
+      </p:grpSp>
+      <p:grpSp>
+        <p:nvGrpSpPr>
+          <p:cNvPr id="36" name="Group 35">
+            <a:extLst>
+              <a:ext uri="{FF2B5EF4-FFF2-40B4-BE49-F238E27FC236}">
+                <a16:creationId xmlns:a16="http://schemas.microsoft.com/office/drawing/2014/main" id="{873EA33C-8CA2-83B0-CC90-5923066DE565}"/>
+              </a:ext>
+            </a:extLst>
+          </p:cNvPr>
+          <p:cNvGrpSpPr/>
+          <p:nvPr/>
+        </p:nvGrpSpPr>
+        <p:grpSpPr>
+          <a:xfrm>
+            <a:off x="3569970" y="3415523"/>
+            <a:ext cx="2526024" cy="1981188"/>
+            <a:chOff x="1766455" y="3747610"/>
+            <a:chExt cx="3186545" cy="2132417"/>
+          </a:xfrm>
+        </p:grpSpPr>
+        <p:grpSp>
+          <p:nvGrpSpPr>
+            <p:cNvPr id="19" name="Group 18">
+              <a:extLst>
+                <a:ext uri="{FF2B5EF4-FFF2-40B4-BE49-F238E27FC236}">
+                  <a16:creationId xmlns:a16="http://schemas.microsoft.com/office/drawing/2014/main" id="{4AE42397-1DA3-A7A3-70E3-1958C1D4D918}"/>
+                </a:ext>
+              </a:extLst>
+            </p:cNvPr>
+            <p:cNvGrpSpPr/>
+            <p:nvPr/>
+          </p:nvGrpSpPr>
+          <p:grpSpPr>
+            <a:xfrm>
+              <a:off x="1766455" y="3747610"/>
+              <a:ext cx="3186545" cy="1863483"/>
+              <a:chOff x="3241965" y="1622603"/>
+              <a:chExt cx="4003962" cy="2519908"/>
+            </a:xfrm>
+          </p:grpSpPr>
+          <p:grpSp>
+            <p:nvGrpSpPr>
+              <p:cNvPr id="20" name="Group 19">
+                <a:extLst>
+                  <a:ext uri="{FF2B5EF4-FFF2-40B4-BE49-F238E27FC236}">
+                    <a16:creationId xmlns:a16="http://schemas.microsoft.com/office/drawing/2014/main" id="{9B456D21-BA62-1BC7-4469-07E6CCD02565}"/>
+                  </a:ext>
+                </a:extLst>
+              </p:cNvPr>
+              <p:cNvGrpSpPr/>
+              <p:nvPr/>
+            </p:nvGrpSpPr>
+            <p:grpSpPr>
+              <a:xfrm>
+                <a:off x="3241965" y="1622603"/>
+                <a:ext cx="4003962" cy="2519908"/>
+                <a:chOff x="4266007" y="2430531"/>
+                <a:chExt cx="2831492" cy="1607621"/>
+              </a:xfrm>
+            </p:grpSpPr>
+            <p:cxnSp>
+              <p:nvCxnSpPr>
+                <p:cNvPr id="23" name="Straight Connector 22">
+                  <a:extLst>
+                    <a:ext uri="{FF2B5EF4-FFF2-40B4-BE49-F238E27FC236}">
+                      <a16:creationId xmlns:a16="http://schemas.microsoft.com/office/drawing/2014/main" id="{A8F7885D-6BBB-0392-6B38-0F01C56ECD2D}"/>
+                    </a:ext>
+                  </a:extLst>
+                </p:cNvPr>
+                <p:cNvCxnSpPr>
+                  <a:cxnSpLocks/>
+                </p:cNvCxnSpPr>
+                <p:nvPr/>
+              </p:nvCxnSpPr>
+              <p:spPr>
+                <a:xfrm flipH="1">
+                  <a:off x="4266007" y="4038152"/>
+                  <a:ext cx="2831492" cy="0"/>
+                </a:xfrm>
+                <a:prstGeom prst="line">
+                  <a:avLst/>
+                </a:prstGeom>
+              </p:spPr>
+              <p:style>
+                <a:lnRef idx="2">
+                  <a:schemeClr val="accent1"/>
+                </a:lnRef>
+                <a:fillRef idx="0">
+                  <a:schemeClr val="accent1"/>
+                </a:fillRef>
+                <a:effectRef idx="1">
+                  <a:schemeClr val="accent1"/>
+                </a:effectRef>
+                <a:fontRef idx="minor">
+                  <a:schemeClr val="tx1"/>
+                </a:fontRef>
+              </p:style>
+            </p:cxnSp>
+            <p:cxnSp>
+              <p:nvCxnSpPr>
+                <p:cNvPr id="24" name="Straight Connector 23">
+                  <a:extLst>
+                    <a:ext uri="{FF2B5EF4-FFF2-40B4-BE49-F238E27FC236}">
+                      <a16:creationId xmlns:a16="http://schemas.microsoft.com/office/drawing/2014/main" id="{F118308C-F1FD-B66A-3B62-43E73B757276}"/>
+                    </a:ext>
+                  </a:extLst>
+                </p:cNvPr>
+                <p:cNvCxnSpPr>
+                  <a:cxnSpLocks/>
+                </p:cNvCxnSpPr>
+                <p:nvPr/>
+              </p:nvCxnSpPr>
+              <p:spPr>
+                <a:xfrm>
+                  <a:off x="5277290" y="2732313"/>
+                  <a:ext cx="0" cy="1305838"/>
+                </a:xfrm>
+                <a:prstGeom prst="line">
+                  <a:avLst/>
+                </a:prstGeom>
+              </p:spPr>
+              <p:style>
+                <a:lnRef idx="2">
+                  <a:schemeClr val="accent2"/>
+                </a:lnRef>
+                <a:fillRef idx="0">
+                  <a:schemeClr val="accent2"/>
+                </a:fillRef>
+                <a:effectRef idx="1">
+                  <a:schemeClr val="accent2"/>
+                </a:effectRef>
+                <a:fontRef idx="minor">
+                  <a:schemeClr val="tx1"/>
+                </a:fontRef>
+              </p:style>
+            </p:cxnSp>
+            <p:cxnSp>
+              <p:nvCxnSpPr>
+                <p:cNvPr id="25" name="Straight Connector 24">
+                  <a:extLst>
+                    <a:ext uri="{FF2B5EF4-FFF2-40B4-BE49-F238E27FC236}">
+                      <a16:creationId xmlns:a16="http://schemas.microsoft.com/office/drawing/2014/main" id="{FB9AA8CD-E580-BE10-8B34-3302FD802539}"/>
+                    </a:ext>
+                  </a:extLst>
+                </p:cNvPr>
+                <p:cNvCxnSpPr>
+                  <a:cxnSpLocks/>
+                </p:cNvCxnSpPr>
+                <p:nvPr/>
+              </p:nvCxnSpPr>
+              <p:spPr>
+                <a:xfrm>
+                  <a:off x="5769343" y="2430531"/>
+                  <a:ext cx="0" cy="1607621"/>
+                </a:xfrm>
+                <a:prstGeom prst="line">
+                  <a:avLst/>
+                </a:prstGeom>
+              </p:spPr>
+              <p:style>
+                <a:lnRef idx="2">
+                  <a:schemeClr val="accent2"/>
+                </a:lnRef>
+                <a:fillRef idx="0">
+                  <a:schemeClr val="accent2"/>
+                </a:fillRef>
+                <a:effectRef idx="1">
+                  <a:schemeClr val="accent2"/>
+                </a:effectRef>
+                <a:fontRef idx="minor">
+                  <a:schemeClr val="tx1"/>
+                </a:fontRef>
+              </p:style>
+            </p:cxnSp>
+            <p:cxnSp>
+              <p:nvCxnSpPr>
+                <p:cNvPr id="26" name="Straight Connector 25">
+                  <a:extLst>
+                    <a:ext uri="{FF2B5EF4-FFF2-40B4-BE49-F238E27FC236}">
+                      <a16:creationId xmlns:a16="http://schemas.microsoft.com/office/drawing/2014/main" id="{1C667B31-6E43-C4E3-C69D-FB8EFBA45FBC}"/>
+                    </a:ext>
+                  </a:extLst>
+                </p:cNvPr>
+                <p:cNvCxnSpPr>
+                  <a:cxnSpLocks/>
+                </p:cNvCxnSpPr>
+                <p:nvPr/>
+              </p:nvCxnSpPr>
+              <p:spPr>
+                <a:xfrm>
+                  <a:off x="6284302" y="3153874"/>
+                  <a:ext cx="0" cy="884278"/>
+                </a:xfrm>
+                <a:prstGeom prst="line">
+                  <a:avLst/>
+                </a:prstGeom>
+              </p:spPr>
+              <p:style>
+                <a:lnRef idx="2">
+                  <a:schemeClr val="accent2"/>
+                </a:lnRef>
+                <a:fillRef idx="0">
+                  <a:schemeClr val="accent2"/>
+                </a:fillRef>
+                <a:effectRef idx="1">
+                  <a:schemeClr val="accent2"/>
+                </a:effectRef>
+                <a:fontRef idx="minor">
+                  <a:schemeClr val="tx1"/>
+                </a:fontRef>
+              </p:style>
+            </p:cxnSp>
+          </p:grpSp>
+          <p:cxnSp>
+            <p:nvCxnSpPr>
+              <p:cNvPr id="21" name="Straight Connector 20">
+                <a:extLst>
+                  <a:ext uri="{FF2B5EF4-FFF2-40B4-BE49-F238E27FC236}">
+                    <a16:creationId xmlns:a16="http://schemas.microsoft.com/office/drawing/2014/main" id="{48DF321D-624A-3DA2-7434-2BEA71803D7C}"/>
+                  </a:ext>
+                </a:extLst>
+              </p:cNvPr>
+              <p:cNvCxnSpPr>
+                <a:cxnSpLocks/>
+              </p:cNvCxnSpPr>
+              <p:nvPr/>
+            </p:nvCxnSpPr>
+            <p:spPr>
+              <a:xfrm>
+                <a:off x="3950056" y="3357957"/>
+                <a:ext cx="0" cy="784552"/>
+              </a:xfrm>
+              <a:prstGeom prst="line">
+                <a:avLst/>
+              </a:prstGeom>
+            </p:spPr>
+            <p:style>
+              <a:lnRef idx="3">
+                <a:schemeClr val="accent5"/>
+              </a:lnRef>
+              <a:fillRef idx="0">
+                <a:schemeClr val="accent5"/>
+              </a:fillRef>
+              <a:effectRef idx="2">
+                <a:schemeClr val="accent5"/>
+              </a:effectRef>
+              <a:fontRef idx="minor">
+                <a:schemeClr val="tx1"/>
+              </a:fontRef>
+            </p:style>
+          </p:cxnSp>
+        </p:grpSp>
+        <p:sp>
+          <p:nvSpPr>
+            <p:cNvPr id="32" name="TextBox 31">
+              <a:extLst>
+                <a:ext uri="{FF2B5EF4-FFF2-40B4-BE49-F238E27FC236}">
+                  <a16:creationId xmlns:a16="http://schemas.microsoft.com/office/drawing/2014/main" id="{6DA71C94-F802-EBDF-FB72-BFB0925B695F}"/>
+                </a:ext>
+              </a:extLst>
+            </p:cNvPr>
+            <p:cNvSpPr txBox="1"/>
+            <p:nvPr/>
+          </p:nvSpPr>
+          <p:spPr>
+            <a:xfrm>
+              <a:off x="2038440" y="5705061"/>
+              <a:ext cx="583096" cy="174966"/>
+            </a:xfrm>
+            <a:prstGeom prst="rect">
+              <a:avLst/>
+            </a:prstGeom>
+            <a:noFill/>
+          </p:spPr>
+          <p:txBody>
+            <a:bodyPr wrap="square" rtlCol="0">
+              <a:spAutoFit/>
+            </a:bodyPr>
+            <a:lstStyle/>
+            <a:p>
+              <a:r>
+                <a:rPr lang="en-US" altLang="zh-CN" sz="600" dirty="0"/>
+                <a:t>1000.50</a:t>
+              </a:r>
+              <a:endParaRPr lang="en-US" sz="600" dirty="0"/>
+            </a:p>
+          </p:txBody>
+        </p:sp>
+        <p:sp>
+          <p:nvSpPr>
+            <p:cNvPr id="33" name="TextBox 32">
+              <a:extLst>
+                <a:ext uri="{FF2B5EF4-FFF2-40B4-BE49-F238E27FC236}">
+                  <a16:creationId xmlns:a16="http://schemas.microsoft.com/office/drawing/2014/main" id="{1ACBD314-46A0-75BD-E693-DF16AA195641}"/>
+                </a:ext>
+              </a:extLst>
+            </p:cNvPr>
+            <p:cNvSpPr txBox="1"/>
+            <p:nvPr/>
+          </p:nvSpPr>
+          <p:spPr>
+            <a:xfrm>
+              <a:off x="2612999" y="5705061"/>
+              <a:ext cx="583096" cy="174966"/>
+            </a:xfrm>
+            <a:prstGeom prst="rect">
+              <a:avLst/>
+            </a:prstGeom>
+            <a:noFill/>
+          </p:spPr>
+          <p:txBody>
+            <a:bodyPr wrap="square" rtlCol="0">
+              <a:spAutoFit/>
+            </a:bodyPr>
+            <a:lstStyle/>
+            <a:p>
+              <a:r>
+                <a:rPr lang="en-US" altLang="zh-CN" sz="600" dirty="0"/>
+                <a:t>1001.50</a:t>
+              </a:r>
+              <a:endParaRPr lang="en-US" sz="600" dirty="0"/>
+            </a:p>
+          </p:txBody>
+        </p:sp>
+        <p:sp>
+          <p:nvSpPr>
+            <p:cNvPr id="34" name="TextBox 33">
+              <a:extLst>
+                <a:ext uri="{FF2B5EF4-FFF2-40B4-BE49-F238E27FC236}">
+                  <a16:creationId xmlns:a16="http://schemas.microsoft.com/office/drawing/2014/main" id="{30793A9F-1C03-9097-02D5-025E04943C0E}"/>
+                </a:ext>
+              </a:extLst>
+            </p:cNvPr>
+            <p:cNvSpPr txBox="1"/>
+            <p:nvPr/>
+          </p:nvSpPr>
+          <p:spPr>
+            <a:xfrm>
+              <a:off x="3187558" y="5705061"/>
+              <a:ext cx="583096" cy="174966"/>
+            </a:xfrm>
+            <a:prstGeom prst="rect">
+              <a:avLst/>
+            </a:prstGeom>
+            <a:noFill/>
+          </p:spPr>
+          <p:txBody>
+            <a:bodyPr wrap="square" rtlCol="0">
+              <a:spAutoFit/>
+            </a:bodyPr>
+            <a:lstStyle/>
+            <a:p>
+              <a:r>
+                <a:rPr lang="en-US" altLang="zh-CN" sz="600" dirty="0"/>
+                <a:t>1002.50</a:t>
+              </a:r>
+              <a:endParaRPr lang="en-US" sz="600" dirty="0"/>
+            </a:p>
+          </p:txBody>
+        </p:sp>
+        <p:sp>
+          <p:nvSpPr>
+            <p:cNvPr id="35" name="TextBox 34">
+              <a:extLst>
+                <a:ext uri="{FF2B5EF4-FFF2-40B4-BE49-F238E27FC236}">
+                  <a16:creationId xmlns:a16="http://schemas.microsoft.com/office/drawing/2014/main" id="{59E5CA1C-DA2A-F487-3913-E420CF23CCD3}"/>
+                </a:ext>
+              </a:extLst>
+            </p:cNvPr>
+            <p:cNvSpPr txBox="1"/>
+            <p:nvPr/>
+          </p:nvSpPr>
+          <p:spPr>
+            <a:xfrm>
+              <a:off x="3777691" y="5705061"/>
+              <a:ext cx="583096" cy="174966"/>
+            </a:xfrm>
+            <a:prstGeom prst="rect">
+              <a:avLst/>
+            </a:prstGeom>
+            <a:noFill/>
+          </p:spPr>
+          <p:txBody>
+            <a:bodyPr wrap="square" rtlCol="0">
+              <a:spAutoFit/>
+            </a:bodyPr>
+            <a:lstStyle/>
+            <a:p>
+              <a:r>
+                <a:rPr lang="en-US" altLang="zh-CN" sz="600" dirty="0"/>
+                <a:t>1003.50</a:t>
+              </a:r>
+              <a:endParaRPr lang="en-US" sz="600" dirty="0"/>
+            </a:p>
+          </p:txBody>
+        </p:sp>
+      </p:grpSp>
+      <p:sp>
+        <p:nvSpPr>
+          <p:cNvPr id="37" name="TextBox 36">
+            <a:extLst>
+              <a:ext uri="{FF2B5EF4-FFF2-40B4-BE49-F238E27FC236}">
+                <a16:creationId xmlns:a16="http://schemas.microsoft.com/office/drawing/2014/main" id="{A6F4CF69-A61C-842D-77AA-8E5D1937CE58}"/>
+              </a:ext>
+            </a:extLst>
+          </p:cNvPr>
+          <p:cNvSpPr txBox="1"/>
+          <p:nvPr/>
+        </p:nvSpPr>
+        <p:spPr>
+          <a:xfrm>
+            <a:off x="4779887" y="633214"/>
+            <a:ext cx="4034701" cy="369332"/>
+          </a:xfrm>
+          <a:prstGeom prst="rect">
+            <a:avLst/>
+          </a:prstGeom>
+          <a:noFill/>
+        </p:spPr>
+        <p:txBody>
+          <a:bodyPr wrap="square" rtlCol="0">
+            <a:spAutoFit/>
+          </a:bodyPr>
+          <a:lstStyle/>
+          <a:p>
+            <a:r>
+              <a:rPr lang="en-US" dirty="0"/>
+              <a:t>Theoretical Intensity Distribution</a:t>
+            </a:r>
+          </a:p>
+        </p:txBody>
+      </p:sp>
+      <p:cxnSp>
+        <p:nvCxnSpPr>
+          <p:cNvPr id="39" name="Straight Connector 38">
+            <a:extLst>
+              <a:ext uri="{FF2B5EF4-FFF2-40B4-BE49-F238E27FC236}">
+                <a16:creationId xmlns:a16="http://schemas.microsoft.com/office/drawing/2014/main" id="{3374E097-6E76-88E7-371B-0F7510667752}"/>
+              </a:ext>
+            </a:extLst>
+          </p:cNvPr>
+          <p:cNvCxnSpPr>
+            <a:cxnSpLocks/>
+          </p:cNvCxnSpPr>
+          <p:nvPr/>
+        </p:nvCxnSpPr>
+        <p:spPr>
+          <a:xfrm>
+            <a:off x="4016691" y="3403600"/>
+            <a:ext cx="0" cy="779004"/>
+          </a:xfrm>
+          <a:prstGeom prst="line">
+            <a:avLst/>
+          </a:prstGeom>
+          <a:ln w="19050" cap="flat" cmpd="sng" algn="ctr">
+            <a:solidFill>
+              <a:schemeClr val="accent6"/>
+            </a:solidFill>
+            <a:prstDash val="dash"/>
+            <a:round/>
+            <a:headEnd type="none" w="med" len="med"/>
+            <a:tailEnd type="none" w="med" len="med"/>
+          </a:ln>
+        </p:spPr>
+        <p:style>
+          <a:lnRef idx="0">
+            <a:scrgbClr r="0" g="0" b="0"/>
+          </a:lnRef>
+          <a:fillRef idx="0">
+            <a:scrgbClr r="0" g="0" b="0"/>
+          </a:fillRef>
+          <a:effectRef idx="0">
+            <a:scrgbClr r="0" g="0" b="0"/>
+          </a:effectRef>
+          <a:fontRef idx="minor">
+            <a:schemeClr val="tx1"/>
+          </a:fontRef>
+        </p:style>
+      </p:cxnSp>
+      <p:cxnSp>
+        <p:nvCxnSpPr>
+          <p:cNvPr id="41" name="Straight Connector 40">
+            <a:extLst>
+              <a:ext uri="{FF2B5EF4-FFF2-40B4-BE49-F238E27FC236}">
+                <a16:creationId xmlns:a16="http://schemas.microsoft.com/office/drawing/2014/main" id="{FC0B8881-BAB4-96D5-17B4-131D4C040F3E}"/>
+              </a:ext>
+            </a:extLst>
+          </p:cNvPr>
+          <p:cNvCxnSpPr>
+            <a:cxnSpLocks/>
+          </p:cNvCxnSpPr>
+          <p:nvPr/>
+        </p:nvCxnSpPr>
+        <p:spPr>
+          <a:xfrm>
+            <a:off x="4454474" y="3166498"/>
+            <a:ext cx="0" cy="474204"/>
+          </a:xfrm>
+          <a:prstGeom prst="line">
+            <a:avLst/>
+          </a:prstGeom>
+          <a:ln w="19050" cap="flat" cmpd="sng" algn="ctr">
+            <a:solidFill>
+              <a:schemeClr val="accent6"/>
+            </a:solidFill>
+            <a:prstDash val="dash"/>
+            <a:round/>
+            <a:headEnd type="none" w="med" len="med"/>
+            <a:tailEnd type="none" w="med" len="med"/>
+          </a:ln>
+        </p:spPr>
+        <p:style>
+          <a:lnRef idx="0">
+            <a:scrgbClr r="0" g="0" b="0"/>
+          </a:lnRef>
+          <a:fillRef idx="0">
+            <a:scrgbClr r="0" g="0" b="0"/>
+          </a:fillRef>
+          <a:effectRef idx="0">
+            <a:scrgbClr r="0" g="0" b="0"/>
+          </a:effectRef>
+          <a:fontRef idx="minor">
+            <a:schemeClr val="tx1"/>
+          </a:fontRef>
+        </p:style>
+      </p:cxnSp>
+      <p:cxnSp>
+        <p:nvCxnSpPr>
+          <p:cNvPr id="43" name="Straight Connector 42">
+            <a:extLst>
+              <a:ext uri="{FF2B5EF4-FFF2-40B4-BE49-F238E27FC236}">
+                <a16:creationId xmlns:a16="http://schemas.microsoft.com/office/drawing/2014/main" id="{A0DB4A5F-AF19-A0C1-7583-EDF88EF78B51}"/>
+              </a:ext>
+            </a:extLst>
+          </p:cNvPr>
+          <p:cNvCxnSpPr>
+            <a:cxnSpLocks/>
+          </p:cNvCxnSpPr>
+          <p:nvPr/>
+        </p:nvCxnSpPr>
+        <p:spPr>
+          <a:xfrm>
+            <a:off x="4911123" y="3075058"/>
+            <a:ext cx="0" cy="182880"/>
+          </a:xfrm>
+          <a:prstGeom prst="line">
+            <a:avLst/>
+          </a:prstGeom>
+          <a:ln w="19050" cap="flat" cmpd="sng" algn="ctr">
+            <a:solidFill>
+              <a:schemeClr val="accent6"/>
+            </a:solidFill>
+            <a:prstDash val="dash"/>
+            <a:round/>
+            <a:headEnd type="none" w="med" len="med"/>
+            <a:tailEnd type="none" w="med" len="med"/>
+          </a:ln>
+        </p:spPr>
+        <p:style>
+          <a:lnRef idx="0">
+            <a:scrgbClr r="0" g="0" b="0"/>
+          </a:lnRef>
+          <a:fillRef idx="0">
+            <a:scrgbClr r="0" g="0" b="0"/>
+          </a:fillRef>
+          <a:effectRef idx="0">
+            <a:scrgbClr r="0" g="0" b="0"/>
+          </a:effectRef>
+          <a:fontRef idx="minor">
+            <a:schemeClr val="tx1"/>
+          </a:fontRef>
+        </p:style>
+      </p:cxnSp>
+      <p:cxnSp>
+        <p:nvCxnSpPr>
+          <p:cNvPr id="47" name="Straight Connector 46">
+            <a:extLst>
+              <a:ext uri="{FF2B5EF4-FFF2-40B4-BE49-F238E27FC236}">
+                <a16:creationId xmlns:a16="http://schemas.microsoft.com/office/drawing/2014/main" id="{3C822F98-0E69-D5AE-4BD7-A1F032CEE6E1}"/>
+              </a:ext>
+            </a:extLst>
+          </p:cNvPr>
+          <p:cNvCxnSpPr>
+            <a:cxnSpLocks/>
+          </p:cNvCxnSpPr>
+          <p:nvPr/>
+        </p:nvCxnSpPr>
+        <p:spPr>
+          <a:xfrm>
+            <a:off x="5384630" y="3257938"/>
+            <a:ext cx="0" cy="734942"/>
+          </a:xfrm>
+          <a:prstGeom prst="line">
+            <a:avLst/>
+          </a:prstGeom>
+          <a:ln w="19050" cap="flat" cmpd="sng" algn="ctr">
+            <a:solidFill>
+              <a:schemeClr val="accent6"/>
+            </a:solidFill>
+            <a:prstDash val="dash"/>
+            <a:round/>
+            <a:headEnd type="none" w="med" len="med"/>
+            <a:tailEnd type="none" w="med" len="med"/>
+          </a:ln>
+        </p:spPr>
+        <p:style>
+          <a:lnRef idx="0">
+            <a:scrgbClr r="0" g="0" b="0"/>
+          </a:lnRef>
+          <a:fillRef idx="0">
+            <a:scrgbClr r="0" g="0" b="0"/>
+          </a:fillRef>
+          <a:effectRef idx="0">
+            <a:scrgbClr r="0" g="0" b="0"/>
+          </a:effectRef>
+          <a:fontRef idx="minor">
+            <a:schemeClr val="tx1"/>
+          </a:fontRef>
+        </p:style>
+      </p:cxnSp>
+      <p:grpSp>
+        <p:nvGrpSpPr>
+          <p:cNvPr id="49" name="Group 48">
+            <a:extLst>
+              <a:ext uri="{FF2B5EF4-FFF2-40B4-BE49-F238E27FC236}">
+                <a16:creationId xmlns:a16="http://schemas.microsoft.com/office/drawing/2014/main" id="{0B7CE30B-38DC-C7F4-62DD-AD8DFFE349C3}"/>
+              </a:ext>
+            </a:extLst>
+          </p:cNvPr>
+          <p:cNvGrpSpPr/>
+          <p:nvPr/>
+        </p:nvGrpSpPr>
+        <p:grpSpPr>
+          <a:xfrm>
+            <a:off x="765194" y="1505512"/>
+            <a:ext cx="2526030" cy="1513670"/>
+            <a:chOff x="3241965" y="1191762"/>
+            <a:chExt cx="4003962" cy="2950747"/>
+          </a:xfrm>
+        </p:grpSpPr>
+        <p:grpSp>
+          <p:nvGrpSpPr>
+            <p:cNvPr id="50" name="Group 49">
+              <a:extLst>
+                <a:ext uri="{FF2B5EF4-FFF2-40B4-BE49-F238E27FC236}">
+                  <a16:creationId xmlns:a16="http://schemas.microsoft.com/office/drawing/2014/main" id="{CE09604C-A39A-9F90-101D-BF51A64F51E9}"/>
+                </a:ext>
+              </a:extLst>
+            </p:cNvPr>
+            <p:cNvGrpSpPr/>
+            <p:nvPr/>
+          </p:nvGrpSpPr>
+          <p:grpSpPr>
+            <a:xfrm>
+              <a:off x="3241965" y="1191762"/>
+              <a:ext cx="4003962" cy="2950747"/>
+              <a:chOff x="4266007" y="2155669"/>
+              <a:chExt cx="2831492" cy="1882483"/>
+            </a:xfrm>
+          </p:grpSpPr>
+          <p:cxnSp>
+            <p:nvCxnSpPr>
+              <p:cNvPr id="52" name="Straight Connector 51">
+                <a:extLst>
+                  <a:ext uri="{FF2B5EF4-FFF2-40B4-BE49-F238E27FC236}">
+                    <a16:creationId xmlns:a16="http://schemas.microsoft.com/office/drawing/2014/main" id="{A478995D-1D5A-127E-530A-257020D285CA}"/>
+                  </a:ext>
+                </a:extLst>
+              </p:cNvPr>
+              <p:cNvCxnSpPr/>
+              <p:nvPr/>
+            </p:nvCxnSpPr>
+            <p:spPr>
+              <a:xfrm>
+                <a:off x="4266007" y="2155669"/>
+                <a:ext cx="0" cy="1866378"/>
+              </a:xfrm>
+              <a:prstGeom prst="line">
+                <a:avLst/>
+              </a:prstGeom>
+            </p:spPr>
+            <p:style>
+              <a:lnRef idx="2">
+                <a:schemeClr val="accent1"/>
+              </a:lnRef>
+              <a:fillRef idx="0">
+                <a:schemeClr val="accent1"/>
+              </a:fillRef>
+              <a:effectRef idx="1">
+                <a:schemeClr val="accent1"/>
+              </a:effectRef>
+              <a:fontRef idx="minor">
+                <a:schemeClr val="tx1"/>
+              </a:fontRef>
+            </p:style>
+          </p:cxnSp>
+          <p:cxnSp>
+            <p:nvCxnSpPr>
+              <p:cNvPr id="53" name="Straight Connector 52">
+                <a:extLst>
+                  <a:ext uri="{FF2B5EF4-FFF2-40B4-BE49-F238E27FC236}">
+                    <a16:creationId xmlns:a16="http://schemas.microsoft.com/office/drawing/2014/main" id="{56A2E571-C871-FB24-C92C-EC64298B447E}"/>
+                  </a:ext>
+                </a:extLst>
+              </p:cNvPr>
+              <p:cNvCxnSpPr>
+                <a:cxnSpLocks/>
+              </p:cNvCxnSpPr>
+              <p:nvPr/>
+            </p:nvCxnSpPr>
+            <p:spPr>
+              <a:xfrm flipH="1">
+                <a:off x="4266007" y="4038152"/>
+                <a:ext cx="2831492" cy="0"/>
+              </a:xfrm>
+              <a:prstGeom prst="line">
+                <a:avLst/>
+              </a:prstGeom>
+            </p:spPr>
+            <p:style>
+              <a:lnRef idx="2">
+                <a:schemeClr val="accent1"/>
+              </a:lnRef>
+              <a:fillRef idx="0">
+                <a:schemeClr val="accent1"/>
+              </a:fillRef>
+              <a:effectRef idx="1">
+                <a:schemeClr val="accent1"/>
+              </a:effectRef>
+              <a:fontRef idx="minor">
+                <a:schemeClr val="tx1"/>
+              </a:fontRef>
+            </p:style>
+          </p:cxnSp>
+          <p:cxnSp>
+            <p:nvCxnSpPr>
+              <p:cNvPr id="54" name="Straight Connector 53">
+                <a:extLst>
+                  <a:ext uri="{FF2B5EF4-FFF2-40B4-BE49-F238E27FC236}">
+                    <a16:creationId xmlns:a16="http://schemas.microsoft.com/office/drawing/2014/main" id="{04F46767-9F5D-6F77-7EBD-AD595543B5BC}"/>
+                  </a:ext>
+                </a:extLst>
+              </p:cNvPr>
+              <p:cNvCxnSpPr>
+                <a:cxnSpLocks/>
+              </p:cNvCxnSpPr>
+              <p:nvPr/>
+            </p:nvCxnSpPr>
+            <p:spPr>
+              <a:xfrm>
+                <a:off x="5276222" y="2732314"/>
+                <a:ext cx="0" cy="1305838"/>
+              </a:xfrm>
+              <a:prstGeom prst="line">
+                <a:avLst/>
+              </a:prstGeom>
+            </p:spPr>
+            <p:style>
+              <a:lnRef idx="2">
+                <a:schemeClr val="accent4"/>
+              </a:lnRef>
+              <a:fillRef idx="0">
+                <a:schemeClr val="accent4"/>
+              </a:fillRef>
+              <a:effectRef idx="1">
+                <a:schemeClr val="accent4"/>
+              </a:effectRef>
+              <a:fontRef idx="minor">
+                <a:schemeClr val="tx1"/>
+              </a:fontRef>
+            </p:style>
+          </p:cxnSp>
+          <p:cxnSp>
+            <p:nvCxnSpPr>
+              <p:cNvPr id="55" name="Straight Connector 54">
+                <a:extLst>
+                  <a:ext uri="{FF2B5EF4-FFF2-40B4-BE49-F238E27FC236}">
+                    <a16:creationId xmlns:a16="http://schemas.microsoft.com/office/drawing/2014/main" id="{E527B53A-C77F-04DD-7A04-0AC47598C6F3}"/>
+                  </a:ext>
+                </a:extLst>
+              </p:cNvPr>
+              <p:cNvCxnSpPr>
+                <a:cxnSpLocks/>
+              </p:cNvCxnSpPr>
+              <p:nvPr/>
+            </p:nvCxnSpPr>
+            <p:spPr>
+              <a:xfrm>
+                <a:off x="5769343" y="2269597"/>
+                <a:ext cx="0" cy="1768555"/>
+              </a:xfrm>
+              <a:prstGeom prst="line">
+                <a:avLst/>
+              </a:prstGeom>
+            </p:spPr>
+            <p:style>
+              <a:lnRef idx="2">
+                <a:schemeClr val="accent4"/>
+              </a:lnRef>
+              <a:fillRef idx="0">
+                <a:schemeClr val="accent4"/>
+              </a:fillRef>
+              <a:effectRef idx="1">
+                <a:schemeClr val="accent4"/>
+              </a:effectRef>
+              <a:fontRef idx="minor">
+                <a:schemeClr val="tx1"/>
+              </a:fontRef>
+            </p:style>
+          </p:cxnSp>
+          <p:cxnSp>
+            <p:nvCxnSpPr>
+              <p:cNvPr id="56" name="Straight Connector 55">
+                <a:extLst>
+                  <a:ext uri="{FF2B5EF4-FFF2-40B4-BE49-F238E27FC236}">
+                    <a16:creationId xmlns:a16="http://schemas.microsoft.com/office/drawing/2014/main" id="{CA745A5A-2E71-DC69-12C3-7C89A463A156}"/>
+                  </a:ext>
+                </a:extLst>
+              </p:cNvPr>
+              <p:cNvCxnSpPr>
+                <a:cxnSpLocks/>
+              </p:cNvCxnSpPr>
+              <p:nvPr/>
+            </p:nvCxnSpPr>
+            <p:spPr>
+              <a:xfrm>
+                <a:off x="6284302" y="3037114"/>
+                <a:ext cx="0" cy="1001038"/>
+              </a:xfrm>
+              <a:prstGeom prst="line">
+                <a:avLst/>
+              </a:prstGeom>
+            </p:spPr>
+            <p:style>
+              <a:lnRef idx="2">
+                <a:schemeClr val="accent4"/>
+              </a:lnRef>
+              <a:fillRef idx="0">
+                <a:schemeClr val="accent4"/>
+              </a:fillRef>
+              <a:effectRef idx="1">
+                <a:schemeClr val="accent4"/>
+              </a:effectRef>
+              <a:fontRef idx="minor">
+                <a:schemeClr val="tx1"/>
+              </a:fontRef>
+            </p:style>
+          </p:cxnSp>
+        </p:grpSp>
+        <p:cxnSp>
+          <p:nvCxnSpPr>
+            <p:cNvPr id="51" name="Straight Connector 50">
+              <a:extLst>
+                <a:ext uri="{FF2B5EF4-FFF2-40B4-BE49-F238E27FC236}">
+                  <a16:creationId xmlns:a16="http://schemas.microsoft.com/office/drawing/2014/main" id="{7E9FEE05-296B-DD64-3FDA-D1A74BD31374}"/>
+                </a:ext>
+              </a:extLst>
+            </p:cNvPr>
+            <p:cNvCxnSpPr>
+              <a:cxnSpLocks/>
+            </p:cNvCxnSpPr>
+            <p:nvPr/>
+          </p:nvCxnSpPr>
+          <p:spPr>
+            <a:xfrm>
+              <a:off x="3950056" y="3020291"/>
+              <a:ext cx="0" cy="1122218"/>
+            </a:xfrm>
+            <a:prstGeom prst="line">
+              <a:avLst/>
+            </a:prstGeom>
+          </p:spPr>
+          <p:style>
+            <a:lnRef idx="2">
+              <a:schemeClr val="accent4"/>
+            </a:lnRef>
+            <a:fillRef idx="0">
+              <a:schemeClr val="accent4"/>
+            </a:fillRef>
+            <a:effectRef idx="1">
+              <a:schemeClr val="accent4"/>
+            </a:effectRef>
+            <a:fontRef idx="minor">
+              <a:schemeClr val="tx1"/>
+            </a:fontRef>
+          </p:style>
+        </p:cxnSp>
+      </p:grpSp>
+      <p:grpSp>
+        <p:nvGrpSpPr>
+          <p:cNvPr id="57" name="Group 56">
+            <a:extLst>
+              <a:ext uri="{FF2B5EF4-FFF2-40B4-BE49-F238E27FC236}">
+                <a16:creationId xmlns:a16="http://schemas.microsoft.com/office/drawing/2014/main" id="{08B9CDCD-478D-53FD-C31A-8B8131643B0C}"/>
+              </a:ext>
+            </a:extLst>
+          </p:cNvPr>
+          <p:cNvGrpSpPr/>
+          <p:nvPr/>
+        </p:nvGrpSpPr>
+        <p:grpSpPr>
+          <a:xfrm>
+            <a:off x="743761" y="3414755"/>
+            <a:ext cx="2571688" cy="1981188"/>
+            <a:chOff x="1766455" y="3747610"/>
+            <a:chExt cx="3244150" cy="2132417"/>
+          </a:xfrm>
+        </p:grpSpPr>
+        <p:grpSp>
+          <p:nvGrpSpPr>
+            <p:cNvPr id="58" name="Group 57">
+              <a:extLst>
+                <a:ext uri="{FF2B5EF4-FFF2-40B4-BE49-F238E27FC236}">
+                  <a16:creationId xmlns:a16="http://schemas.microsoft.com/office/drawing/2014/main" id="{C01AD8CC-67BB-E737-9555-81BC1E1ED503}"/>
+                </a:ext>
+              </a:extLst>
+            </p:cNvPr>
+            <p:cNvGrpSpPr/>
+            <p:nvPr/>
+          </p:nvGrpSpPr>
+          <p:grpSpPr>
+            <a:xfrm>
+              <a:off x="1766455" y="3747610"/>
+              <a:ext cx="3186545" cy="1863483"/>
+              <a:chOff x="3241965" y="1622603"/>
+              <a:chExt cx="4003962" cy="2519908"/>
+            </a:xfrm>
+          </p:grpSpPr>
+          <p:grpSp>
+            <p:nvGrpSpPr>
+              <p:cNvPr id="63" name="Group 62">
+                <a:extLst>
+                  <a:ext uri="{FF2B5EF4-FFF2-40B4-BE49-F238E27FC236}">
+                    <a16:creationId xmlns:a16="http://schemas.microsoft.com/office/drawing/2014/main" id="{E9BCC1A3-789F-A2E2-5F91-DF357A9AA673}"/>
+                  </a:ext>
+                </a:extLst>
+              </p:cNvPr>
+              <p:cNvGrpSpPr/>
+              <p:nvPr/>
+            </p:nvGrpSpPr>
+            <p:grpSpPr>
+              <a:xfrm>
+                <a:off x="3241965" y="1622603"/>
+                <a:ext cx="4003962" cy="2519908"/>
+                <a:chOff x="4266007" y="2430531"/>
+                <a:chExt cx="2831492" cy="1607621"/>
+              </a:xfrm>
+            </p:grpSpPr>
+            <p:cxnSp>
+              <p:nvCxnSpPr>
+                <p:cNvPr id="65" name="Straight Connector 64">
+                  <a:extLst>
+                    <a:ext uri="{FF2B5EF4-FFF2-40B4-BE49-F238E27FC236}">
+                      <a16:creationId xmlns:a16="http://schemas.microsoft.com/office/drawing/2014/main" id="{E01C60E2-654E-CD37-DA62-2E2487E16CCE}"/>
+                    </a:ext>
+                  </a:extLst>
+                </p:cNvPr>
+                <p:cNvCxnSpPr>
+                  <a:cxnSpLocks/>
+                </p:cNvCxnSpPr>
+                <p:nvPr/>
+              </p:nvCxnSpPr>
+              <p:spPr>
+                <a:xfrm flipH="1">
+                  <a:off x="4266007" y="4038152"/>
+                  <a:ext cx="2831492" cy="0"/>
+                </a:xfrm>
+                <a:prstGeom prst="line">
+                  <a:avLst/>
+                </a:prstGeom>
+              </p:spPr>
+              <p:style>
+                <a:lnRef idx="2">
+                  <a:schemeClr val="accent1"/>
+                </a:lnRef>
+                <a:fillRef idx="0">
+                  <a:schemeClr val="accent1"/>
+                </a:fillRef>
+                <a:effectRef idx="1">
+                  <a:schemeClr val="accent1"/>
+                </a:effectRef>
+                <a:fontRef idx="minor">
+                  <a:schemeClr val="tx1"/>
+                </a:fontRef>
+              </p:style>
+            </p:cxnSp>
+            <p:cxnSp>
+              <p:nvCxnSpPr>
+                <p:cNvPr id="66" name="Straight Connector 65">
+                  <a:extLst>
+                    <a:ext uri="{FF2B5EF4-FFF2-40B4-BE49-F238E27FC236}">
+                      <a16:creationId xmlns:a16="http://schemas.microsoft.com/office/drawing/2014/main" id="{22856722-EE6E-56CB-8891-E84531130895}"/>
+                    </a:ext>
+                  </a:extLst>
+                </p:cNvPr>
+                <p:cNvCxnSpPr>
+                  <a:cxnSpLocks/>
+                </p:cNvCxnSpPr>
+                <p:nvPr/>
+              </p:nvCxnSpPr>
+              <p:spPr>
+                <a:xfrm>
+                  <a:off x="5812765" y="2732313"/>
+                  <a:ext cx="0" cy="1305838"/>
+                </a:xfrm>
+                <a:prstGeom prst="line">
+                  <a:avLst/>
+                </a:prstGeom>
+              </p:spPr>
+              <p:style>
+                <a:lnRef idx="2">
+                  <a:schemeClr val="accent2"/>
+                </a:lnRef>
+                <a:fillRef idx="0">
+                  <a:schemeClr val="accent2"/>
+                </a:fillRef>
+                <a:effectRef idx="1">
+                  <a:schemeClr val="accent2"/>
+                </a:effectRef>
+                <a:fontRef idx="minor">
+                  <a:schemeClr val="tx1"/>
+                </a:fontRef>
+              </p:style>
+            </p:cxnSp>
+            <p:cxnSp>
+              <p:nvCxnSpPr>
+                <p:cNvPr id="67" name="Straight Connector 66">
+                  <a:extLst>
+                    <a:ext uri="{FF2B5EF4-FFF2-40B4-BE49-F238E27FC236}">
+                      <a16:creationId xmlns:a16="http://schemas.microsoft.com/office/drawing/2014/main" id="{5674ED16-9B5C-037F-77F8-1118F5041E90}"/>
+                    </a:ext>
+                  </a:extLst>
+                </p:cNvPr>
+                <p:cNvCxnSpPr>
+                  <a:cxnSpLocks/>
+                </p:cNvCxnSpPr>
+                <p:nvPr/>
+              </p:nvCxnSpPr>
+              <p:spPr>
+                <a:xfrm>
+                  <a:off x="6304819" y="2430531"/>
+                  <a:ext cx="0" cy="1607621"/>
+                </a:xfrm>
+                <a:prstGeom prst="line">
+                  <a:avLst/>
+                </a:prstGeom>
+              </p:spPr>
+              <p:style>
+                <a:lnRef idx="2">
+                  <a:schemeClr val="accent2"/>
+                </a:lnRef>
+                <a:fillRef idx="0">
+                  <a:schemeClr val="accent2"/>
+                </a:fillRef>
+                <a:effectRef idx="1">
+                  <a:schemeClr val="accent2"/>
+                </a:effectRef>
+                <a:fontRef idx="minor">
+                  <a:schemeClr val="tx1"/>
+                </a:fontRef>
+              </p:style>
+            </p:cxnSp>
+            <p:cxnSp>
+              <p:nvCxnSpPr>
+                <p:cNvPr id="68" name="Straight Connector 67">
+                  <a:extLst>
+                    <a:ext uri="{FF2B5EF4-FFF2-40B4-BE49-F238E27FC236}">
+                      <a16:creationId xmlns:a16="http://schemas.microsoft.com/office/drawing/2014/main" id="{D88FCE5A-4E6E-9C90-36DA-EA6EEA2E2C37}"/>
+                    </a:ext>
+                  </a:extLst>
+                </p:cNvPr>
+                <p:cNvCxnSpPr>
+                  <a:cxnSpLocks/>
+                </p:cNvCxnSpPr>
+                <p:nvPr/>
+              </p:nvCxnSpPr>
+              <p:spPr>
+                <a:xfrm>
+                  <a:off x="6819778" y="3153874"/>
+                  <a:ext cx="0" cy="884278"/>
+                </a:xfrm>
+                <a:prstGeom prst="line">
+                  <a:avLst/>
+                </a:prstGeom>
+              </p:spPr>
+              <p:style>
+                <a:lnRef idx="2">
+                  <a:schemeClr val="accent2"/>
+                </a:lnRef>
+                <a:fillRef idx="0">
+                  <a:schemeClr val="accent2"/>
+                </a:fillRef>
+                <a:effectRef idx="1">
+                  <a:schemeClr val="accent2"/>
+                </a:effectRef>
+                <a:fontRef idx="minor">
+                  <a:schemeClr val="tx1"/>
+                </a:fontRef>
+              </p:style>
+            </p:cxnSp>
+          </p:grpSp>
+          <p:cxnSp>
+            <p:nvCxnSpPr>
+              <p:cNvPr id="64" name="Straight Connector 63">
+                <a:extLst>
+                  <a:ext uri="{FF2B5EF4-FFF2-40B4-BE49-F238E27FC236}">
+                    <a16:creationId xmlns:a16="http://schemas.microsoft.com/office/drawing/2014/main" id="{7E8FC3DC-DDC3-EDE2-837B-0260B4A5AD56}"/>
+                  </a:ext>
+                </a:extLst>
+              </p:cNvPr>
+              <p:cNvCxnSpPr>
+                <a:cxnSpLocks/>
+              </p:cNvCxnSpPr>
+              <p:nvPr/>
+            </p:nvCxnSpPr>
+            <p:spPr>
+              <a:xfrm>
+                <a:off x="4707262" y="3357958"/>
+                <a:ext cx="0" cy="784552"/>
+              </a:xfrm>
+              <a:prstGeom prst="line">
+                <a:avLst/>
+              </a:prstGeom>
+            </p:spPr>
+            <p:style>
+              <a:lnRef idx="2">
+                <a:schemeClr val="accent2"/>
+              </a:lnRef>
+              <a:fillRef idx="0">
+                <a:schemeClr val="accent2"/>
+              </a:fillRef>
+              <a:effectRef idx="1">
+                <a:schemeClr val="accent2"/>
+              </a:effectRef>
+              <a:fontRef idx="minor">
+                <a:schemeClr val="tx1"/>
+              </a:fontRef>
+            </p:style>
+          </p:cxnSp>
+        </p:grpSp>
+        <p:sp>
+          <p:nvSpPr>
+            <p:cNvPr id="59" name="TextBox 58">
+              <a:extLst>
+                <a:ext uri="{FF2B5EF4-FFF2-40B4-BE49-F238E27FC236}">
+                  <a16:creationId xmlns:a16="http://schemas.microsoft.com/office/drawing/2014/main" id="{E03769E0-78F8-BF9A-56E3-7B1684359F1C}"/>
+                </a:ext>
+              </a:extLst>
+            </p:cNvPr>
+            <p:cNvSpPr txBox="1"/>
+            <p:nvPr/>
+          </p:nvSpPr>
+          <p:spPr>
+            <a:xfrm>
+              <a:off x="2688258" y="5705061"/>
+              <a:ext cx="583096" cy="174966"/>
+            </a:xfrm>
+            <a:prstGeom prst="rect">
+              <a:avLst/>
+            </a:prstGeom>
+            <a:noFill/>
+          </p:spPr>
+          <p:txBody>
+            <a:bodyPr wrap="square" rtlCol="0">
+              <a:spAutoFit/>
+            </a:bodyPr>
+            <a:lstStyle/>
+            <a:p>
+              <a:r>
+                <a:rPr lang="en-US" altLang="zh-CN" sz="600" dirty="0"/>
+                <a:t>1000.50</a:t>
+              </a:r>
+              <a:endParaRPr lang="en-US" sz="600" dirty="0"/>
+            </a:p>
+          </p:txBody>
+        </p:sp>
+        <p:sp>
+          <p:nvSpPr>
+            <p:cNvPr id="60" name="TextBox 59">
+              <a:extLst>
+                <a:ext uri="{FF2B5EF4-FFF2-40B4-BE49-F238E27FC236}">
+                  <a16:creationId xmlns:a16="http://schemas.microsoft.com/office/drawing/2014/main" id="{979F9694-5318-20C1-B1C2-FCD9DA07E5BA}"/>
+                </a:ext>
+              </a:extLst>
+            </p:cNvPr>
+            <p:cNvSpPr txBox="1"/>
+            <p:nvPr/>
+          </p:nvSpPr>
+          <p:spPr>
+            <a:xfrm>
+              <a:off x="3262818" y="5705061"/>
+              <a:ext cx="583096" cy="174966"/>
+            </a:xfrm>
+            <a:prstGeom prst="rect">
+              <a:avLst/>
+            </a:prstGeom>
+            <a:noFill/>
+          </p:spPr>
+          <p:txBody>
+            <a:bodyPr wrap="square" rtlCol="0">
+              <a:spAutoFit/>
+            </a:bodyPr>
+            <a:lstStyle/>
+            <a:p>
+              <a:r>
+                <a:rPr lang="en-US" altLang="zh-CN" sz="600" dirty="0"/>
+                <a:t>1001.50</a:t>
+              </a:r>
+              <a:endParaRPr lang="en-US" sz="600" dirty="0"/>
+            </a:p>
+          </p:txBody>
+        </p:sp>
+        <p:sp>
+          <p:nvSpPr>
+            <p:cNvPr id="61" name="TextBox 60">
+              <a:extLst>
+                <a:ext uri="{FF2B5EF4-FFF2-40B4-BE49-F238E27FC236}">
+                  <a16:creationId xmlns:a16="http://schemas.microsoft.com/office/drawing/2014/main" id="{2E451E76-06F5-57A7-EDF6-8124210F9D81}"/>
+                </a:ext>
+              </a:extLst>
+            </p:cNvPr>
+            <p:cNvSpPr txBox="1"/>
+            <p:nvPr/>
+          </p:nvSpPr>
+          <p:spPr>
+            <a:xfrm>
+              <a:off x="3837377" y="5705061"/>
+              <a:ext cx="583096" cy="174966"/>
+            </a:xfrm>
+            <a:prstGeom prst="rect">
+              <a:avLst/>
+            </a:prstGeom>
+            <a:noFill/>
+          </p:spPr>
+          <p:txBody>
+            <a:bodyPr wrap="square" rtlCol="0">
+              <a:spAutoFit/>
+            </a:bodyPr>
+            <a:lstStyle/>
+            <a:p>
+              <a:r>
+                <a:rPr lang="en-US" altLang="zh-CN" sz="600" dirty="0"/>
+                <a:t>1002.50</a:t>
+              </a:r>
+              <a:endParaRPr lang="en-US" sz="600" dirty="0"/>
+            </a:p>
+          </p:txBody>
+        </p:sp>
+        <p:sp>
+          <p:nvSpPr>
+            <p:cNvPr id="62" name="TextBox 61">
+              <a:extLst>
+                <a:ext uri="{FF2B5EF4-FFF2-40B4-BE49-F238E27FC236}">
+                  <a16:creationId xmlns:a16="http://schemas.microsoft.com/office/drawing/2014/main" id="{9F0B1FCE-F317-0966-C675-5F6657309C5F}"/>
+                </a:ext>
+              </a:extLst>
+            </p:cNvPr>
+            <p:cNvSpPr txBox="1"/>
+            <p:nvPr/>
+          </p:nvSpPr>
+          <p:spPr>
+            <a:xfrm>
+              <a:off x="4427509" y="5705061"/>
+              <a:ext cx="583096" cy="174966"/>
+            </a:xfrm>
+            <a:prstGeom prst="rect">
+              <a:avLst/>
+            </a:prstGeom>
+            <a:noFill/>
+          </p:spPr>
+          <p:txBody>
+            <a:bodyPr wrap="square" rtlCol="0">
+              <a:spAutoFit/>
+            </a:bodyPr>
+            <a:lstStyle/>
+            <a:p>
+              <a:r>
+                <a:rPr lang="en-US" altLang="zh-CN" sz="600" dirty="0"/>
+                <a:t>1003.50</a:t>
+              </a:r>
+              <a:endParaRPr lang="en-US" sz="600" dirty="0"/>
+            </a:p>
+          </p:txBody>
+        </p:sp>
+      </p:grpSp>
+      <p:cxnSp>
+        <p:nvCxnSpPr>
+          <p:cNvPr id="69" name="Straight Connector 68">
+            <a:extLst>
+              <a:ext uri="{FF2B5EF4-FFF2-40B4-BE49-F238E27FC236}">
+                <a16:creationId xmlns:a16="http://schemas.microsoft.com/office/drawing/2014/main" id="{F40B8369-79C3-7F44-2B11-894EF78B757A}"/>
+              </a:ext>
+            </a:extLst>
+          </p:cNvPr>
+          <p:cNvCxnSpPr>
+            <a:cxnSpLocks/>
+          </p:cNvCxnSpPr>
+          <p:nvPr/>
+        </p:nvCxnSpPr>
+        <p:spPr>
+          <a:xfrm>
+            <a:off x="1666427" y="3429000"/>
+            <a:ext cx="0" cy="779004"/>
+          </a:xfrm>
+          <a:prstGeom prst="line">
+            <a:avLst/>
+          </a:prstGeom>
+          <a:ln w="19050" cap="flat" cmpd="sng" algn="ctr">
+            <a:solidFill>
+              <a:schemeClr val="accent6"/>
+            </a:solidFill>
+            <a:prstDash val="dash"/>
+            <a:round/>
+            <a:headEnd type="none" w="med" len="med"/>
+            <a:tailEnd type="none" w="med" len="med"/>
+          </a:ln>
+        </p:spPr>
+        <p:style>
+          <a:lnRef idx="0">
+            <a:scrgbClr r="0" g="0" b="0"/>
+          </a:lnRef>
+          <a:fillRef idx="0">
+            <a:scrgbClr r="0" g="0" b="0"/>
+          </a:fillRef>
+          <a:effectRef idx="0">
+            <a:scrgbClr r="0" g="0" b="0"/>
+          </a:effectRef>
+          <a:fontRef idx="minor">
+            <a:schemeClr val="tx1"/>
+          </a:fontRef>
+        </p:style>
+      </p:cxnSp>
+      <p:cxnSp>
+        <p:nvCxnSpPr>
+          <p:cNvPr id="70" name="Straight Connector 69">
+            <a:extLst>
+              <a:ext uri="{FF2B5EF4-FFF2-40B4-BE49-F238E27FC236}">
+                <a16:creationId xmlns:a16="http://schemas.microsoft.com/office/drawing/2014/main" id="{4A947F6B-B717-2BEF-0C17-5F31622105F5}"/>
+              </a:ext>
+            </a:extLst>
+          </p:cNvPr>
+          <p:cNvCxnSpPr>
+            <a:cxnSpLocks/>
+          </p:cNvCxnSpPr>
+          <p:nvPr/>
+        </p:nvCxnSpPr>
+        <p:spPr>
+          <a:xfrm>
+            <a:off x="2106350" y="3142756"/>
+            <a:ext cx="0" cy="474204"/>
+          </a:xfrm>
+          <a:prstGeom prst="line">
+            <a:avLst/>
+          </a:prstGeom>
+          <a:ln w="19050" cap="flat" cmpd="sng" algn="ctr">
+            <a:solidFill>
+              <a:schemeClr val="accent6"/>
+            </a:solidFill>
+            <a:prstDash val="dash"/>
+            <a:round/>
+            <a:headEnd type="none" w="med" len="med"/>
+            <a:tailEnd type="none" w="med" len="med"/>
+          </a:ln>
+        </p:spPr>
+        <p:style>
+          <a:lnRef idx="0">
+            <a:scrgbClr r="0" g="0" b="0"/>
+          </a:lnRef>
+          <a:fillRef idx="0">
+            <a:scrgbClr r="0" g="0" b="0"/>
+          </a:fillRef>
+          <a:effectRef idx="0">
+            <a:scrgbClr r="0" g="0" b="0"/>
+          </a:effectRef>
+          <a:fontRef idx="minor">
+            <a:schemeClr val="tx1"/>
+          </a:fontRef>
+        </p:style>
+      </p:cxnSp>
+      <p:cxnSp>
+        <p:nvCxnSpPr>
+          <p:cNvPr id="71" name="Straight Connector 70">
+            <a:extLst>
+              <a:ext uri="{FF2B5EF4-FFF2-40B4-BE49-F238E27FC236}">
+                <a16:creationId xmlns:a16="http://schemas.microsoft.com/office/drawing/2014/main" id="{7860349E-A718-73AC-52C8-65E5F2F07934}"/>
+              </a:ext>
+            </a:extLst>
+          </p:cNvPr>
+          <p:cNvCxnSpPr>
+            <a:cxnSpLocks/>
+          </p:cNvCxnSpPr>
+          <p:nvPr/>
+        </p:nvCxnSpPr>
+        <p:spPr>
+          <a:xfrm>
+            <a:off x="2584054" y="3075058"/>
+            <a:ext cx="0" cy="182880"/>
+          </a:xfrm>
+          <a:prstGeom prst="line">
+            <a:avLst/>
+          </a:prstGeom>
+          <a:ln w="19050" cap="flat" cmpd="sng" algn="ctr">
+            <a:solidFill>
+              <a:schemeClr val="accent6"/>
+            </a:solidFill>
+            <a:prstDash val="dash"/>
+            <a:round/>
+            <a:headEnd type="none" w="med" len="med"/>
+            <a:tailEnd type="none" w="med" len="med"/>
+          </a:ln>
+        </p:spPr>
+        <p:style>
+          <a:lnRef idx="0">
+            <a:scrgbClr r="0" g="0" b="0"/>
+          </a:lnRef>
+          <a:fillRef idx="0">
+            <a:scrgbClr r="0" g="0" b="0"/>
+          </a:fillRef>
+          <a:effectRef idx="0">
+            <a:scrgbClr r="0" g="0" b="0"/>
+          </a:effectRef>
+          <a:fontRef idx="minor">
+            <a:schemeClr val="tx1"/>
+          </a:fontRef>
+        </p:style>
+      </p:cxnSp>
+      <p:grpSp>
+        <p:nvGrpSpPr>
+          <p:cNvPr id="73" name="Group 72">
+            <a:extLst>
+              <a:ext uri="{FF2B5EF4-FFF2-40B4-BE49-F238E27FC236}">
+                <a16:creationId xmlns:a16="http://schemas.microsoft.com/office/drawing/2014/main" id="{4FF586E3-DCC3-72B2-9104-0BB693D20A3C}"/>
+              </a:ext>
+            </a:extLst>
+          </p:cNvPr>
+          <p:cNvGrpSpPr/>
+          <p:nvPr/>
+        </p:nvGrpSpPr>
+        <p:grpSpPr>
+          <a:xfrm>
+            <a:off x="6350516" y="1518462"/>
+            <a:ext cx="2526030" cy="1513670"/>
+            <a:chOff x="3241965" y="1191762"/>
+            <a:chExt cx="4003962" cy="2950747"/>
+          </a:xfrm>
+        </p:grpSpPr>
+        <p:grpSp>
+          <p:nvGrpSpPr>
+            <p:cNvPr id="74" name="Group 73">
+              <a:extLst>
+                <a:ext uri="{FF2B5EF4-FFF2-40B4-BE49-F238E27FC236}">
+                  <a16:creationId xmlns:a16="http://schemas.microsoft.com/office/drawing/2014/main" id="{FC7F780B-2E60-2608-6FB3-8967BBE3C113}"/>
+                </a:ext>
+              </a:extLst>
+            </p:cNvPr>
+            <p:cNvGrpSpPr/>
+            <p:nvPr/>
+          </p:nvGrpSpPr>
+          <p:grpSpPr>
+            <a:xfrm>
+              <a:off x="3241965" y="1191762"/>
+              <a:ext cx="4003962" cy="2950747"/>
+              <a:chOff x="4266007" y="2155669"/>
+              <a:chExt cx="2831492" cy="1882483"/>
+            </a:xfrm>
+          </p:grpSpPr>
+          <p:cxnSp>
+            <p:nvCxnSpPr>
+              <p:cNvPr id="76" name="Straight Connector 75">
+                <a:extLst>
+                  <a:ext uri="{FF2B5EF4-FFF2-40B4-BE49-F238E27FC236}">
+                    <a16:creationId xmlns:a16="http://schemas.microsoft.com/office/drawing/2014/main" id="{033DB9DE-7158-7DCC-91C0-703618FEE238}"/>
+                  </a:ext>
+                </a:extLst>
+              </p:cNvPr>
+              <p:cNvCxnSpPr/>
+              <p:nvPr/>
+            </p:nvCxnSpPr>
+            <p:spPr>
+              <a:xfrm>
+                <a:off x="4266007" y="2155669"/>
+                <a:ext cx="0" cy="1866378"/>
+              </a:xfrm>
+              <a:prstGeom prst="line">
+                <a:avLst/>
+              </a:prstGeom>
+            </p:spPr>
+            <p:style>
+              <a:lnRef idx="2">
+                <a:schemeClr val="accent1"/>
+              </a:lnRef>
+              <a:fillRef idx="0">
+                <a:schemeClr val="accent1"/>
+              </a:fillRef>
+              <a:effectRef idx="1">
+                <a:schemeClr val="accent1"/>
+              </a:effectRef>
+              <a:fontRef idx="minor">
+                <a:schemeClr val="tx1"/>
+              </a:fontRef>
+            </p:style>
+          </p:cxnSp>
+          <p:cxnSp>
+            <p:nvCxnSpPr>
+              <p:cNvPr id="77" name="Straight Connector 76">
+                <a:extLst>
+                  <a:ext uri="{FF2B5EF4-FFF2-40B4-BE49-F238E27FC236}">
+                    <a16:creationId xmlns:a16="http://schemas.microsoft.com/office/drawing/2014/main" id="{E3F322F8-E346-018D-1882-5699BAB6601F}"/>
+                  </a:ext>
+                </a:extLst>
+              </p:cNvPr>
+              <p:cNvCxnSpPr>
+                <a:cxnSpLocks/>
+              </p:cNvCxnSpPr>
+              <p:nvPr/>
+            </p:nvCxnSpPr>
+            <p:spPr>
+              <a:xfrm flipH="1">
+                <a:off x="4266007" y="4038152"/>
+                <a:ext cx="2831492" cy="0"/>
+              </a:xfrm>
+              <a:prstGeom prst="line">
+                <a:avLst/>
+              </a:prstGeom>
+            </p:spPr>
+            <p:style>
+              <a:lnRef idx="2">
+                <a:schemeClr val="accent1"/>
+              </a:lnRef>
+              <a:fillRef idx="0">
+                <a:schemeClr val="accent1"/>
+              </a:fillRef>
+              <a:effectRef idx="1">
+                <a:schemeClr val="accent1"/>
+              </a:effectRef>
+              <a:fontRef idx="minor">
+                <a:schemeClr val="tx1"/>
+              </a:fontRef>
+            </p:style>
+          </p:cxnSp>
+          <p:cxnSp>
+            <p:nvCxnSpPr>
+              <p:cNvPr id="78" name="Straight Connector 77">
+                <a:extLst>
+                  <a:ext uri="{FF2B5EF4-FFF2-40B4-BE49-F238E27FC236}">
+                    <a16:creationId xmlns:a16="http://schemas.microsoft.com/office/drawing/2014/main" id="{E3539582-23E9-970C-F9C6-2FB4F9DF1410}"/>
+                  </a:ext>
+                </a:extLst>
+              </p:cNvPr>
+              <p:cNvCxnSpPr>
+                <a:cxnSpLocks/>
+              </p:cNvCxnSpPr>
+              <p:nvPr/>
+            </p:nvCxnSpPr>
+            <p:spPr>
+              <a:xfrm>
+                <a:off x="5276222" y="2732314"/>
+                <a:ext cx="0" cy="1305838"/>
+              </a:xfrm>
+              <a:prstGeom prst="line">
+                <a:avLst/>
+              </a:prstGeom>
+            </p:spPr>
+            <p:style>
+              <a:lnRef idx="2">
+                <a:schemeClr val="accent4"/>
+              </a:lnRef>
+              <a:fillRef idx="0">
+                <a:schemeClr val="accent4"/>
+              </a:fillRef>
+              <a:effectRef idx="1">
+                <a:schemeClr val="accent4"/>
+              </a:effectRef>
+              <a:fontRef idx="minor">
+                <a:schemeClr val="tx1"/>
+              </a:fontRef>
+            </p:style>
+          </p:cxnSp>
+          <p:cxnSp>
+            <p:nvCxnSpPr>
+              <p:cNvPr id="79" name="Straight Connector 78">
+                <a:extLst>
+                  <a:ext uri="{FF2B5EF4-FFF2-40B4-BE49-F238E27FC236}">
+                    <a16:creationId xmlns:a16="http://schemas.microsoft.com/office/drawing/2014/main" id="{506A7097-FC29-30FC-458F-F04FDE636013}"/>
+                  </a:ext>
+                </a:extLst>
+              </p:cNvPr>
+              <p:cNvCxnSpPr>
+                <a:cxnSpLocks/>
+              </p:cNvCxnSpPr>
+              <p:nvPr/>
+            </p:nvCxnSpPr>
+            <p:spPr>
+              <a:xfrm>
+                <a:off x="5769343" y="2269597"/>
+                <a:ext cx="0" cy="1768555"/>
+              </a:xfrm>
+              <a:prstGeom prst="line">
+                <a:avLst/>
+              </a:prstGeom>
+            </p:spPr>
+            <p:style>
+              <a:lnRef idx="2">
+                <a:schemeClr val="accent4"/>
+              </a:lnRef>
+              <a:fillRef idx="0">
+                <a:schemeClr val="accent4"/>
+              </a:fillRef>
+              <a:effectRef idx="1">
+                <a:schemeClr val="accent4"/>
+              </a:effectRef>
+              <a:fontRef idx="minor">
+                <a:schemeClr val="tx1"/>
+              </a:fontRef>
+            </p:style>
+          </p:cxnSp>
+          <p:cxnSp>
+            <p:nvCxnSpPr>
+              <p:cNvPr id="80" name="Straight Connector 79">
+                <a:extLst>
+                  <a:ext uri="{FF2B5EF4-FFF2-40B4-BE49-F238E27FC236}">
+                    <a16:creationId xmlns:a16="http://schemas.microsoft.com/office/drawing/2014/main" id="{8887D4EA-F62E-1B0D-760E-23C3919BC01E}"/>
+                  </a:ext>
+                </a:extLst>
+              </p:cNvPr>
+              <p:cNvCxnSpPr>
+                <a:cxnSpLocks/>
+              </p:cNvCxnSpPr>
+              <p:nvPr/>
+            </p:nvCxnSpPr>
+            <p:spPr>
+              <a:xfrm>
+                <a:off x="6284302" y="3037114"/>
+                <a:ext cx="0" cy="1001038"/>
+              </a:xfrm>
+              <a:prstGeom prst="line">
+                <a:avLst/>
+              </a:prstGeom>
+            </p:spPr>
+            <p:style>
+              <a:lnRef idx="2">
+                <a:schemeClr val="accent4"/>
+              </a:lnRef>
+              <a:fillRef idx="0">
+                <a:schemeClr val="accent4"/>
+              </a:fillRef>
+              <a:effectRef idx="1">
+                <a:schemeClr val="accent4"/>
+              </a:effectRef>
+              <a:fontRef idx="minor">
+                <a:schemeClr val="tx1"/>
+              </a:fontRef>
+            </p:style>
+          </p:cxnSp>
+        </p:grpSp>
+        <p:cxnSp>
+          <p:nvCxnSpPr>
+            <p:cNvPr id="75" name="Straight Connector 74">
+              <a:extLst>
+                <a:ext uri="{FF2B5EF4-FFF2-40B4-BE49-F238E27FC236}">
+                  <a16:creationId xmlns:a16="http://schemas.microsoft.com/office/drawing/2014/main" id="{63E45682-232C-D570-C752-DE4375BC1203}"/>
+                </a:ext>
+              </a:extLst>
+            </p:cNvPr>
+            <p:cNvCxnSpPr>
+              <a:cxnSpLocks/>
+            </p:cNvCxnSpPr>
+            <p:nvPr/>
+          </p:nvCxnSpPr>
+          <p:spPr>
+            <a:xfrm>
+              <a:off x="3950056" y="3020291"/>
+              <a:ext cx="0" cy="1122218"/>
+            </a:xfrm>
+            <a:prstGeom prst="line">
+              <a:avLst/>
+            </a:prstGeom>
+          </p:spPr>
+          <p:style>
+            <a:lnRef idx="2">
+              <a:schemeClr val="accent4"/>
+            </a:lnRef>
+            <a:fillRef idx="0">
+              <a:schemeClr val="accent4"/>
+            </a:fillRef>
+            <a:effectRef idx="1">
+              <a:schemeClr val="accent4"/>
+            </a:effectRef>
+            <a:fontRef idx="minor">
+              <a:schemeClr val="tx1"/>
+            </a:fontRef>
+          </p:style>
+        </p:cxnSp>
+      </p:grpSp>
+      <p:grpSp>
+        <p:nvGrpSpPr>
+          <p:cNvPr id="81" name="Group 80">
+            <a:extLst>
+              <a:ext uri="{FF2B5EF4-FFF2-40B4-BE49-F238E27FC236}">
+                <a16:creationId xmlns:a16="http://schemas.microsoft.com/office/drawing/2014/main" id="{4155F9AC-B8C8-2C09-3CDE-A5B43F53559E}"/>
+              </a:ext>
+            </a:extLst>
+          </p:cNvPr>
+          <p:cNvGrpSpPr/>
+          <p:nvPr/>
+        </p:nvGrpSpPr>
+        <p:grpSpPr>
+          <a:xfrm>
+            <a:off x="6350516" y="3421152"/>
+            <a:ext cx="2526024" cy="1975559"/>
+            <a:chOff x="1766455" y="3747610"/>
+            <a:chExt cx="3186545" cy="2126358"/>
+          </a:xfrm>
+        </p:grpSpPr>
+        <p:grpSp>
+          <p:nvGrpSpPr>
+            <p:cNvPr id="87" name="Group 86">
+              <a:extLst>
+                <a:ext uri="{FF2B5EF4-FFF2-40B4-BE49-F238E27FC236}">
+                  <a16:creationId xmlns:a16="http://schemas.microsoft.com/office/drawing/2014/main" id="{CA9A0F71-87F8-0AB7-A329-AA7CCC02D361}"/>
+                </a:ext>
+              </a:extLst>
+            </p:cNvPr>
+            <p:cNvGrpSpPr/>
+            <p:nvPr/>
+          </p:nvGrpSpPr>
+          <p:grpSpPr>
+            <a:xfrm>
+              <a:off x="1766455" y="3747610"/>
+              <a:ext cx="3186545" cy="1863483"/>
+              <a:chOff x="4266007" y="2430531"/>
+              <a:chExt cx="2831492" cy="1607621"/>
+            </a:xfrm>
+          </p:grpSpPr>
+          <p:cxnSp>
+            <p:nvCxnSpPr>
+              <p:cNvPr id="89" name="Straight Connector 88">
+                <a:extLst>
+                  <a:ext uri="{FF2B5EF4-FFF2-40B4-BE49-F238E27FC236}">
+                    <a16:creationId xmlns:a16="http://schemas.microsoft.com/office/drawing/2014/main" id="{959FCD84-9350-4063-94B0-068657CA2693}"/>
+                  </a:ext>
+                </a:extLst>
+              </p:cNvPr>
+              <p:cNvCxnSpPr>
+                <a:cxnSpLocks/>
+              </p:cNvCxnSpPr>
+              <p:nvPr/>
+            </p:nvCxnSpPr>
+            <p:spPr>
+              <a:xfrm flipH="1">
+                <a:off x="4266007" y="4038152"/>
+                <a:ext cx="2831492" cy="0"/>
+              </a:xfrm>
+              <a:prstGeom prst="line">
+                <a:avLst/>
+              </a:prstGeom>
+            </p:spPr>
+            <p:style>
+              <a:lnRef idx="2">
+                <a:schemeClr val="accent1"/>
+              </a:lnRef>
+              <a:fillRef idx="0">
+                <a:schemeClr val="accent1"/>
+              </a:fillRef>
+              <a:effectRef idx="1">
+                <a:schemeClr val="accent1"/>
+              </a:effectRef>
+              <a:fontRef idx="minor">
+                <a:schemeClr val="tx1"/>
+              </a:fontRef>
+            </p:style>
+          </p:cxnSp>
+          <p:cxnSp>
+            <p:nvCxnSpPr>
+              <p:cNvPr id="90" name="Straight Connector 89">
+                <a:extLst>
+                  <a:ext uri="{FF2B5EF4-FFF2-40B4-BE49-F238E27FC236}">
+                    <a16:creationId xmlns:a16="http://schemas.microsoft.com/office/drawing/2014/main" id="{B1E62750-2039-D776-3840-1A679A127255}"/>
+                  </a:ext>
+                </a:extLst>
+              </p:cNvPr>
+              <p:cNvCxnSpPr>
+                <a:cxnSpLocks/>
+              </p:cNvCxnSpPr>
+              <p:nvPr/>
+            </p:nvCxnSpPr>
+            <p:spPr>
+              <a:xfrm>
+                <a:off x="4796175" y="2732313"/>
+                <a:ext cx="0" cy="1305838"/>
+              </a:xfrm>
+              <a:prstGeom prst="line">
+                <a:avLst/>
+              </a:prstGeom>
+            </p:spPr>
+            <p:style>
+              <a:lnRef idx="2">
+                <a:schemeClr val="accent2"/>
+              </a:lnRef>
+              <a:fillRef idx="0">
+                <a:schemeClr val="accent2"/>
+              </a:fillRef>
+              <a:effectRef idx="1">
+                <a:schemeClr val="accent2"/>
+              </a:effectRef>
+              <a:fontRef idx="minor">
+                <a:schemeClr val="tx1"/>
+              </a:fontRef>
+            </p:style>
+          </p:cxnSp>
+          <p:cxnSp>
+            <p:nvCxnSpPr>
+              <p:cNvPr id="91" name="Straight Connector 90">
+                <a:extLst>
+                  <a:ext uri="{FF2B5EF4-FFF2-40B4-BE49-F238E27FC236}">
+                    <a16:creationId xmlns:a16="http://schemas.microsoft.com/office/drawing/2014/main" id="{B3F3A5B9-C2E3-1F75-BB26-A10C804A9C5F}"/>
+                  </a:ext>
+                </a:extLst>
+              </p:cNvPr>
+              <p:cNvCxnSpPr>
+                <a:cxnSpLocks/>
+              </p:cNvCxnSpPr>
+              <p:nvPr/>
+            </p:nvCxnSpPr>
+            <p:spPr>
+              <a:xfrm>
+                <a:off x="5288229" y="2430531"/>
+                <a:ext cx="0" cy="1607621"/>
+              </a:xfrm>
+              <a:prstGeom prst="line">
+                <a:avLst/>
+              </a:prstGeom>
+            </p:spPr>
+            <p:style>
+              <a:lnRef idx="2">
+                <a:schemeClr val="accent2"/>
+              </a:lnRef>
+              <a:fillRef idx="0">
+                <a:schemeClr val="accent2"/>
+              </a:fillRef>
+              <a:effectRef idx="1">
+                <a:schemeClr val="accent2"/>
+              </a:effectRef>
+              <a:fontRef idx="minor">
+                <a:schemeClr val="tx1"/>
+              </a:fontRef>
+            </p:style>
+          </p:cxnSp>
+          <p:cxnSp>
+            <p:nvCxnSpPr>
+              <p:cNvPr id="92" name="Straight Connector 91">
+                <a:extLst>
+                  <a:ext uri="{FF2B5EF4-FFF2-40B4-BE49-F238E27FC236}">
+                    <a16:creationId xmlns:a16="http://schemas.microsoft.com/office/drawing/2014/main" id="{155632CB-A48A-BC50-9AE0-0EBF7E943EDA}"/>
+                  </a:ext>
+                </a:extLst>
+              </p:cNvPr>
+              <p:cNvCxnSpPr>
+                <a:cxnSpLocks/>
+              </p:cNvCxnSpPr>
+              <p:nvPr/>
+            </p:nvCxnSpPr>
+            <p:spPr>
+              <a:xfrm>
+                <a:off x="5803188" y="3153874"/>
+                <a:ext cx="0" cy="884278"/>
+              </a:xfrm>
+              <a:prstGeom prst="line">
+                <a:avLst/>
+              </a:prstGeom>
+            </p:spPr>
+            <p:style>
+              <a:lnRef idx="2">
+                <a:schemeClr val="accent2"/>
+              </a:lnRef>
+              <a:fillRef idx="0">
+                <a:schemeClr val="accent2"/>
+              </a:fillRef>
+              <a:effectRef idx="1">
+                <a:schemeClr val="accent2"/>
+              </a:effectRef>
+              <a:fontRef idx="minor">
+                <a:schemeClr val="tx1"/>
+              </a:fontRef>
+            </p:style>
+          </p:cxnSp>
+        </p:grpSp>
+        <p:sp>
+          <p:nvSpPr>
+            <p:cNvPr id="84" name="TextBox 83">
+              <a:extLst>
+                <a:ext uri="{FF2B5EF4-FFF2-40B4-BE49-F238E27FC236}">
+                  <a16:creationId xmlns:a16="http://schemas.microsoft.com/office/drawing/2014/main" id="{7379D7C0-A764-BD72-8C46-D320A3FE2CBD}"/>
+                </a:ext>
+              </a:extLst>
+            </p:cNvPr>
+            <p:cNvSpPr txBox="1"/>
+            <p:nvPr/>
+          </p:nvSpPr>
+          <p:spPr>
+            <a:xfrm>
+              <a:off x="2177232" y="5699002"/>
+              <a:ext cx="583096" cy="174966"/>
+            </a:xfrm>
+            <a:prstGeom prst="rect">
+              <a:avLst/>
+            </a:prstGeom>
+            <a:noFill/>
+          </p:spPr>
+          <p:txBody>
+            <a:bodyPr wrap="square" rtlCol="0">
+              <a:spAutoFit/>
+            </a:bodyPr>
+            <a:lstStyle/>
+            <a:p>
+              <a:r>
+                <a:rPr lang="en-US" altLang="zh-CN" sz="600" dirty="0"/>
+                <a:t>1001.50</a:t>
+              </a:r>
+              <a:endParaRPr lang="en-US" sz="600" dirty="0"/>
+            </a:p>
+          </p:txBody>
+        </p:sp>
+        <p:sp>
+          <p:nvSpPr>
+            <p:cNvPr id="85" name="TextBox 84">
+              <a:extLst>
+                <a:ext uri="{FF2B5EF4-FFF2-40B4-BE49-F238E27FC236}">
+                  <a16:creationId xmlns:a16="http://schemas.microsoft.com/office/drawing/2014/main" id="{1F479D1A-F9EB-0F6C-8331-B48E4E08DF6B}"/>
+                </a:ext>
+              </a:extLst>
+            </p:cNvPr>
+            <p:cNvSpPr txBox="1"/>
+            <p:nvPr/>
+          </p:nvSpPr>
+          <p:spPr>
+            <a:xfrm>
+              <a:off x="2751791" y="5699002"/>
+              <a:ext cx="583096" cy="174966"/>
+            </a:xfrm>
+            <a:prstGeom prst="rect">
+              <a:avLst/>
+            </a:prstGeom>
+            <a:noFill/>
+          </p:spPr>
+          <p:txBody>
+            <a:bodyPr wrap="square" rtlCol="0">
+              <a:spAutoFit/>
+            </a:bodyPr>
+            <a:lstStyle/>
+            <a:p>
+              <a:r>
+                <a:rPr lang="en-US" altLang="zh-CN" sz="600" dirty="0"/>
+                <a:t>1002.50</a:t>
+              </a:r>
+              <a:endParaRPr lang="en-US" sz="600" dirty="0"/>
+            </a:p>
+          </p:txBody>
+        </p:sp>
+        <p:sp>
+          <p:nvSpPr>
+            <p:cNvPr id="86" name="TextBox 85">
+              <a:extLst>
+                <a:ext uri="{FF2B5EF4-FFF2-40B4-BE49-F238E27FC236}">
+                  <a16:creationId xmlns:a16="http://schemas.microsoft.com/office/drawing/2014/main" id="{5DAAE56F-8674-08AE-18B6-2B49866C45C8}"/>
+                </a:ext>
+              </a:extLst>
+            </p:cNvPr>
+            <p:cNvSpPr txBox="1"/>
+            <p:nvPr/>
+          </p:nvSpPr>
+          <p:spPr>
+            <a:xfrm>
+              <a:off x="3341923" y="5699002"/>
+              <a:ext cx="583096" cy="174966"/>
+            </a:xfrm>
+            <a:prstGeom prst="rect">
+              <a:avLst/>
+            </a:prstGeom>
+            <a:noFill/>
+          </p:spPr>
+          <p:txBody>
+            <a:bodyPr wrap="square" rtlCol="0">
+              <a:spAutoFit/>
+            </a:bodyPr>
+            <a:lstStyle/>
+            <a:p>
+              <a:r>
+                <a:rPr lang="en-US" altLang="zh-CN" sz="600" dirty="0"/>
+                <a:t>1003.50</a:t>
+              </a:r>
+              <a:endParaRPr lang="en-US" sz="600" dirty="0"/>
+            </a:p>
+          </p:txBody>
+        </p:sp>
+      </p:grpSp>
+      <p:cxnSp>
+        <p:nvCxnSpPr>
+          <p:cNvPr id="98" name="Straight Connector 97">
+            <a:extLst>
+              <a:ext uri="{FF2B5EF4-FFF2-40B4-BE49-F238E27FC236}">
+                <a16:creationId xmlns:a16="http://schemas.microsoft.com/office/drawing/2014/main" id="{AF751E78-0B0A-88C2-7233-FA80CB3DA134}"/>
+              </a:ext>
+            </a:extLst>
+          </p:cNvPr>
+          <p:cNvCxnSpPr>
+            <a:cxnSpLocks/>
+          </p:cNvCxnSpPr>
+          <p:nvPr/>
+        </p:nvCxnSpPr>
+        <p:spPr>
+          <a:xfrm>
+            <a:off x="6807596" y="3166498"/>
+            <a:ext cx="0" cy="474204"/>
+          </a:xfrm>
+          <a:prstGeom prst="line">
+            <a:avLst/>
+          </a:prstGeom>
+          <a:ln w="19050" cap="flat" cmpd="sng" algn="ctr">
+            <a:solidFill>
+              <a:schemeClr val="accent6"/>
+            </a:solidFill>
+            <a:prstDash val="dash"/>
+            <a:round/>
+            <a:headEnd type="none" w="med" len="med"/>
+            <a:tailEnd type="none" w="med" len="med"/>
+          </a:ln>
+        </p:spPr>
+        <p:style>
+          <a:lnRef idx="0">
+            <a:scrgbClr r="0" g="0" b="0"/>
+          </a:lnRef>
+          <a:fillRef idx="0">
+            <a:scrgbClr r="0" g="0" b="0"/>
+          </a:fillRef>
+          <a:effectRef idx="0">
+            <a:scrgbClr r="0" g="0" b="0"/>
+          </a:effectRef>
+          <a:fontRef idx="minor">
+            <a:schemeClr val="tx1"/>
+          </a:fontRef>
+        </p:style>
+      </p:cxnSp>
+      <p:cxnSp>
+        <p:nvCxnSpPr>
+          <p:cNvPr id="99" name="Straight Connector 98">
+            <a:extLst>
+              <a:ext uri="{FF2B5EF4-FFF2-40B4-BE49-F238E27FC236}">
+                <a16:creationId xmlns:a16="http://schemas.microsoft.com/office/drawing/2014/main" id="{3E47F4D4-CDA2-F5EE-BBC0-D106904F4A72}"/>
+              </a:ext>
+            </a:extLst>
+          </p:cNvPr>
+          <p:cNvCxnSpPr>
+            <a:cxnSpLocks/>
+          </p:cNvCxnSpPr>
+          <p:nvPr/>
+        </p:nvCxnSpPr>
+        <p:spPr>
+          <a:xfrm>
+            <a:off x="7253887" y="3162960"/>
+            <a:ext cx="0" cy="182880"/>
+          </a:xfrm>
+          <a:prstGeom prst="line">
+            <a:avLst/>
+          </a:prstGeom>
+          <a:ln w="19050" cap="flat" cmpd="sng" algn="ctr">
+            <a:solidFill>
+              <a:schemeClr val="accent6"/>
+            </a:solidFill>
+            <a:prstDash val="dash"/>
+            <a:round/>
+            <a:headEnd type="none" w="med" len="med"/>
+            <a:tailEnd type="none" w="med" len="med"/>
+          </a:ln>
+        </p:spPr>
+        <p:style>
+          <a:lnRef idx="0">
+            <a:scrgbClr r="0" g="0" b="0"/>
+          </a:lnRef>
+          <a:fillRef idx="0">
+            <a:scrgbClr r="0" g="0" b="0"/>
+          </a:fillRef>
+          <a:effectRef idx="0">
+            <a:scrgbClr r="0" g="0" b="0"/>
+          </a:effectRef>
+          <a:fontRef idx="minor">
+            <a:schemeClr val="tx1"/>
+          </a:fontRef>
+        </p:style>
+      </p:cxnSp>
+      <p:cxnSp>
+        <p:nvCxnSpPr>
+          <p:cNvPr id="100" name="Straight Connector 99">
+            <a:extLst>
+              <a:ext uri="{FF2B5EF4-FFF2-40B4-BE49-F238E27FC236}">
+                <a16:creationId xmlns:a16="http://schemas.microsoft.com/office/drawing/2014/main" id="{59651C77-A9B7-7B56-EC5F-D2D2E0D3E2D1}"/>
+              </a:ext>
+            </a:extLst>
+          </p:cNvPr>
+          <p:cNvCxnSpPr>
+            <a:cxnSpLocks/>
+          </p:cNvCxnSpPr>
+          <p:nvPr/>
+        </p:nvCxnSpPr>
+        <p:spPr>
+          <a:xfrm>
+            <a:off x="7727394" y="3345840"/>
+            <a:ext cx="0" cy="734942"/>
+          </a:xfrm>
+          <a:prstGeom prst="line">
+            <a:avLst/>
+          </a:prstGeom>
+          <a:ln w="19050" cap="flat" cmpd="sng" algn="ctr">
+            <a:solidFill>
+              <a:schemeClr val="accent6"/>
+            </a:solidFill>
+            <a:prstDash val="dash"/>
+            <a:round/>
+            <a:headEnd type="none" w="med" len="med"/>
+            <a:tailEnd type="none" w="med" len="med"/>
+          </a:ln>
+        </p:spPr>
+        <p:style>
+          <a:lnRef idx="0">
+            <a:scrgbClr r="0" g="0" b="0"/>
+          </a:lnRef>
+          <a:fillRef idx="0">
+            <a:scrgbClr r="0" g="0" b="0"/>
+          </a:fillRef>
+          <a:effectRef idx="0">
+            <a:scrgbClr r="0" g="0" b="0"/>
+          </a:effectRef>
+          <a:fontRef idx="minor">
+            <a:schemeClr val="tx1"/>
+          </a:fontRef>
+        </p:style>
+      </p:cxnSp>
+      <p:grpSp>
+        <p:nvGrpSpPr>
+          <p:cNvPr id="101" name="Group 100">
+            <a:extLst>
+              <a:ext uri="{FF2B5EF4-FFF2-40B4-BE49-F238E27FC236}">
+                <a16:creationId xmlns:a16="http://schemas.microsoft.com/office/drawing/2014/main" id="{42354B8D-38FA-7756-7C85-B9DFAC054080}"/>
+              </a:ext>
+            </a:extLst>
+          </p:cNvPr>
+          <p:cNvGrpSpPr/>
+          <p:nvPr/>
+        </p:nvGrpSpPr>
+        <p:grpSpPr>
+          <a:xfrm>
+            <a:off x="9097555" y="1518462"/>
+            <a:ext cx="2526030" cy="1513670"/>
+            <a:chOff x="3241965" y="1191762"/>
+            <a:chExt cx="4003962" cy="2950747"/>
+          </a:xfrm>
+        </p:grpSpPr>
+        <p:grpSp>
+          <p:nvGrpSpPr>
+            <p:cNvPr id="102" name="Group 101">
+              <a:extLst>
+                <a:ext uri="{FF2B5EF4-FFF2-40B4-BE49-F238E27FC236}">
+                  <a16:creationId xmlns:a16="http://schemas.microsoft.com/office/drawing/2014/main" id="{E54F5B7B-7317-300D-B33F-DF056B85ABC6}"/>
+                </a:ext>
+              </a:extLst>
+            </p:cNvPr>
+            <p:cNvGrpSpPr/>
+            <p:nvPr/>
+          </p:nvGrpSpPr>
+          <p:grpSpPr>
+            <a:xfrm>
+              <a:off x="3241965" y="1191762"/>
+              <a:ext cx="4003962" cy="2950747"/>
+              <a:chOff x="4266007" y="2155669"/>
+              <a:chExt cx="2831492" cy="1882483"/>
+            </a:xfrm>
+          </p:grpSpPr>
+          <p:cxnSp>
+            <p:nvCxnSpPr>
+              <p:cNvPr id="104" name="Straight Connector 103">
+                <a:extLst>
+                  <a:ext uri="{FF2B5EF4-FFF2-40B4-BE49-F238E27FC236}">
+                    <a16:creationId xmlns:a16="http://schemas.microsoft.com/office/drawing/2014/main" id="{00922833-25A2-FEEE-E995-2231841D8833}"/>
+                  </a:ext>
+                </a:extLst>
+              </p:cNvPr>
+              <p:cNvCxnSpPr/>
+              <p:nvPr/>
+            </p:nvCxnSpPr>
+            <p:spPr>
+              <a:xfrm>
+                <a:off x="4266007" y="2155669"/>
+                <a:ext cx="0" cy="1866378"/>
+              </a:xfrm>
+              <a:prstGeom prst="line">
+                <a:avLst/>
+              </a:prstGeom>
+            </p:spPr>
+            <p:style>
+              <a:lnRef idx="2">
+                <a:schemeClr val="accent1"/>
+              </a:lnRef>
+              <a:fillRef idx="0">
+                <a:schemeClr val="accent1"/>
+              </a:fillRef>
+              <a:effectRef idx="1">
+                <a:schemeClr val="accent1"/>
+              </a:effectRef>
+              <a:fontRef idx="minor">
+                <a:schemeClr val="tx1"/>
+              </a:fontRef>
+            </p:style>
+          </p:cxnSp>
+          <p:cxnSp>
+            <p:nvCxnSpPr>
+              <p:cNvPr id="105" name="Straight Connector 104">
+                <a:extLst>
+                  <a:ext uri="{FF2B5EF4-FFF2-40B4-BE49-F238E27FC236}">
+                    <a16:creationId xmlns:a16="http://schemas.microsoft.com/office/drawing/2014/main" id="{980C270C-0E87-5BAA-2A5F-56E9FCC9F061}"/>
+                  </a:ext>
+                </a:extLst>
+              </p:cNvPr>
+              <p:cNvCxnSpPr>
+                <a:cxnSpLocks/>
+              </p:cNvCxnSpPr>
+              <p:nvPr/>
+            </p:nvCxnSpPr>
+            <p:spPr>
+              <a:xfrm flipH="1">
+                <a:off x="4266007" y="4038152"/>
+                <a:ext cx="2831492" cy="0"/>
+              </a:xfrm>
+              <a:prstGeom prst="line">
+                <a:avLst/>
+              </a:prstGeom>
+            </p:spPr>
+            <p:style>
+              <a:lnRef idx="2">
+                <a:schemeClr val="accent1"/>
+              </a:lnRef>
+              <a:fillRef idx="0">
+                <a:schemeClr val="accent1"/>
+              </a:fillRef>
+              <a:effectRef idx="1">
+                <a:schemeClr val="accent1"/>
+              </a:effectRef>
+              <a:fontRef idx="minor">
+                <a:schemeClr val="tx1"/>
+              </a:fontRef>
+            </p:style>
+          </p:cxnSp>
+          <p:cxnSp>
+            <p:nvCxnSpPr>
+              <p:cNvPr id="106" name="Straight Connector 105">
+                <a:extLst>
+                  <a:ext uri="{FF2B5EF4-FFF2-40B4-BE49-F238E27FC236}">
+                    <a16:creationId xmlns:a16="http://schemas.microsoft.com/office/drawing/2014/main" id="{1FA2C31C-2FD4-ECE9-6A37-6A6BD17C6F7F}"/>
+                  </a:ext>
+                </a:extLst>
+              </p:cNvPr>
+              <p:cNvCxnSpPr>
+                <a:cxnSpLocks/>
+              </p:cNvCxnSpPr>
+              <p:nvPr/>
+            </p:nvCxnSpPr>
+            <p:spPr>
+              <a:xfrm>
+                <a:off x="5276222" y="2732314"/>
+                <a:ext cx="0" cy="1305838"/>
+              </a:xfrm>
+              <a:prstGeom prst="line">
+                <a:avLst/>
+              </a:prstGeom>
+            </p:spPr>
+            <p:style>
+              <a:lnRef idx="2">
+                <a:schemeClr val="accent4"/>
+              </a:lnRef>
+              <a:fillRef idx="0">
+                <a:schemeClr val="accent4"/>
+              </a:fillRef>
+              <a:effectRef idx="1">
+                <a:schemeClr val="accent4"/>
+              </a:effectRef>
+              <a:fontRef idx="minor">
+                <a:schemeClr val="tx1"/>
+              </a:fontRef>
+            </p:style>
+          </p:cxnSp>
+          <p:cxnSp>
+            <p:nvCxnSpPr>
+              <p:cNvPr id="107" name="Straight Connector 106">
+                <a:extLst>
+                  <a:ext uri="{FF2B5EF4-FFF2-40B4-BE49-F238E27FC236}">
+                    <a16:creationId xmlns:a16="http://schemas.microsoft.com/office/drawing/2014/main" id="{52B36A19-561D-C5C6-4EBF-F81803730106}"/>
+                  </a:ext>
+                </a:extLst>
+              </p:cNvPr>
+              <p:cNvCxnSpPr>
+                <a:cxnSpLocks/>
+              </p:cNvCxnSpPr>
+              <p:nvPr/>
+            </p:nvCxnSpPr>
+            <p:spPr>
+              <a:xfrm>
+                <a:off x="5769343" y="2269597"/>
+                <a:ext cx="0" cy="1768555"/>
+              </a:xfrm>
+              <a:prstGeom prst="line">
+                <a:avLst/>
+              </a:prstGeom>
+            </p:spPr>
+            <p:style>
+              <a:lnRef idx="2">
+                <a:schemeClr val="accent4"/>
+              </a:lnRef>
+              <a:fillRef idx="0">
+                <a:schemeClr val="accent4"/>
+              </a:fillRef>
+              <a:effectRef idx="1">
+                <a:schemeClr val="accent4"/>
+              </a:effectRef>
+              <a:fontRef idx="minor">
+                <a:schemeClr val="tx1"/>
+              </a:fontRef>
+            </p:style>
+          </p:cxnSp>
+          <p:cxnSp>
+            <p:nvCxnSpPr>
+              <p:cNvPr id="108" name="Straight Connector 107">
+                <a:extLst>
+                  <a:ext uri="{FF2B5EF4-FFF2-40B4-BE49-F238E27FC236}">
+                    <a16:creationId xmlns:a16="http://schemas.microsoft.com/office/drawing/2014/main" id="{91574344-AA4E-6496-2A53-36ECE065D78D}"/>
+                  </a:ext>
+                </a:extLst>
+              </p:cNvPr>
+              <p:cNvCxnSpPr>
+                <a:cxnSpLocks/>
+              </p:cNvCxnSpPr>
+              <p:nvPr/>
+            </p:nvCxnSpPr>
+            <p:spPr>
+              <a:xfrm>
+                <a:off x="6284302" y="3037114"/>
+                <a:ext cx="0" cy="1001038"/>
+              </a:xfrm>
+              <a:prstGeom prst="line">
+                <a:avLst/>
+              </a:prstGeom>
+            </p:spPr>
+            <p:style>
+              <a:lnRef idx="2">
+                <a:schemeClr val="accent4"/>
+              </a:lnRef>
+              <a:fillRef idx="0">
+                <a:schemeClr val="accent4"/>
+              </a:fillRef>
+              <a:effectRef idx="1">
+                <a:schemeClr val="accent4"/>
+              </a:effectRef>
+              <a:fontRef idx="minor">
+                <a:schemeClr val="tx1"/>
+              </a:fontRef>
+            </p:style>
+          </p:cxnSp>
+        </p:grpSp>
+        <p:cxnSp>
+          <p:nvCxnSpPr>
+            <p:cNvPr id="103" name="Straight Connector 102">
+              <a:extLst>
+                <a:ext uri="{FF2B5EF4-FFF2-40B4-BE49-F238E27FC236}">
+                  <a16:creationId xmlns:a16="http://schemas.microsoft.com/office/drawing/2014/main" id="{FC37E1FA-86EE-BC41-8F89-BAB1BDEBB2FA}"/>
+                </a:ext>
+              </a:extLst>
+            </p:cNvPr>
+            <p:cNvCxnSpPr>
+              <a:cxnSpLocks/>
+            </p:cNvCxnSpPr>
+            <p:nvPr/>
+          </p:nvCxnSpPr>
+          <p:spPr>
+            <a:xfrm>
+              <a:off x="3950056" y="3020291"/>
+              <a:ext cx="0" cy="1122218"/>
+            </a:xfrm>
+            <a:prstGeom prst="line">
+              <a:avLst/>
+            </a:prstGeom>
+          </p:spPr>
+          <p:style>
+            <a:lnRef idx="2">
+              <a:schemeClr val="accent4"/>
+            </a:lnRef>
+            <a:fillRef idx="0">
+              <a:schemeClr val="accent4"/>
+            </a:fillRef>
+            <a:effectRef idx="1">
+              <a:schemeClr val="accent4"/>
+            </a:effectRef>
+            <a:fontRef idx="minor">
+              <a:schemeClr val="tx1"/>
+            </a:fontRef>
+          </p:style>
+        </p:cxnSp>
+      </p:grpSp>
+      <p:grpSp>
+        <p:nvGrpSpPr>
+          <p:cNvPr id="109" name="Group 108">
+            <a:extLst>
+              <a:ext uri="{FF2B5EF4-FFF2-40B4-BE49-F238E27FC236}">
+                <a16:creationId xmlns:a16="http://schemas.microsoft.com/office/drawing/2014/main" id="{EDDA2E93-16BA-DF5C-137C-A89DCCED579D}"/>
+              </a:ext>
+            </a:extLst>
+          </p:cNvPr>
+          <p:cNvGrpSpPr/>
+          <p:nvPr/>
+        </p:nvGrpSpPr>
+        <p:grpSpPr>
+          <a:xfrm>
+            <a:off x="9250653" y="3429000"/>
+            <a:ext cx="2526022" cy="1987587"/>
+            <a:chOff x="1766454" y="3747610"/>
+            <a:chExt cx="3186544" cy="2139304"/>
+          </a:xfrm>
+        </p:grpSpPr>
+        <p:grpSp>
+          <p:nvGrpSpPr>
+            <p:cNvPr id="115" name="Group 114">
+              <a:extLst>
+                <a:ext uri="{FF2B5EF4-FFF2-40B4-BE49-F238E27FC236}">
+                  <a16:creationId xmlns:a16="http://schemas.microsoft.com/office/drawing/2014/main" id="{130007AD-00D9-2F6C-2F98-44444AB3483B}"/>
+                </a:ext>
+              </a:extLst>
+            </p:cNvPr>
+            <p:cNvGrpSpPr/>
+            <p:nvPr/>
+          </p:nvGrpSpPr>
+          <p:grpSpPr>
+            <a:xfrm>
+              <a:off x="1766454" y="3747610"/>
+              <a:ext cx="3186544" cy="1863483"/>
+              <a:chOff x="4266007" y="2430531"/>
+              <a:chExt cx="2831492" cy="1607621"/>
+            </a:xfrm>
+          </p:grpSpPr>
+          <p:cxnSp>
+            <p:nvCxnSpPr>
+              <p:cNvPr id="117" name="Straight Connector 116">
+                <a:extLst>
+                  <a:ext uri="{FF2B5EF4-FFF2-40B4-BE49-F238E27FC236}">
+                    <a16:creationId xmlns:a16="http://schemas.microsoft.com/office/drawing/2014/main" id="{7B749B26-2477-814D-6C5B-A36AB31D63FE}"/>
+                  </a:ext>
+                </a:extLst>
+              </p:cNvPr>
+              <p:cNvCxnSpPr>
+                <a:cxnSpLocks/>
+              </p:cNvCxnSpPr>
+              <p:nvPr/>
+            </p:nvCxnSpPr>
+            <p:spPr>
+              <a:xfrm flipH="1">
+                <a:off x="4266007" y="4038152"/>
+                <a:ext cx="2831492" cy="0"/>
+              </a:xfrm>
+              <a:prstGeom prst="line">
+                <a:avLst/>
+              </a:prstGeom>
+            </p:spPr>
+            <p:style>
+              <a:lnRef idx="2">
+                <a:schemeClr val="accent1"/>
+              </a:lnRef>
+              <a:fillRef idx="0">
+                <a:schemeClr val="accent1"/>
+              </a:fillRef>
+              <a:effectRef idx="1">
+                <a:schemeClr val="accent1"/>
+              </a:effectRef>
+              <a:fontRef idx="minor">
+                <a:schemeClr val="tx1"/>
+              </a:fontRef>
+            </p:style>
+          </p:cxnSp>
+          <p:cxnSp>
+            <p:nvCxnSpPr>
+              <p:cNvPr id="119" name="Straight Connector 118">
+                <a:extLst>
+                  <a:ext uri="{FF2B5EF4-FFF2-40B4-BE49-F238E27FC236}">
+                    <a16:creationId xmlns:a16="http://schemas.microsoft.com/office/drawing/2014/main" id="{BD43D3D7-AB7F-E93D-B6CF-15C01975701B}"/>
+                  </a:ext>
+                </a:extLst>
+              </p:cNvPr>
+              <p:cNvCxnSpPr>
+                <a:cxnSpLocks/>
+              </p:cNvCxnSpPr>
+              <p:nvPr/>
+            </p:nvCxnSpPr>
+            <p:spPr>
+              <a:xfrm>
+                <a:off x="4642038" y="2430531"/>
+                <a:ext cx="0" cy="1607621"/>
+              </a:xfrm>
+              <a:prstGeom prst="line">
+                <a:avLst/>
+              </a:prstGeom>
+            </p:spPr>
+            <p:style>
+              <a:lnRef idx="2">
+                <a:schemeClr val="accent2"/>
+              </a:lnRef>
+              <a:fillRef idx="0">
+                <a:schemeClr val="accent2"/>
+              </a:fillRef>
+              <a:effectRef idx="1">
+                <a:schemeClr val="accent2"/>
+              </a:effectRef>
+              <a:fontRef idx="minor">
+                <a:schemeClr val="tx1"/>
+              </a:fontRef>
+            </p:style>
+          </p:cxnSp>
+          <p:cxnSp>
+            <p:nvCxnSpPr>
+              <p:cNvPr id="120" name="Straight Connector 119">
+                <a:extLst>
+                  <a:ext uri="{FF2B5EF4-FFF2-40B4-BE49-F238E27FC236}">
+                    <a16:creationId xmlns:a16="http://schemas.microsoft.com/office/drawing/2014/main" id="{35353B75-43B0-F654-2D10-A49D87C108F9}"/>
+                  </a:ext>
+                </a:extLst>
+              </p:cNvPr>
+              <p:cNvCxnSpPr>
+                <a:cxnSpLocks/>
+              </p:cNvCxnSpPr>
+              <p:nvPr/>
+            </p:nvCxnSpPr>
+            <p:spPr>
+              <a:xfrm>
+                <a:off x="5156997" y="3153874"/>
+                <a:ext cx="0" cy="884278"/>
+              </a:xfrm>
+              <a:prstGeom prst="line">
+                <a:avLst/>
+              </a:prstGeom>
+            </p:spPr>
+            <p:style>
+              <a:lnRef idx="2">
+                <a:schemeClr val="accent2"/>
+              </a:lnRef>
+              <a:fillRef idx="0">
+                <a:schemeClr val="accent2"/>
+              </a:fillRef>
+              <a:effectRef idx="1">
+                <a:schemeClr val="accent2"/>
+              </a:effectRef>
+              <a:fontRef idx="minor">
+                <a:schemeClr val="tx1"/>
+              </a:fontRef>
+            </p:style>
+          </p:cxnSp>
+        </p:grpSp>
+        <p:sp>
+          <p:nvSpPr>
+            <p:cNvPr id="113" name="TextBox 112">
+              <a:extLst>
+                <a:ext uri="{FF2B5EF4-FFF2-40B4-BE49-F238E27FC236}">
+                  <a16:creationId xmlns:a16="http://schemas.microsoft.com/office/drawing/2014/main" id="{5AF92CAA-03FA-8418-845E-AC2609736024}"/>
+                </a:ext>
+              </a:extLst>
+            </p:cNvPr>
+            <p:cNvSpPr txBox="1"/>
+            <p:nvPr/>
+          </p:nvSpPr>
+          <p:spPr>
+            <a:xfrm>
+              <a:off x="1898089" y="5711948"/>
+              <a:ext cx="583096" cy="174966"/>
+            </a:xfrm>
+            <a:prstGeom prst="rect">
+              <a:avLst/>
+            </a:prstGeom>
+            <a:noFill/>
+          </p:spPr>
+          <p:txBody>
+            <a:bodyPr wrap="square" rtlCol="0">
+              <a:spAutoFit/>
+            </a:bodyPr>
+            <a:lstStyle/>
+            <a:p>
+              <a:r>
+                <a:rPr lang="en-US" altLang="zh-CN" sz="600" dirty="0"/>
+                <a:t>1002.50</a:t>
+              </a:r>
+              <a:endParaRPr lang="en-US" sz="600" dirty="0"/>
+            </a:p>
+          </p:txBody>
+        </p:sp>
+        <p:sp>
+          <p:nvSpPr>
+            <p:cNvPr id="114" name="TextBox 113">
+              <a:extLst>
+                <a:ext uri="{FF2B5EF4-FFF2-40B4-BE49-F238E27FC236}">
+                  <a16:creationId xmlns:a16="http://schemas.microsoft.com/office/drawing/2014/main" id="{89292386-57C6-49B9-5F05-439B93FB1D5A}"/>
+                </a:ext>
+              </a:extLst>
+            </p:cNvPr>
+            <p:cNvSpPr txBox="1"/>
+            <p:nvPr/>
+          </p:nvSpPr>
+          <p:spPr>
+            <a:xfrm>
+              <a:off x="2459221" y="5711948"/>
+              <a:ext cx="583096" cy="174966"/>
+            </a:xfrm>
+            <a:prstGeom prst="rect">
+              <a:avLst/>
+            </a:prstGeom>
+            <a:noFill/>
+          </p:spPr>
+          <p:txBody>
+            <a:bodyPr wrap="square" rtlCol="0">
+              <a:spAutoFit/>
+            </a:bodyPr>
+            <a:lstStyle/>
+            <a:p>
+              <a:r>
+                <a:rPr lang="en-US" altLang="zh-CN" sz="600" dirty="0"/>
+                <a:t>1003.50</a:t>
+              </a:r>
+              <a:endParaRPr lang="en-US" sz="600" dirty="0"/>
+            </a:p>
+          </p:txBody>
+        </p:sp>
+      </p:grpSp>
+      <p:cxnSp>
+        <p:nvCxnSpPr>
+          <p:cNvPr id="121" name="Straight Connector 120">
+            <a:extLst>
+              <a:ext uri="{FF2B5EF4-FFF2-40B4-BE49-F238E27FC236}">
+                <a16:creationId xmlns:a16="http://schemas.microsoft.com/office/drawing/2014/main" id="{5D1644B7-FAB4-03B4-1869-558FEEC4F944}"/>
+              </a:ext>
+            </a:extLst>
+          </p:cNvPr>
+          <p:cNvCxnSpPr>
+            <a:cxnSpLocks/>
+          </p:cNvCxnSpPr>
+          <p:nvPr/>
+        </p:nvCxnSpPr>
+        <p:spPr>
+          <a:xfrm>
+            <a:off x="10045521" y="3273231"/>
+            <a:ext cx="0" cy="734942"/>
+          </a:xfrm>
+          <a:prstGeom prst="line">
+            <a:avLst/>
+          </a:prstGeom>
+          <a:ln w="19050" cap="flat" cmpd="sng" algn="ctr">
+            <a:solidFill>
+              <a:schemeClr val="accent6"/>
+            </a:solidFill>
+            <a:prstDash val="dash"/>
+            <a:round/>
+            <a:headEnd type="none" w="med" len="med"/>
+            <a:tailEnd type="none" w="med" len="med"/>
+          </a:ln>
+        </p:spPr>
+        <p:style>
+          <a:lnRef idx="0">
+            <a:scrgbClr r="0" g="0" b="0"/>
+          </a:lnRef>
+          <a:fillRef idx="0">
+            <a:scrgbClr r="0" g="0" b="0"/>
+          </a:fillRef>
+          <a:effectRef idx="0">
+            <a:scrgbClr r="0" g="0" b="0"/>
+          </a:effectRef>
+          <a:fontRef idx="minor">
+            <a:schemeClr val="tx1"/>
+          </a:fontRef>
+        </p:style>
+      </p:cxnSp>
+      <p:cxnSp>
+        <p:nvCxnSpPr>
+          <p:cNvPr id="123" name="Straight Connector 122">
+            <a:extLst>
+              <a:ext uri="{FF2B5EF4-FFF2-40B4-BE49-F238E27FC236}">
+                <a16:creationId xmlns:a16="http://schemas.microsoft.com/office/drawing/2014/main" id="{3A8F71A6-3C28-2F13-CCFF-E76891A604F8}"/>
+              </a:ext>
+            </a:extLst>
+          </p:cNvPr>
+          <p:cNvCxnSpPr>
+            <a:cxnSpLocks/>
+          </p:cNvCxnSpPr>
+          <p:nvPr/>
+        </p:nvCxnSpPr>
+        <p:spPr>
+          <a:xfrm>
+            <a:off x="9584438" y="3142756"/>
+            <a:ext cx="0" cy="182880"/>
+          </a:xfrm>
+          <a:prstGeom prst="line">
+            <a:avLst/>
+          </a:prstGeom>
+          <a:ln w="19050" cap="flat" cmpd="sng" algn="ctr">
+            <a:solidFill>
+              <a:schemeClr val="accent6"/>
+            </a:solidFill>
+            <a:prstDash val="dash"/>
+            <a:round/>
+            <a:headEnd type="none" w="med" len="med"/>
+            <a:tailEnd type="none" w="med" len="med"/>
+          </a:ln>
+        </p:spPr>
+        <p:style>
+          <a:lnRef idx="0">
+            <a:scrgbClr r="0" g="0" b="0"/>
+          </a:lnRef>
+          <a:fillRef idx="0">
+            <a:scrgbClr r="0" g="0" b="0"/>
+          </a:fillRef>
+          <a:effectRef idx="0">
+            <a:scrgbClr r="0" g="0" b="0"/>
+          </a:effectRef>
+          <a:fontRef idx="minor">
+            <a:schemeClr val="tx1"/>
+          </a:fontRef>
+        </p:style>
+      </p:cxnSp>
+      <p:sp>
+        <p:nvSpPr>
+          <p:cNvPr id="124" name="TextBox 123">
+            <a:extLst>
+              <a:ext uri="{FF2B5EF4-FFF2-40B4-BE49-F238E27FC236}">
+                <a16:creationId xmlns:a16="http://schemas.microsoft.com/office/drawing/2014/main" id="{562C44D3-291D-EBF1-2463-9CFA3B629E1D}"/>
+              </a:ext>
+            </a:extLst>
+          </p:cNvPr>
+          <p:cNvSpPr txBox="1"/>
+          <p:nvPr/>
+        </p:nvSpPr>
+        <p:spPr>
+          <a:xfrm>
+            <a:off x="4927615" y="6130207"/>
+            <a:ext cx="4034693" cy="369332"/>
+          </a:xfrm>
+          <a:prstGeom prst="rect">
+            <a:avLst/>
+          </a:prstGeom>
+          <a:noFill/>
+        </p:spPr>
+        <p:txBody>
+          <a:bodyPr wrap="square" rtlCol="0">
+            <a:spAutoFit/>
+          </a:bodyPr>
+          <a:lstStyle/>
+          <a:p>
+            <a:r>
+              <a:rPr lang="en-US" dirty="0"/>
+              <a:t>Observed Intensity Distribution</a:t>
+            </a:r>
+          </a:p>
+        </p:txBody>
+      </p:sp>
+      <p:sp>
+        <p:nvSpPr>
+          <p:cNvPr id="125" name="TextBox 124">
+            <a:extLst>
+              <a:ext uri="{FF2B5EF4-FFF2-40B4-BE49-F238E27FC236}">
+                <a16:creationId xmlns:a16="http://schemas.microsoft.com/office/drawing/2014/main" id="{782933C1-4FF1-91A2-B913-1AB0665BAB85}"/>
+              </a:ext>
+            </a:extLst>
+          </p:cNvPr>
+          <p:cNvSpPr txBox="1"/>
+          <p:nvPr/>
+        </p:nvSpPr>
+        <p:spPr>
+          <a:xfrm>
+            <a:off x="1440997" y="5449056"/>
+            <a:ext cx="1143057" cy="276999"/>
+          </a:xfrm>
+          <a:prstGeom prst="rect">
+            <a:avLst/>
+          </a:prstGeom>
+          <a:noFill/>
+        </p:spPr>
+        <p:txBody>
+          <a:bodyPr wrap="square" rtlCol="0">
+            <a:spAutoFit/>
+          </a:bodyPr>
+          <a:lstStyle/>
+          <a:p>
+            <a:r>
+              <a:rPr lang="en-US" sz="1200" dirty="0"/>
+              <a:t>Low Similarity</a:t>
+            </a:r>
+          </a:p>
+        </p:txBody>
+      </p:sp>
+      <p:sp>
+        <p:nvSpPr>
+          <p:cNvPr id="126" name="TextBox 125">
+            <a:extLst>
+              <a:ext uri="{FF2B5EF4-FFF2-40B4-BE49-F238E27FC236}">
+                <a16:creationId xmlns:a16="http://schemas.microsoft.com/office/drawing/2014/main" id="{418CAA15-E4B3-CC10-43A6-DC9C1B657F65}"/>
+              </a:ext>
+            </a:extLst>
+          </p:cNvPr>
+          <p:cNvSpPr txBox="1"/>
+          <p:nvPr/>
+        </p:nvSpPr>
+        <p:spPr>
+          <a:xfrm>
+            <a:off x="6765736" y="5514315"/>
+            <a:ext cx="1828788" cy="276999"/>
+          </a:xfrm>
+          <a:prstGeom prst="rect">
+            <a:avLst/>
+          </a:prstGeom>
+          <a:noFill/>
+        </p:spPr>
+        <p:txBody>
+          <a:bodyPr wrap="square" rtlCol="0">
+            <a:spAutoFit/>
+          </a:bodyPr>
+          <a:lstStyle/>
+          <a:p>
+            <a:r>
+              <a:rPr lang="en-US" sz="1200" dirty="0"/>
+              <a:t>Low Similarity</a:t>
+            </a:r>
+          </a:p>
+        </p:txBody>
+      </p:sp>
+      <p:sp>
+        <p:nvSpPr>
+          <p:cNvPr id="127" name="TextBox 126">
+            <a:extLst>
+              <a:ext uri="{FF2B5EF4-FFF2-40B4-BE49-F238E27FC236}">
+                <a16:creationId xmlns:a16="http://schemas.microsoft.com/office/drawing/2014/main" id="{C4DCA52D-09A3-30F8-D134-F822286A6051}"/>
+              </a:ext>
+            </a:extLst>
+          </p:cNvPr>
+          <p:cNvSpPr txBox="1"/>
+          <p:nvPr/>
+        </p:nvSpPr>
+        <p:spPr>
+          <a:xfrm>
+            <a:off x="9347655" y="5504373"/>
+            <a:ext cx="1828788" cy="276999"/>
+          </a:xfrm>
+          <a:prstGeom prst="rect">
+            <a:avLst/>
+          </a:prstGeom>
+          <a:noFill/>
+        </p:spPr>
+        <p:txBody>
+          <a:bodyPr wrap="square" rtlCol="0">
+            <a:spAutoFit/>
+          </a:bodyPr>
+          <a:lstStyle/>
+          <a:p>
+            <a:r>
+              <a:rPr lang="en-US" sz="1200" dirty="0"/>
+              <a:t>Low Similarity</a:t>
+            </a:r>
+          </a:p>
+        </p:txBody>
+      </p:sp>
+      <p:sp>
+        <p:nvSpPr>
+          <p:cNvPr id="128" name="TextBox 127">
+            <a:extLst>
+              <a:ext uri="{FF2B5EF4-FFF2-40B4-BE49-F238E27FC236}">
+                <a16:creationId xmlns:a16="http://schemas.microsoft.com/office/drawing/2014/main" id="{695D9953-E8F2-A67C-3E79-C01E7CE8977D}"/>
+              </a:ext>
+            </a:extLst>
+          </p:cNvPr>
+          <p:cNvSpPr txBox="1"/>
+          <p:nvPr/>
+        </p:nvSpPr>
+        <p:spPr>
+          <a:xfrm>
+            <a:off x="4247806" y="5514314"/>
+            <a:ext cx="1828788" cy="276999"/>
+          </a:xfrm>
+          <a:prstGeom prst="rect">
+            <a:avLst/>
+          </a:prstGeom>
+          <a:noFill/>
+        </p:spPr>
+        <p:txBody>
+          <a:bodyPr wrap="square" rtlCol="0">
+            <a:spAutoFit/>
+          </a:bodyPr>
+          <a:lstStyle/>
+          <a:p>
+            <a:r>
+              <a:rPr lang="en-US" sz="1200" dirty="0"/>
+              <a:t>High Similarity</a:t>
+            </a:r>
+          </a:p>
+        </p:txBody>
+      </p:sp>
+      <p:sp>
+        <p:nvSpPr>
+          <p:cNvPr id="129" name="TextBox 128">
+            <a:extLst>
+              <a:ext uri="{FF2B5EF4-FFF2-40B4-BE49-F238E27FC236}">
+                <a16:creationId xmlns:a16="http://schemas.microsoft.com/office/drawing/2014/main" id="{CDA96F8C-D847-A503-AB35-78750F84B595}"/>
+              </a:ext>
+            </a:extLst>
+          </p:cNvPr>
+          <p:cNvSpPr txBox="1"/>
+          <p:nvPr/>
+        </p:nvSpPr>
+        <p:spPr>
+          <a:xfrm>
+            <a:off x="3228429" y="5828973"/>
+            <a:ext cx="1349391" cy="400110"/>
+          </a:xfrm>
+          <a:prstGeom prst="rect">
+            <a:avLst/>
+          </a:prstGeom>
+          <a:noFill/>
+        </p:spPr>
+        <p:txBody>
+          <a:bodyPr wrap="square" rtlCol="0">
+            <a:spAutoFit/>
+          </a:bodyPr>
+          <a:lstStyle/>
+          <a:p>
+            <a:r>
+              <a:rPr lang="en-US" sz="1000" dirty="0"/>
+              <a:t>Predicted Monoisotopic Values</a:t>
+            </a:r>
+          </a:p>
+        </p:txBody>
+      </p:sp>
+      <p:cxnSp>
+        <p:nvCxnSpPr>
+          <p:cNvPr id="130" name="Straight Arrow Connector 129">
+            <a:extLst>
+              <a:ext uri="{FF2B5EF4-FFF2-40B4-BE49-F238E27FC236}">
+                <a16:creationId xmlns:a16="http://schemas.microsoft.com/office/drawing/2014/main" id="{4AAAFFD9-D86C-BDBA-BBFB-938AA491C2C3}"/>
+              </a:ext>
+            </a:extLst>
+          </p:cNvPr>
+          <p:cNvCxnSpPr>
+            <a:cxnSpLocks/>
+          </p:cNvCxnSpPr>
+          <p:nvPr/>
+        </p:nvCxnSpPr>
+        <p:spPr>
+          <a:xfrm flipV="1">
+            <a:off x="3687321" y="5484013"/>
+            <a:ext cx="271606" cy="307300"/>
+          </a:xfrm>
+          <a:prstGeom prst="straightConnector1">
+            <a:avLst/>
+          </a:prstGeom>
+          <a:ln>
+            <a:tailEnd type="triangle"/>
+          </a:ln>
+        </p:spPr>
+        <p:style>
+          <a:lnRef idx="2">
+            <a:schemeClr val="accent1"/>
+          </a:lnRef>
+          <a:fillRef idx="0">
+            <a:schemeClr val="accent1"/>
+          </a:fillRef>
+          <a:effectRef idx="1">
+            <a:schemeClr val="accent1"/>
+          </a:effectRef>
+          <a:fontRef idx="minor">
+            <a:schemeClr val="tx1"/>
+          </a:fontRef>
+        </p:style>
+      </p:cxnSp>
+      <p:sp>
+        <p:nvSpPr>
+          <p:cNvPr id="133" name="TextBox 132">
+            <a:extLst>
+              <a:ext uri="{FF2B5EF4-FFF2-40B4-BE49-F238E27FC236}">
+                <a16:creationId xmlns:a16="http://schemas.microsoft.com/office/drawing/2014/main" id="{23B1E0FD-AC4A-4098-0F8E-582CB50C0666}"/>
+              </a:ext>
+            </a:extLst>
+          </p:cNvPr>
+          <p:cNvSpPr txBox="1"/>
+          <p:nvPr/>
+        </p:nvSpPr>
+        <p:spPr>
+          <a:xfrm>
+            <a:off x="10667037" y="5514314"/>
+            <a:ext cx="384786" cy="276999"/>
+          </a:xfrm>
+          <a:prstGeom prst="rect">
+            <a:avLst/>
+          </a:prstGeom>
+          <a:noFill/>
+        </p:spPr>
+        <p:txBody>
+          <a:bodyPr wrap="square" rtlCol="0">
+            <a:spAutoFit/>
+          </a:bodyPr>
+          <a:lstStyle/>
+          <a:p>
+            <a:r>
+              <a:rPr lang="en-US" sz="1200" dirty="0"/>
+              <a:t>E0</a:t>
+            </a:r>
+          </a:p>
+        </p:txBody>
+      </p:sp>
+      <p:sp>
+        <p:nvSpPr>
+          <p:cNvPr id="134" name="TextBox 133">
+            <a:extLst>
+              <a:ext uri="{FF2B5EF4-FFF2-40B4-BE49-F238E27FC236}">
+                <a16:creationId xmlns:a16="http://schemas.microsoft.com/office/drawing/2014/main" id="{A99C7EF3-B7E6-22A8-EDC9-E6E261878952}"/>
+              </a:ext>
+            </a:extLst>
+          </p:cNvPr>
+          <p:cNvSpPr txBox="1"/>
+          <p:nvPr/>
+        </p:nvSpPr>
+        <p:spPr>
+          <a:xfrm>
+            <a:off x="7956714" y="5540828"/>
+            <a:ext cx="384786" cy="276999"/>
+          </a:xfrm>
+          <a:prstGeom prst="rect">
+            <a:avLst/>
+          </a:prstGeom>
+          <a:noFill/>
+        </p:spPr>
+        <p:txBody>
+          <a:bodyPr wrap="square" rtlCol="0">
+            <a:spAutoFit/>
+          </a:bodyPr>
+          <a:lstStyle/>
+          <a:p>
+            <a:r>
+              <a:rPr lang="en-US" sz="1200" dirty="0"/>
+              <a:t>E1</a:t>
+            </a:r>
+          </a:p>
+        </p:txBody>
+      </p:sp>
+      <p:sp>
+        <p:nvSpPr>
+          <p:cNvPr id="135" name="TextBox 134">
+            <a:extLst>
+              <a:ext uri="{FF2B5EF4-FFF2-40B4-BE49-F238E27FC236}">
+                <a16:creationId xmlns:a16="http://schemas.microsoft.com/office/drawing/2014/main" id="{C7F23E4B-0E19-1B09-5532-8D6C6F2134D5}"/>
+              </a:ext>
+            </a:extLst>
+          </p:cNvPr>
+          <p:cNvSpPr txBox="1"/>
+          <p:nvPr/>
+        </p:nvSpPr>
+        <p:spPr>
+          <a:xfrm>
+            <a:off x="5344694" y="5514313"/>
+            <a:ext cx="384786" cy="276999"/>
+          </a:xfrm>
+          <a:prstGeom prst="rect">
+            <a:avLst/>
+          </a:prstGeom>
+          <a:noFill/>
+        </p:spPr>
+        <p:txBody>
+          <a:bodyPr wrap="square" rtlCol="0">
+            <a:spAutoFit/>
+          </a:bodyPr>
+          <a:lstStyle/>
+          <a:p>
+            <a:r>
+              <a:rPr lang="en-US" sz="1200" dirty="0"/>
+              <a:t>E2</a:t>
+            </a:r>
+          </a:p>
+        </p:txBody>
+      </p:sp>
+      <p:sp>
+        <p:nvSpPr>
+          <p:cNvPr id="136" name="TextBox 135">
+            <a:extLst>
+              <a:ext uri="{FF2B5EF4-FFF2-40B4-BE49-F238E27FC236}">
+                <a16:creationId xmlns:a16="http://schemas.microsoft.com/office/drawing/2014/main" id="{130A8409-9A83-895D-2294-6A1E6409266A}"/>
+              </a:ext>
+            </a:extLst>
+          </p:cNvPr>
+          <p:cNvSpPr txBox="1"/>
+          <p:nvPr/>
+        </p:nvSpPr>
+        <p:spPr>
+          <a:xfrm>
+            <a:off x="2575833" y="5465359"/>
+            <a:ext cx="384786" cy="276999"/>
+          </a:xfrm>
+          <a:prstGeom prst="rect">
+            <a:avLst/>
+          </a:prstGeom>
+          <a:noFill/>
+        </p:spPr>
+        <p:txBody>
+          <a:bodyPr wrap="square" rtlCol="0">
+            <a:spAutoFit/>
+          </a:bodyPr>
+          <a:lstStyle/>
+          <a:p>
+            <a:r>
+              <a:rPr lang="en-US" sz="1200" dirty="0"/>
+              <a:t>E3</a:t>
+            </a:r>
+          </a:p>
+        </p:txBody>
+      </p:sp>
+    </p:spTree>
+    <p:extLst>
+      <p:ext uri="{BB962C8B-B14F-4D97-AF65-F5344CB8AC3E}">
+        <p14:creationId xmlns:p14="http://schemas.microsoft.com/office/powerpoint/2010/main" val="1766756369"/>
+      </p:ext>
+    </p:extLst>
+  </p:cSld>
+  <p:clrMapOvr>
+    <a:masterClrMapping/>
+  </p:clrMapOvr>
+</p:sld>
+</file>
+
+<file path=ppt/slides/slide7.xml><?xml version="1.0" encoding="utf-8"?>
+<p:sld xmlns:a="http://schemas.openxmlformats.org/drawingml/2006/main" xmlns:r="http://schemas.openxmlformats.org/officeDocument/2006/relationships" xmlns:p="http://schemas.openxmlformats.org/presentationml/2006/main">
+  <p:cSld>
+    <p:spTree>
+      <p:nvGrpSpPr>
+        <p:cNvPr id="1" name=""/>
+        <p:cNvGrpSpPr/>
+        <p:nvPr/>
+      </p:nvGrpSpPr>
+      <p:grpSpPr>
+        <a:xfrm>
+          <a:off x="0" y="0"/>
+          <a:ext cx="0" cy="0"/>
+          <a:chOff x="0" y="0"/>
+          <a:chExt cx="0" cy="0"/>
+        </a:xfrm>
+      </p:grpSpPr>
+      <p:sp>
+        <p:nvSpPr>
+          <p:cNvPr id="5" name="TextBox 4">
+            <a:extLst>
+              <a:ext uri="{FF2B5EF4-FFF2-40B4-BE49-F238E27FC236}">
+                <a16:creationId xmlns:a16="http://schemas.microsoft.com/office/drawing/2014/main" id="{62F564DF-194E-BB29-BBFC-92DFAF3A97B3}"/>
+              </a:ext>
+            </a:extLst>
+          </p:cNvPr>
+          <p:cNvSpPr txBox="1"/>
+          <p:nvPr/>
+        </p:nvSpPr>
+        <p:spPr>
+          <a:xfrm>
+            <a:off x="8472039" y="4219596"/>
+            <a:ext cx="2134646" cy="246221"/>
+          </a:xfrm>
+          <a:prstGeom prst="rect">
+            <a:avLst/>
+          </a:prstGeom>
+          <a:noFill/>
+        </p:spPr>
+        <p:txBody>
+          <a:bodyPr wrap="square">
+            <a:spAutoFit/>
+          </a:bodyPr>
+          <a:lstStyle/>
+          <a:p>
+            <a:pPr>
+              <a:spcBef>
+                <a:spcPts val="1200"/>
+              </a:spcBef>
+              <a:spcAft>
+                <a:spcPts val="1200"/>
+              </a:spcAft>
+            </a:pPr>
+            <a:r>
+              <a:rPr lang="en-US" sz="1000" dirty="0">
+                <a:solidFill>
+                  <a:schemeClr val="bg1">
+                    <a:lumMod val="50000"/>
+                  </a:schemeClr>
+                </a:solidFill>
+              </a:rPr>
+              <a:t>VEA</a:t>
+            </a:r>
+            <a:r>
+              <a:rPr lang="zh-CN" altLang="en-US" sz="1000" dirty="0">
+                <a:solidFill>
+                  <a:schemeClr val="bg1">
+                    <a:lumMod val="50000"/>
+                  </a:schemeClr>
+                </a:solidFill>
+              </a:rPr>
+              <a:t>    </a:t>
+            </a:r>
+            <a:r>
+              <a:rPr lang="en-US" sz="1000" dirty="0"/>
+              <a:t>- DIA – </a:t>
+            </a:r>
+            <a:r>
+              <a:rPr lang="zh-CN" altLang="en-US" sz="1000" dirty="0"/>
+              <a:t>   </a:t>
+            </a:r>
+            <a:r>
+              <a:rPr lang="en-US" sz="1000" dirty="0">
+                <a:solidFill>
+                  <a:schemeClr val="bg1">
+                    <a:lumMod val="50000"/>
+                  </a:schemeClr>
+                </a:solidFill>
+              </a:rPr>
+              <a:t>GH</a:t>
+            </a:r>
+            <a:r>
+              <a:rPr lang="en-US" sz="1000" dirty="0"/>
+              <a:t> -</a:t>
+            </a:r>
+            <a:r>
+              <a:rPr lang="zh-CN" altLang="en-US" sz="1000" dirty="0"/>
+              <a:t>     </a:t>
+            </a:r>
+            <a:r>
+              <a:rPr lang="en-US" sz="1000" dirty="0"/>
+              <a:t>GQEV </a:t>
+            </a:r>
+            <a:r>
+              <a:rPr lang="zh-CN" altLang="en-US" sz="1000" dirty="0"/>
+              <a:t>  </a:t>
+            </a:r>
+            <a:r>
+              <a:rPr lang="en-US" sz="1000" dirty="0"/>
+              <a:t>-</a:t>
+            </a:r>
+            <a:r>
+              <a:rPr lang="zh-CN" altLang="en-US" sz="1000" dirty="0"/>
+              <a:t>  </a:t>
+            </a:r>
+            <a:r>
+              <a:rPr lang="en-US" sz="1000" dirty="0">
+                <a:solidFill>
+                  <a:schemeClr val="bg1">
+                    <a:lumMod val="50000"/>
+                  </a:schemeClr>
+                </a:solidFill>
+              </a:rPr>
+              <a:t>LIR</a:t>
+            </a:r>
+            <a:endParaRPr lang="en-US" sz="1000" dirty="0"/>
+          </a:p>
+        </p:txBody>
+      </p:sp>
+      <p:grpSp>
+        <p:nvGrpSpPr>
+          <p:cNvPr id="20" name="Group 19">
+            <a:extLst>
+              <a:ext uri="{FF2B5EF4-FFF2-40B4-BE49-F238E27FC236}">
+                <a16:creationId xmlns:a16="http://schemas.microsoft.com/office/drawing/2014/main" id="{E6E0240C-1F45-314D-FB07-BE1B15091B77}"/>
+              </a:ext>
+            </a:extLst>
+          </p:cNvPr>
+          <p:cNvGrpSpPr/>
+          <p:nvPr/>
+        </p:nvGrpSpPr>
+        <p:grpSpPr>
+          <a:xfrm>
+            <a:off x="3572005" y="6410125"/>
+            <a:ext cx="2362893" cy="523220"/>
+            <a:chOff x="3783328" y="6095490"/>
+            <a:chExt cx="2362893" cy="523220"/>
+          </a:xfrm>
+        </p:grpSpPr>
+        <p:sp>
+          <p:nvSpPr>
+            <p:cNvPr id="4" name="TextBox 3">
+              <a:extLst>
+                <a:ext uri="{FF2B5EF4-FFF2-40B4-BE49-F238E27FC236}">
+                  <a16:creationId xmlns:a16="http://schemas.microsoft.com/office/drawing/2014/main" id="{55293601-B221-0282-F9E2-C3AA9E4FBB54}"/>
+                </a:ext>
+              </a:extLst>
+            </p:cNvPr>
+            <p:cNvSpPr txBox="1"/>
+            <p:nvPr/>
+          </p:nvSpPr>
+          <p:spPr>
+            <a:xfrm>
+              <a:off x="3783328" y="6095490"/>
+              <a:ext cx="2362893" cy="523220"/>
+            </a:xfrm>
+            <a:prstGeom prst="rect">
+              <a:avLst/>
+            </a:prstGeom>
+            <a:noFill/>
+          </p:spPr>
+          <p:txBody>
+            <a:bodyPr wrap="square">
+              <a:spAutoFit/>
+            </a:bodyPr>
+            <a:lstStyle/>
+            <a:p>
+              <a:pPr algn="l" rtl="0">
+                <a:spcBef>
+                  <a:spcPts val="1200"/>
+                </a:spcBef>
+                <a:spcAft>
+                  <a:spcPts val="1200"/>
+                </a:spcAft>
+                <a:buNone/>
+              </a:pPr>
+              <a:r>
+                <a:rPr lang="en-US" sz="1000" b="0" i="0" u="none" strike="noStrike" dirty="0">
+                  <a:solidFill>
+                    <a:srgbClr val="FF0000"/>
+                  </a:solidFill>
+                  <a:effectLst/>
+                </a:rPr>
+                <a:t>299.15 </a:t>
+              </a:r>
+              <a:r>
+                <a:rPr lang="en-US" sz="1000" b="0" i="0" u="none" strike="noStrike" dirty="0">
+                  <a:solidFill>
+                    <a:srgbClr val="000000"/>
+                  </a:solidFill>
+                  <a:effectLst/>
+                </a:rPr>
+                <a:t>-</a:t>
+              </a:r>
+              <a:r>
+                <a:rPr lang="en-US" sz="1000" b="0" i="0" u="none" strike="noStrike" dirty="0">
+                  <a:solidFill>
+                    <a:srgbClr val="FF0000"/>
+                  </a:solidFill>
+                  <a:effectLst/>
+                </a:rPr>
+                <a:t> DJA </a:t>
+              </a:r>
+              <a:r>
+                <a:rPr lang="en-US" sz="1000" b="0" i="0" u="none" strike="noStrike" dirty="0">
+                  <a:solidFill>
+                    <a:srgbClr val="000000"/>
+                  </a:solidFill>
+                  <a:effectLst/>
+                </a:rPr>
+                <a:t>- </a:t>
+              </a:r>
+              <a:r>
+                <a:rPr lang="en-US" sz="1000" b="0" i="0" u="none" strike="noStrike" dirty="0">
+                  <a:solidFill>
+                    <a:srgbClr val="FF0000"/>
+                  </a:solidFill>
+                  <a:effectLst/>
+                </a:rPr>
+                <a:t>194.08 </a:t>
+              </a:r>
+              <a:r>
+                <a:rPr lang="en-US" sz="1000" b="0" i="0" u="none" strike="noStrike" dirty="0">
+                  <a:solidFill>
+                    <a:srgbClr val="000000"/>
+                  </a:solidFill>
+                  <a:effectLst/>
+                </a:rPr>
+                <a:t>- </a:t>
+              </a:r>
+              <a:r>
+                <a:rPr lang="en-US" sz="1000" b="0" i="0" u="none" strike="noStrike" dirty="0">
+                  <a:solidFill>
+                    <a:srgbClr val="FF9900"/>
+                  </a:solidFill>
+                  <a:effectLst/>
+                </a:rPr>
+                <a:t>G</a:t>
+              </a:r>
+              <a:r>
+                <a:rPr lang="en-US" sz="1000" b="0" i="0" u="none" strike="noStrike" dirty="0">
+                  <a:solidFill>
+                    <a:srgbClr val="0000FF"/>
+                  </a:solidFill>
+                  <a:effectLst/>
+                </a:rPr>
+                <a:t>QEV -</a:t>
+              </a:r>
+              <a:r>
+                <a:rPr lang="en-US" sz="1000" b="0" i="0" u="none" strike="noStrike" dirty="0">
+                  <a:solidFill>
+                    <a:srgbClr val="CCCCCC"/>
+                  </a:solidFill>
+                  <a:effectLst/>
+                </a:rPr>
+                <a:t> </a:t>
+              </a:r>
+              <a:r>
+                <a:rPr lang="en-US" sz="1000" b="0" i="0" u="none" strike="noStrike" dirty="0">
+                  <a:solidFill>
+                    <a:srgbClr val="0000FF"/>
+                  </a:solidFill>
+                  <a:effectLst/>
+                </a:rPr>
+                <a:t>382.27</a:t>
+              </a:r>
+              <a:br>
+                <a:rPr lang="en-US" dirty="0"/>
+              </a:br>
+              <a:endParaRPr lang="en-US" dirty="0"/>
+            </a:p>
+          </p:txBody>
+        </p:sp>
+        <p:sp>
+          <p:nvSpPr>
+            <p:cNvPr id="7" name="TextBox 6">
+              <a:extLst>
+                <a:ext uri="{FF2B5EF4-FFF2-40B4-BE49-F238E27FC236}">
+                  <a16:creationId xmlns:a16="http://schemas.microsoft.com/office/drawing/2014/main" id="{E6ED8CF4-9F06-3D40-BCEB-054F3ECF218C}"/>
+                </a:ext>
+              </a:extLst>
+            </p:cNvPr>
+            <p:cNvSpPr txBox="1"/>
+            <p:nvPr/>
+          </p:nvSpPr>
+          <p:spPr>
+            <a:xfrm>
+              <a:off x="3905301" y="6264606"/>
+              <a:ext cx="405727" cy="246221"/>
+            </a:xfrm>
+            <a:prstGeom prst="rect">
+              <a:avLst/>
+            </a:prstGeom>
+            <a:noFill/>
+          </p:spPr>
+          <p:txBody>
+            <a:bodyPr wrap="square" rtlCol="0">
+              <a:spAutoFit/>
+            </a:bodyPr>
+            <a:lstStyle/>
+            <a:p>
+              <a:r>
+                <a:rPr lang="en-US" sz="1000" dirty="0">
+                  <a:solidFill>
+                    <a:schemeClr val="bg1">
+                      <a:lumMod val="50000"/>
+                    </a:schemeClr>
+                  </a:solidFill>
+                </a:rPr>
+                <a:t>VEA</a:t>
+              </a:r>
+              <a:endParaRPr lang="en-US" sz="1000" dirty="0"/>
+            </a:p>
+          </p:txBody>
+        </p:sp>
+        <p:sp>
+          <p:nvSpPr>
+            <p:cNvPr id="8" name="TextBox 7">
+              <a:extLst>
+                <a:ext uri="{FF2B5EF4-FFF2-40B4-BE49-F238E27FC236}">
+                  <a16:creationId xmlns:a16="http://schemas.microsoft.com/office/drawing/2014/main" id="{1FD4FCDD-9163-29BD-8742-224A631759F8}"/>
+                </a:ext>
+              </a:extLst>
+            </p:cNvPr>
+            <p:cNvSpPr txBox="1"/>
+            <p:nvPr/>
+          </p:nvSpPr>
+          <p:spPr>
+            <a:xfrm>
+              <a:off x="4205784" y="6264606"/>
+              <a:ext cx="327003" cy="246221"/>
+            </a:xfrm>
+            <a:prstGeom prst="rect">
+              <a:avLst/>
+            </a:prstGeom>
+            <a:noFill/>
+          </p:spPr>
+          <p:txBody>
+            <a:bodyPr wrap="square" rtlCol="0">
+              <a:spAutoFit/>
+            </a:bodyPr>
+            <a:lstStyle/>
+            <a:p>
+              <a:r>
+                <a:rPr lang="en-US" altLang="zh-CN" sz="1000" dirty="0"/>
+                <a:t>-</a:t>
+              </a:r>
+              <a:endParaRPr lang="en-US" sz="1000" dirty="0"/>
+            </a:p>
+          </p:txBody>
+        </p:sp>
+        <p:sp>
+          <p:nvSpPr>
+            <p:cNvPr id="9" name="TextBox 8">
+              <a:extLst>
+                <a:ext uri="{FF2B5EF4-FFF2-40B4-BE49-F238E27FC236}">
+                  <a16:creationId xmlns:a16="http://schemas.microsoft.com/office/drawing/2014/main" id="{8988426E-8746-B1E6-3F9C-776C39827321}"/>
+                </a:ext>
+              </a:extLst>
+            </p:cNvPr>
+            <p:cNvSpPr txBox="1"/>
+            <p:nvPr/>
+          </p:nvSpPr>
+          <p:spPr>
+            <a:xfrm>
+              <a:off x="4279909" y="6264606"/>
+              <a:ext cx="405727" cy="246221"/>
+            </a:xfrm>
+            <a:prstGeom prst="rect">
+              <a:avLst/>
+            </a:prstGeom>
+            <a:noFill/>
+          </p:spPr>
+          <p:txBody>
+            <a:bodyPr wrap="square" rtlCol="0">
+              <a:spAutoFit/>
+            </a:bodyPr>
+            <a:lstStyle/>
+            <a:p>
+              <a:r>
+                <a:rPr lang="en-US" sz="1000" dirty="0"/>
+                <a:t>DJA</a:t>
+              </a:r>
+            </a:p>
+          </p:txBody>
+        </p:sp>
+        <p:sp>
+          <p:nvSpPr>
+            <p:cNvPr id="10" name="TextBox 9">
+              <a:extLst>
+                <a:ext uri="{FF2B5EF4-FFF2-40B4-BE49-F238E27FC236}">
+                  <a16:creationId xmlns:a16="http://schemas.microsoft.com/office/drawing/2014/main" id="{1E97019A-A01C-0CCC-5B50-2AFA1A3A13D4}"/>
+                </a:ext>
+              </a:extLst>
+            </p:cNvPr>
+            <p:cNvSpPr txBox="1"/>
+            <p:nvPr/>
+          </p:nvSpPr>
+          <p:spPr>
+            <a:xfrm>
+              <a:off x="4506267" y="6264606"/>
+              <a:ext cx="327003" cy="246221"/>
+            </a:xfrm>
+            <a:prstGeom prst="rect">
+              <a:avLst/>
+            </a:prstGeom>
+            <a:noFill/>
+          </p:spPr>
+          <p:txBody>
+            <a:bodyPr wrap="square" rtlCol="0">
+              <a:spAutoFit/>
+            </a:bodyPr>
+            <a:lstStyle/>
+            <a:p>
+              <a:r>
+                <a:rPr lang="en-US" altLang="zh-CN" sz="1000" dirty="0"/>
+                <a:t>-</a:t>
+              </a:r>
+              <a:endParaRPr lang="en-US" sz="1000" dirty="0"/>
+            </a:p>
+          </p:txBody>
+        </p:sp>
+        <p:sp>
+          <p:nvSpPr>
+            <p:cNvPr id="11" name="TextBox 10">
+              <a:extLst>
+                <a:ext uri="{FF2B5EF4-FFF2-40B4-BE49-F238E27FC236}">
+                  <a16:creationId xmlns:a16="http://schemas.microsoft.com/office/drawing/2014/main" id="{D5C579BF-CB90-F40D-4418-18F39AA75941}"/>
+                </a:ext>
+              </a:extLst>
+            </p:cNvPr>
+            <p:cNvSpPr txBox="1"/>
+            <p:nvPr/>
+          </p:nvSpPr>
+          <p:spPr>
+            <a:xfrm>
+              <a:off x="4660555" y="6264605"/>
+              <a:ext cx="405727" cy="246221"/>
+            </a:xfrm>
+            <a:prstGeom prst="rect">
+              <a:avLst/>
+            </a:prstGeom>
+            <a:noFill/>
+          </p:spPr>
+          <p:txBody>
+            <a:bodyPr wrap="square" rtlCol="0">
+              <a:spAutoFit/>
+            </a:bodyPr>
+            <a:lstStyle/>
+            <a:p>
+              <a:r>
+                <a:rPr lang="en-US" sz="1000" dirty="0">
+                  <a:solidFill>
+                    <a:schemeClr val="bg1">
+                      <a:lumMod val="50000"/>
+                    </a:schemeClr>
+                  </a:solidFill>
+                </a:rPr>
+                <a:t>GH</a:t>
+              </a:r>
+              <a:endParaRPr lang="en-US" sz="1000" dirty="0"/>
+            </a:p>
+          </p:txBody>
+        </p:sp>
+        <p:sp>
+          <p:nvSpPr>
+            <p:cNvPr id="12" name="TextBox 11">
+              <a:extLst>
+                <a:ext uri="{FF2B5EF4-FFF2-40B4-BE49-F238E27FC236}">
+                  <a16:creationId xmlns:a16="http://schemas.microsoft.com/office/drawing/2014/main" id="{8894A89E-6A28-04C2-777B-2567FDED5421}"/>
+                </a:ext>
+              </a:extLst>
+            </p:cNvPr>
+            <p:cNvSpPr txBox="1"/>
+            <p:nvPr/>
+          </p:nvSpPr>
+          <p:spPr>
+            <a:xfrm>
+              <a:off x="4964196" y="6264605"/>
+              <a:ext cx="327003" cy="246221"/>
+            </a:xfrm>
+            <a:prstGeom prst="rect">
+              <a:avLst/>
+            </a:prstGeom>
+            <a:noFill/>
+          </p:spPr>
+          <p:txBody>
+            <a:bodyPr wrap="square" rtlCol="0">
+              <a:spAutoFit/>
+            </a:bodyPr>
+            <a:lstStyle/>
+            <a:p>
+              <a:r>
+                <a:rPr lang="en-US" altLang="zh-CN" sz="1000" dirty="0"/>
+                <a:t>-</a:t>
+              </a:r>
+              <a:endParaRPr lang="en-US" sz="1000" dirty="0"/>
+            </a:p>
+          </p:txBody>
+        </p:sp>
+        <p:sp>
+          <p:nvSpPr>
+            <p:cNvPr id="13" name="TextBox 12">
+              <a:extLst>
+                <a:ext uri="{FF2B5EF4-FFF2-40B4-BE49-F238E27FC236}">
+                  <a16:creationId xmlns:a16="http://schemas.microsoft.com/office/drawing/2014/main" id="{48753B61-3B54-611D-BD9C-88B4BF508B9D}"/>
+                </a:ext>
+              </a:extLst>
+            </p:cNvPr>
+            <p:cNvSpPr txBox="1"/>
+            <p:nvPr/>
+          </p:nvSpPr>
+          <p:spPr>
+            <a:xfrm>
+              <a:off x="5035182" y="6264605"/>
+              <a:ext cx="559658" cy="246221"/>
+            </a:xfrm>
+            <a:prstGeom prst="rect">
+              <a:avLst/>
+            </a:prstGeom>
+            <a:noFill/>
+          </p:spPr>
+          <p:txBody>
+            <a:bodyPr wrap="square" rtlCol="0">
+              <a:spAutoFit/>
+            </a:bodyPr>
+            <a:lstStyle/>
+            <a:p>
+              <a:r>
+                <a:rPr lang="en-US" sz="1000" dirty="0"/>
+                <a:t>GQEV</a:t>
+              </a:r>
+            </a:p>
+          </p:txBody>
+        </p:sp>
+        <p:sp>
+          <p:nvSpPr>
+            <p:cNvPr id="14" name="TextBox 13">
+              <a:extLst>
+                <a:ext uri="{FF2B5EF4-FFF2-40B4-BE49-F238E27FC236}">
+                  <a16:creationId xmlns:a16="http://schemas.microsoft.com/office/drawing/2014/main" id="{35FFEAD0-C243-DEDC-2790-C77530AF7448}"/>
+                </a:ext>
+              </a:extLst>
+            </p:cNvPr>
+            <p:cNvSpPr txBox="1"/>
+            <p:nvPr/>
+          </p:nvSpPr>
+          <p:spPr>
+            <a:xfrm>
+              <a:off x="5393285" y="6264605"/>
+              <a:ext cx="327003" cy="246221"/>
+            </a:xfrm>
+            <a:prstGeom prst="rect">
+              <a:avLst/>
+            </a:prstGeom>
+            <a:noFill/>
+          </p:spPr>
+          <p:txBody>
+            <a:bodyPr wrap="square" rtlCol="0">
+              <a:spAutoFit/>
+            </a:bodyPr>
+            <a:lstStyle/>
+            <a:p>
+              <a:r>
+                <a:rPr lang="en-US" altLang="zh-CN" sz="1000" dirty="0"/>
+                <a:t>-</a:t>
+              </a:r>
+              <a:endParaRPr lang="en-US" sz="1000" dirty="0"/>
+            </a:p>
+          </p:txBody>
+        </p:sp>
+        <p:sp>
+          <p:nvSpPr>
+            <p:cNvPr id="17" name="TextBox 16">
+              <a:extLst>
+                <a:ext uri="{FF2B5EF4-FFF2-40B4-BE49-F238E27FC236}">
+                  <a16:creationId xmlns:a16="http://schemas.microsoft.com/office/drawing/2014/main" id="{D577DD48-1B8E-E47C-972D-4F80F4EE14D4}"/>
+                </a:ext>
+              </a:extLst>
+            </p:cNvPr>
+            <p:cNvSpPr txBox="1"/>
+            <p:nvPr/>
+          </p:nvSpPr>
+          <p:spPr>
+            <a:xfrm>
+              <a:off x="5536342" y="6264605"/>
+              <a:ext cx="559658" cy="246221"/>
+            </a:xfrm>
+            <a:prstGeom prst="rect">
+              <a:avLst/>
+            </a:prstGeom>
+            <a:noFill/>
+          </p:spPr>
+          <p:txBody>
+            <a:bodyPr wrap="square" rtlCol="0">
+              <a:spAutoFit/>
+            </a:bodyPr>
+            <a:lstStyle/>
+            <a:p>
+              <a:r>
+                <a:rPr lang="en-US" sz="1000" dirty="0">
+                  <a:solidFill>
+                    <a:schemeClr val="bg1">
+                      <a:lumMod val="50000"/>
+                    </a:schemeClr>
+                  </a:solidFill>
+                </a:rPr>
+                <a:t>JJR</a:t>
+              </a:r>
+              <a:endParaRPr lang="en-US" sz="1000" dirty="0"/>
+            </a:p>
+          </p:txBody>
+        </p:sp>
+      </p:grpSp>
+      <p:pic>
+        <p:nvPicPr>
+          <p:cNvPr id="21" name="Picture 20">
+            <a:extLst>
+              <a:ext uri="{FF2B5EF4-FFF2-40B4-BE49-F238E27FC236}">
+                <a16:creationId xmlns:a16="http://schemas.microsoft.com/office/drawing/2014/main" id="{645769F1-B13A-1C58-D46E-1F76EFE360D4}"/>
+              </a:ext>
+            </a:extLst>
+          </p:cNvPr>
+          <p:cNvPicPr>
+            <a:picLocks noChangeAspect="1"/>
+          </p:cNvPicPr>
+          <p:nvPr/>
+        </p:nvPicPr>
+        <p:blipFill>
+          <a:blip r:embed="rId3"/>
+          <a:stretch>
+            <a:fillRect/>
+          </a:stretch>
+        </p:blipFill>
+        <p:spPr>
+          <a:xfrm>
+            <a:off x="1585314" y="66760"/>
+            <a:ext cx="6336277" cy="6343365"/>
+          </a:xfrm>
+          <a:prstGeom prst="rect">
+            <a:avLst/>
+          </a:prstGeom>
+        </p:spPr>
+      </p:pic>
+    </p:spTree>
+    <p:extLst>
+      <p:ext uri="{BB962C8B-B14F-4D97-AF65-F5344CB8AC3E}">
+        <p14:creationId xmlns:p14="http://schemas.microsoft.com/office/powerpoint/2010/main" val="1173448318"/>
+      </p:ext>
+    </p:extLst>
+  </p:cSld>
+  <p:clrMapOvr>
+    <a:masterClrMapping/>
+  </p:clrMapOvr>
+</p:sld>
+</file>
+
+<file path=ppt/slides/slide8.xml><?xml version="1.0" encoding="utf-8"?>
+<p:sld xmlns:a="http://schemas.openxmlformats.org/drawingml/2006/main" xmlns:r="http://schemas.openxmlformats.org/officeDocument/2006/relationships" xmlns:p="http://schemas.openxmlformats.org/presentationml/2006/main">
+  <p:cSld>
+    <p:spTree>
+      <p:nvGrpSpPr>
+        <p:cNvPr id="1" name=""/>
+        <p:cNvGrpSpPr/>
+        <p:nvPr/>
+      </p:nvGrpSpPr>
+      <p:grpSpPr>
+        <a:xfrm>
+          <a:off x="0" y="0"/>
+          <a:ext cx="0" cy="0"/>
+          <a:chOff x="0" y="0"/>
+          <a:chExt cx="0" cy="0"/>
+        </a:xfrm>
+      </p:grpSpPr>
+      <p:grpSp>
+        <p:nvGrpSpPr>
+          <p:cNvPr id="7" name="Group 6">
+            <a:extLst>
+              <a:ext uri="{FF2B5EF4-FFF2-40B4-BE49-F238E27FC236}">
+                <a16:creationId xmlns:a16="http://schemas.microsoft.com/office/drawing/2014/main" id="{D40E03DC-64EC-A60B-A24C-A6D89749039A}"/>
+              </a:ext>
+            </a:extLst>
+          </p:cNvPr>
+          <p:cNvGrpSpPr/>
+          <p:nvPr/>
+        </p:nvGrpSpPr>
+        <p:grpSpPr>
+          <a:xfrm>
+            <a:off x="4207330" y="6167069"/>
+            <a:ext cx="1506680" cy="1231106"/>
+            <a:chOff x="3983212" y="5664873"/>
+            <a:chExt cx="1506680" cy="1231106"/>
+          </a:xfrm>
+        </p:grpSpPr>
+        <p:sp>
+          <p:nvSpPr>
+            <p:cNvPr id="3" name="TextBox 2">
+              <a:extLst>
+                <a:ext uri="{FF2B5EF4-FFF2-40B4-BE49-F238E27FC236}">
+                  <a16:creationId xmlns:a16="http://schemas.microsoft.com/office/drawing/2014/main" id="{6D48143A-7447-E73D-0ACF-59D4205A0A9D}"/>
+                </a:ext>
+              </a:extLst>
+            </p:cNvPr>
+            <p:cNvSpPr txBox="1"/>
+            <p:nvPr/>
+          </p:nvSpPr>
+          <p:spPr>
+            <a:xfrm>
+              <a:off x="3983212" y="5664873"/>
+              <a:ext cx="1506680" cy="1231106"/>
+            </a:xfrm>
+            <a:prstGeom prst="rect">
+              <a:avLst/>
+            </a:prstGeom>
+            <a:noFill/>
+          </p:spPr>
+          <p:txBody>
+            <a:bodyPr wrap="square">
+              <a:spAutoFit/>
+            </a:bodyPr>
+            <a:lstStyle/>
+            <a:p>
+              <a:pPr algn="l" rtl="0">
+                <a:spcBef>
+                  <a:spcPts val="1200"/>
+                </a:spcBef>
+                <a:spcAft>
+                  <a:spcPts val="1200"/>
+                </a:spcAft>
+                <a:buNone/>
+              </a:pPr>
+              <a:r>
+                <a:rPr lang="en-US" sz="1000" dirty="0">
+                  <a:solidFill>
+                    <a:srgbClr val="FF0000"/>
+                  </a:solidFill>
+                </a:rPr>
+                <a:t>VEA</a:t>
+              </a:r>
+              <a:r>
+                <a:rPr lang="en-US" sz="1000" b="0" i="0" u="none" strike="noStrike" dirty="0">
+                  <a:solidFill>
+                    <a:srgbClr val="FF0000"/>
+                  </a:solidFill>
+                  <a:effectLst/>
+                </a:rPr>
+                <a:t>DJA</a:t>
+              </a:r>
+              <a:r>
+                <a:rPr lang="en-US" sz="1000" dirty="0">
+                  <a:solidFill>
+                    <a:srgbClr val="FF0000"/>
+                  </a:solidFill>
+                </a:rPr>
+                <a:t>GH</a:t>
+              </a:r>
+              <a:r>
+                <a:rPr lang="en-US" sz="1000" b="0" i="0" u="none" strike="noStrike" dirty="0">
+                  <a:solidFill>
+                    <a:srgbClr val="FF9900"/>
+                  </a:solidFill>
+                  <a:effectLst/>
+                </a:rPr>
+                <a:t>G</a:t>
+              </a:r>
+              <a:r>
+                <a:rPr lang="en-US" sz="1000" b="0" i="0" u="none" strike="noStrike" dirty="0">
+                  <a:solidFill>
+                    <a:srgbClr val="0000FF"/>
+                  </a:solidFill>
+                  <a:effectLst/>
+                </a:rPr>
+                <a:t>QEVJJR</a:t>
+              </a:r>
+              <a:endParaRPr lang="en-US" sz="1000" b="0" i="0" u="none" strike="noStrike" dirty="0">
+                <a:solidFill>
+                  <a:srgbClr val="000000"/>
+                </a:solidFill>
+                <a:effectLst/>
+              </a:endParaRPr>
+            </a:p>
+            <a:p>
+              <a:pPr>
+                <a:buNone/>
+              </a:pPr>
+              <a:br>
+                <a:rPr lang="en-US" dirty="0"/>
+              </a:br>
+              <a:br>
+                <a:rPr lang="en-US" dirty="0"/>
+              </a:br>
+              <a:endParaRPr lang="en-US" dirty="0"/>
+            </a:p>
+          </p:txBody>
+        </p:sp>
+        <p:sp>
+          <p:nvSpPr>
+            <p:cNvPr id="4" name="TextBox 3">
+              <a:extLst>
+                <a:ext uri="{FF2B5EF4-FFF2-40B4-BE49-F238E27FC236}">
+                  <a16:creationId xmlns:a16="http://schemas.microsoft.com/office/drawing/2014/main" id="{81E816B4-9A8D-41D8-B76C-4BD4AA1137EC}"/>
+                </a:ext>
+              </a:extLst>
+            </p:cNvPr>
+            <p:cNvSpPr txBox="1"/>
+            <p:nvPr/>
+          </p:nvSpPr>
+          <p:spPr>
+            <a:xfrm>
+              <a:off x="3983212" y="5887049"/>
+              <a:ext cx="1314929" cy="553998"/>
+            </a:xfrm>
+            <a:prstGeom prst="rect">
+              <a:avLst/>
+            </a:prstGeom>
+            <a:noFill/>
+          </p:spPr>
+          <p:txBody>
+            <a:bodyPr wrap="square">
+              <a:spAutoFit/>
+            </a:bodyPr>
+            <a:lstStyle/>
+            <a:p>
+              <a:pPr>
+                <a:spcBef>
+                  <a:spcPts val="1200"/>
+                </a:spcBef>
+                <a:spcAft>
+                  <a:spcPts val="1200"/>
+                </a:spcAft>
+              </a:pPr>
+              <a:r>
+                <a:rPr lang="en-US" sz="1000" dirty="0"/>
+                <a:t>VEADJAGHGQEVJJR</a:t>
+              </a:r>
+              <a:br>
+                <a:rPr lang="en-US" sz="1000" dirty="0"/>
+              </a:br>
+              <a:br>
+                <a:rPr lang="en-US" sz="1000" dirty="0"/>
+              </a:br>
+              <a:endParaRPr lang="en-US" sz="1000" dirty="0"/>
+            </a:p>
+          </p:txBody>
+        </p:sp>
+      </p:grpSp>
+      <p:pic>
+        <p:nvPicPr>
+          <p:cNvPr id="6" name="Picture 5">
+            <a:extLst>
+              <a:ext uri="{FF2B5EF4-FFF2-40B4-BE49-F238E27FC236}">
+                <a16:creationId xmlns:a16="http://schemas.microsoft.com/office/drawing/2014/main" id="{E4B3F39E-E1BA-979D-FAE9-6BFA693C2BF0}"/>
+              </a:ext>
+            </a:extLst>
+          </p:cNvPr>
+          <p:cNvPicPr>
+            <a:picLocks noChangeAspect="1"/>
+          </p:cNvPicPr>
+          <p:nvPr/>
+        </p:nvPicPr>
+        <p:blipFill>
+          <a:blip r:embed="rId2"/>
+          <a:stretch>
+            <a:fillRect/>
+          </a:stretch>
+        </p:blipFill>
+        <p:spPr>
+          <a:xfrm>
+            <a:off x="1941804" y="75378"/>
+            <a:ext cx="6036783" cy="6036783"/>
+          </a:xfrm>
+          <a:prstGeom prst="rect">
+            <a:avLst/>
+          </a:prstGeom>
+        </p:spPr>
+      </p:pic>
+    </p:spTree>
+    <p:extLst>
+      <p:ext uri="{BB962C8B-B14F-4D97-AF65-F5344CB8AC3E}">
+        <p14:creationId xmlns:p14="http://schemas.microsoft.com/office/powerpoint/2010/main" val="53105632"/>
+      </p:ext>
+    </p:extLst>
+  </p:cSld>
+  <p:clrMapOvr>
+    <a:masterClrMapping/>
+  </p:clrMapOvr>
+</p:sld>
+</file>
+
+<file path=ppt/slides/slide9.xml><?xml version="1.0" encoding="utf-8"?>
+<p:sld xmlns:a="http://schemas.openxmlformats.org/drawingml/2006/main" xmlns:r="http://schemas.openxmlformats.org/officeDocument/2006/relationships" xmlns:p="http://schemas.openxmlformats.org/presentationml/2006/main">
+  <p:cSld>
+    <p:spTree>
+      <p:nvGrpSpPr>
+        <p:cNvPr id="1" name=""/>
+        <p:cNvGrpSpPr/>
+        <p:nvPr/>
+      </p:nvGrpSpPr>
+      <p:grpSpPr>
+        <a:xfrm>
+          <a:off x="0" y="0"/>
+          <a:ext cx="0" cy="0"/>
+          <a:chOff x="0" y="0"/>
+          <a:chExt cx="0" cy="0"/>
+        </a:xfrm>
+      </p:grpSpPr>
+      <p:sp>
+        <p:nvSpPr>
+          <p:cNvPr id="10" name="TextBox 9">
+            <a:extLst>
+              <a:ext uri="{FF2B5EF4-FFF2-40B4-BE49-F238E27FC236}">
+                <a16:creationId xmlns:a16="http://schemas.microsoft.com/office/drawing/2014/main" id="{584C3805-CBC5-B8C1-8D7E-83FA36D8C6BA}"/>
+              </a:ext>
+            </a:extLst>
+          </p:cNvPr>
+          <p:cNvSpPr txBox="1"/>
+          <p:nvPr/>
+        </p:nvSpPr>
+        <p:spPr>
+          <a:xfrm>
+            <a:off x="9298344" y="6117276"/>
+            <a:ext cx="3489961" cy="246221"/>
+          </a:xfrm>
+          <a:prstGeom prst="rect">
+            <a:avLst/>
+          </a:prstGeom>
+          <a:noFill/>
+        </p:spPr>
+        <p:txBody>
+          <a:bodyPr wrap="square">
+            <a:spAutoFit/>
+          </a:bodyPr>
+          <a:lstStyle/>
+          <a:p>
+            <a:pPr algn="l" rtl="0">
+              <a:spcBef>
+                <a:spcPts val="1200"/>
+              </a:spcBef>
+              <a:spcAft>
+                <a:spcPts val="1200"/>
+              </a:spcAft>
+              <a:buNone/>
+            </a:pPr>
+            <a:r>
+              <a:rPr lang="en-US" sz="1000" b="0" i="0" u="none" strike="noStrike" dirty="0">
+                <a:solidFill>
+                  <a:srgbClr val="000000"/>
+                </a:solidFill>
+                <a:effectLst/>
+              </a:rPr>
+              <a:t> </a:t>
+            </a:r>
+            <a:r>
+              <a:rPr lang="en-US" sz="1000" b="0" i="0" u="none" strike="noStrike" dirty="0">
+                <a:solidFill>
+                  <a:srgbClr val="808080"/>
+                </a:solidFill>
+                <a:effectLst/>
+              </a:rPr>
+              <a:t>HA </a:t>
+            </a:r>
+            <a:r>
+              <a:rPr lang="en-US" sz="1000" b="0" i="0" u="none" strike="noStrike" dirty="0">
+                <a:solidFill>
+                  <a:srgbClr val="000000"/>
+                </a:solidFill>
+                <a:effectLst/>
+              </a:rPr>
+              <a:t> – </a:t>
+            </a:r>
+            <a:r>
+              <a:rPr lang="en-US" sz="1000" b="0" i="0" u="none" strike="noStrike" dirty="0">
+                <a:solidFill>
+                  <a:srgbClr val="808080"/>
+                </a:solidFill>
+                <a:effectLst/>
+              </a:rPr>
+              <a:t>DGSFS </a:t>
+            </a:r>
+            <a:r>
+              <a:rPr lang="en-US" sz="1000" b="0" i="0" u="none" strike="noStrike" dirty="0">
+                <a:solidFill>
+                  <a:srgbClr val="000000"/>
+                </a:solidFill>
+                <a:effectLst/>
+              </a:rPr>
+              <a:t> -    </a:t>
+            </a:r>
+            <a:r>
+              <a:rPr lang="en-US" sz="1000" b="0" i="0" u="none" strike="noStrike" dirty="0">
+                <a:solidFill>
+                  <a:srgbClr val="808080"/>
+                </a:solidFill>
+                <a:effectLst/>
+              </a:rPr>
+              <a:t>DE</a:t>
+            </a:r>
+            <a:r>
+              <a:rPr lang="en-US" sz="1000" b="0" i="0" u="none" strike="noStrike" dirty="0">
+                <a:solidFill>
+                  <a:srgbClr val="000000"/>
+                </a:solidFill>
+                <a:effectLst/>
+              </a:rPr>
+              <a:t> -   MNTILDNLAARDFINWLIQTKI - </a:t>
+            </a:r>
+            <a:r>
+              <a:rPr lang="en-US" sz="1000" b="0" i="0" u="none" strike="noStrike" dirty="0">
+                <a:solidFill>
+                  <a:srgbClr val="808080"/>
+                </a:solidFill>
+                <a:effectLst/>
+              </a:rPr>
+              <a:t>TD</a:t>
+            </a:r>
+            <a:endParaRPr lang="en-US" dirty="0"/>
+          </a:p>
+        </p:txBody>
+      </p:sp>
+      <p:pic>
+        <p:nvPicPr>
+          <p:cNvPr id="11" name="Picture 10">
+            <a:extLst>
+              <a:ext uri="{FF2B5EF4-FFF2-40B4-BE49-F238E27FC236}">
+                <a16:creationId xmlns:a16="http://schemas.microsoft.com/office/drawing/2014/main" id="{50266E72-AF56-32EC-531A-38E10263C71E}"/>
+              </a:ext>
+            </a:extLst>
+          </p:cNvPr>
+          <p:cNvPicPr>
+            <a:picLocks noChangeAspect="1"/>
+          </p:cNvPicPr>
+          <p:nvPr/>
+        </p:nvPicPr>
+        <p:blipFill>
+          <a:blip r:embed="rId2"/>
+          <a:stretch>
+            <a:fillRect/>
+          </a:stretch>
+        </p:blipFill>
+        <p:spPr>
+          <a:xfrm>
+            <a:off x="1829007" y="156081"/>
+            <a:ext cx="6206273" cy="6206273"/>
+          </a:xfrm>
+          <a:prstGeom prst="rect">
+            <a:avLst/>
+          </a:prstGeom>
+        </p:spPr>
+      </p:pic>
+      <p:grpSp>
+        <p:nvGrpSpPr>
+          <p:cNvPr id="24" name="Group 23">
+            <a:extLst>
+              <a:ext uri="{FF2B5EF4-FFF2-40B4-BE49-F238E27FC236}">
+                <a16:creationId xmlns:a16="http://schemas.microsoft.com/office/drawing/2014/main" id="{94BE6076-3818-6660-12E8-AD670CB3C364}"/>
+              </a:ext>
+            </a:extLst>
+          </p:cNvPr>
+          <p:cNvGrpSpPr/>
+          <p:nvPr/>
+        </p:nvGrpSpPr>
+        <p:grpSpPr>
+          <a:xfrm>
+            <a:off x="3085925" y="6371702"/>
+            <a:ext cx="3692438" cy="433780"/>
+            <a:chOff x="2649327" y="5947506"/>
+            <a:chExt cx="3692438" cy="433780"/>
+          </a:xfrm>
+        </p:grpSpPr>
+        <p:sp>
+          <p:nvSpPr>
+            <p:cNvPr id="8" name="TextBox 7">
+              <a:extLst>
+                <a:ext uri="{FF2B5EF4-FFF2-40B4-BE49-F238E27FC236}">
+                  <a16:creationId xmlns:a16="http://schemas.microsoft.com/office/drawing/2014/main" id="{E8DBBBD9-2CC9-8AA9-4CBA-CA4FE37F5A68}"/>
+                </a:ext>
+              </a:extLst>
+            </p:cNvPr>
+            <p:cNvSpPr txBox="1"/>
+            <p:nvPr/>
+          </p:nvSpPr>
+          <p:spPr>
+            <a:xfrm>
+              <a:off x="2649327" y="5947506"/>
+              <a:ext cx="3692438" cy="246221"/>
+            </a:xfrm>
+            <a:prstGeom prst="rect">
+              <a:avLst/>
+            </a:prstGeom>
+            <a:noFill/>
+          </p:spPr>
+          <p:txBody>
+            <a:bodyPr wrap="square">
+              <a:spAutoFit/>
+            </a:bodyPr>
+            <a:lstStyle/>
+            <a:p>
+              <a:r>
+                <a:rPr lang="en-US" sz="1000" b="0" i="0" u="none" strike="noStrike" dirty="0">
+                  <a:solidFill>
+                    <a:srgbClr val="0000FF"/>
+                  </a:solidFill>
+                  <a:effectLst/>
+                </a:rPr>
+                <a:t>208.10 - 493.16 - 244.07 - MNTJJDN</a:t>
+              </a:r>
+              <a:r>
+                <a:rPr lang="en-US" sz="1000" b="0" i="0" u="none" strike="noStrike" dirty="0">
+                  <a:solidFill>
+                    <a:srgbClr val="FFC000"/>
+                  </a:solidFill>
+                  <a:effectLst/>
+                </a:rPr>
+                <a:t>J</a:t>
+              </a:r>
+              <a:r>
+                <a:rPr lang="en-US" sz="1000" b="0" i="0" u="none" strike="noStrike" dirty="0">
+                  <a:solidFill>
+                    <a:srgbClr val="FF0000"/>
+                  </a:solidFill>
+                  <a:effectLst/>
+                </a:rPr>
+                <a:t>AARDFJNWJJQTKJ</a:t>
+              </a:r>
+              <a:r>
+                <a:rPr lang="en-US" sz="1000" b="0" i="0" u="none" strike="noStrike" dirty="0">
+                  <a:solidFill>
+                    <a:srgbClr val="EE0000"/>
+                  </a:solidFill>
+                  <a:effectLst/>
+                </a:rPr>
+                <a:t> </a:t>
+              </a:r>
+              <a:r>
+                <a:rPr lang="en-US" sz="1000" b="0" i="0" u="none" strike="noStrike" dirty="0">
+                  <a:solidFill>
+                    <a:srgbClr val="FF0000"/>
+                  </a:solidFill>
+                  <a:effectLst/>
+                </a:rPr>
+                <a:t>- 216.08</a:t>
+              </a:r>
+              <a:r>
+                <a:rPr lang="en-US" sz="1000" b="0" i="0" u="none" strike="noStrike" dirty="0">
+                  <a:solidFill>
+                    <a:srgbClr val="000000"/>
+                  </a:solidFill>
+                  <a:effectLst/>
+                </a:rPr>
+                <a:t> </a:t>
+              </a:r>
+              <a:endParaRPr lang="en-US" sz="1000" dirty="0"/>
+            </a:p>
+          </p:txBody>
+        </p:sp>
+        <p:sp>
+          <p:nvSpPr>
+            <p:cNvPr id="12" name="TextBox 11">
+              <a:extLst>
+                <a:ext uri="{FF2B5EF4-FFF2-40B4-BE49-F238E27FC236}">
+                  <a16:creationId xmlns:a16="http://schemas.microsoft.com/office/drawing/2014/main" id="{E43F4E27-47A4-9FE9-E166-3688FFC89FCF}"/>
+                </a:ext>
+              </a:extLst>
+            </p:cNvPr>
+            <p:cNvSpPr txBox="1"/>
+            <p:nvPr/>
+          </p:nvSpPr>
+          <p:spPr>
+            <a:xfrm>
+              <a:off x="2756262" y="6132171"/>
+              <a:ext cx="372291" cy="246221"/>
+            </a:xfrm>
+            <a:prstGeom prst="rect">
+              <a:avLst/>
+            </a:prstGeom>
+            <a:noFill/>
+          </p:spPr>
+          <p:txBody>
+            <a:bodyPr wrap="square" rtlCol="0">
+              <a:spAutoFit/>
+            </a:bodyPr>
+            <a:lstStyle/>
+            <a:p>
+              <a:r>
+                <a:rPr lang="en-US" sz="1000" dirty="0">
+                  <a:solidFill>
+                    <a:srgbClr val="808080"/>
+                  </a:solidFill>
+                </a:rPr>
+                <a:t>HA</a:t>
+              </a:r>
+              <a:endParaRPr lang="en-US" sz="1000" dirty="0"/>
+            </a:p>
+          </p:txBody>
+        </p:sp>
+        <p:sp>
+          <p:nvSpPr>
+            <p:cNvPr id="14" name="TextBox 13">
+              <a:extLst>
+                <a:ext uri="{FF2B5EF4-FFF2-40B4-BE49-F238E27FC236}">
+                  <a16:creationId xmlns:a16="http://schemas.microsoft.com/office/drawing/2014/main" id="{B80D6C17-E25B-6EA1-DC4B-E368A3DF671F}"/>
+                </a:ext>
+              </a:extLst>
+            </p:cNvPr>
+            <p:cNvSpPr txBox="1"/>
+            <p:nvPr/>
+          </p:nvSpPr>
+          <p:spPr>
+            <a:xfrm>
+              <a:off x="3055075" y="6132171"/>
+              <a:ext cx="249827" cy="246221"/>
+            </a:xfrm>
+            <a:prstGeom prst="rect">
+              <a:avLst/>
+            </a:prstGeom>
+            <a:noFill/>
+          </p:spPr>
+          <p:txBody>
+            <a:bodyPr wrap="square">
+              <a:spAutoFit/>
+            </a:bodyPr>
+            <a:lstStyle/>
+            <a:p>
+              <a:r>
+                <a:rPr lang="en-US" sz="1000" b="0" i="0" u="none" strike="noStrike" dirty="0">
+                  <a:effectLst/>
+                </a:rPr>
+                <a:t>-</a:t>
+              </a:r>
+              <a:endParaRPr lang="en-US" sz="1000" dirty="0"/>
+            </a:p>
+          </p:txBody>
+        </p:sp>
+        <p:sp>
+          <p:nvSpPr>
+            <p:cNvPr id="15" name="TextBox 14">
+              <a:extLst>
+                <a:ext uri="{FF2B5EF4-FFF2-40B4-BE49-F238E27FC236}">
+                  <a16:creationId xmlns:a16="http://schemas.microsoft.com/office/drawing/2014/main" id="{B2833ABD-7251-D431-307A-76DC2D5D3CF5}"/>
+                </a:ext>
+              </a:extLst>
+            </p:cNvPr>
+            <p:cNvSpPr txBox="1"/>
+            <p:nvPr/>
+          </p:nvSpPr>
+          <p:spPr>
+            <a:xfrm>
+              <a:off x="3527515" y="6132170"/>
+              <a:ext cx="249827" cy="246221"/>
+            </a:xfrm>
+            <a:prstGeom prst="rect">
+              <a:avLst/>
+            </a:prstGeom>
+            <a:noFill/>
+          </p:spPr>
+          <p:txBody>
+            <a:bodyPr wrap="square">
+              <a:spAutoFit/>
+            </a:bodyPr>
+            <a:lstStyle/>
+            <a:p>
+              <a:r>
+                <a:rPr lang="en-US" sz="1000" b="0" i="0" u="none" strike="noStrike" dirty="0">
+                  <a:effectLst/>
+                </a:rPr>
+                <a:t>-</a:t>
+              </a:r>
+              <a:endParaRPr lang="en-US" sz="1000" dirty="0"/>
+            </a:p>
+          </p:txBody>
+        </p:sp>
+        <p:sp>
+          <p:nvSpPr>
+            <p:cNvPr id="16" name="TextBox 15">
+              <a:extLst>
+                <a:ext uri="{FF2B5EF4-FFF2-40B4-BE49-F238E27FC236}">
+                  <a16:creationId xmlns:a16="http://schemas.microsoft.com/office/drawing/2014/main" id="{5FD75B8C-3F8D-3208-C17B-2B446BEFBC90}"/>
+                </a:ext>
+              </a:extLst>
+            </p:cNvPr>
+            <p:cNvSpPr txBox="1"/>
+            <p:nvPr/>
+          </p:nvSpPr>
+          <p:spPr>
+            <a:xfrm>
+              <a:off x="3999955" y="6132169"/>
+              <a:ext cx="249827" cy="246221"/>
+            </a:xfrm>
+            <a:prstGeom prst="rect">
+              <a:avLst/>
+            </a:prstGeom>
+            <a:noFill/>
+          </p:spPr>
+          <p:txBody>
+            <a:bodyPr wrap="square">
+              <a:spAutoFit/>
+            </a:bodyPr>
+            <a:lstStyle/>
+            <a:p>
+              <a:r>
+                <a:rPr lang="en-US" sz="1000" b="0" i="0" u="none" strike="noStrike" dirty="0">
+                  <a:effectLst/>
+                </a:rPr>
+                <a:t>-</a:t>
+              </a:r>
+              <a:endParaRPr lang="en-US" sz="1000" dirty="0"/>
+            </a:p>
+          </p:txBody>
+        </p:sp>
+        <p:sp>
+          <p:nvSpPr>
+            <p:cNvPr id="17" name="TextBox 16">
+              <a:extLst>
+                <a:ext uri="{FF2B5EF4-FFF2-40B4-BE49-F238E27FC236}">
+                  <a16:creationId xmlns:a16="http://schemas.microsoft.com/office/drawing/2014/main" id="{67E260B0-C192-7D55-1A87-DC23FF587C4D}"/>
+                </a:ext>
+              </a:extLst>
+            </p:cNvPr>
+            <p:cNvSpPr txBox="1"/>
+            <p:nvPr/>
+          </p:nvSpPr>
+          <p:spPr>
+            <a:xfrm>
+              <a:off x="5600411" y="6117277"/>
+              <a:ext cx="249827" cy="246221"/>
+            </a:xfrm>
+            <a:prstGeom prst="rect">
+              <a:avLst/>
+            </a:prstGeom>
+            <a:noFill/>
+          </p:spPr>
+          <p:txBody>
+            <a:bodyPr wrap="square">
+              <a:spAutoFit/>
+            </a:bodyPr>
+            <a:lstStyle/>
+            <a:p>
+              <a:r>
+                <a:rPr lang="en-US" sz="1000" b="0" i="0" u="none" strike="noStrike" dirty="0">
+                  <a:effectLst/>
+                </a:rPr>
+                <a:t>-</a:t>
+              </a:r>
+              <a:endParaRPr lang="en-US" sz="1000" dirty="0"/>
+            </a:p>
+          </p:txBody>
+        </p:sp>
+        <p:sp>
+          <p:nvSpPr>
+            <p:cNvPr id="18" name="TextBox 17">
+              <a:extLst>
+                <a:ext uri="{FF2B5EF4-FFF2-40B4-BE49-F238E27FC236}">
+                  <a16:creationId xmlns:a16="http://schemas.microsoft.com/office/drawing/2014/main" id="{5C6404FE-F6EF-AA74-C5BC-5E6483FF1F7C}"/>
+                </a:ext>
+              </a:extLst>
+            </p:cNvPr>
+            <p:cNvSpPr txBox="1"/>
+            <p:nvPr/>
+          </p:nvSpPr>
+          <p:spPr>
+            <a:xfrm>
+              <a:off x="3131001" y="6135065"/>
+              <a:ext cx="692605" cy="246221"/>
+            </a:xfrm>
+            <a:prstGeom prst="rect">
+              <a:avLst/>
+            </a:prstGeom>
+            <a:noFill/>
+          </p:spPr>
+          <p:txBody>
+            <a:bodyPr wrap="square" rtlCol="0">
+              <a:spAutoFit/>
+            </a:bodyPr>
+            <a:lstStyle/>
+            <a:p>
+              <a:r>
+                <a:rPr lang="en-US" sz="1000" b="0" i="0" u="none" strike="noStrike" dirty="0">
+                  <a:solidFill>
+                    <a:srgbClr val="808080"/>
+                  </a:solidFill>
+                  <a:effectLst/>
+                </a:rPr>
+                <a:t>DGSFS</a:t>
+              </a:r>
+              <a:endParaRPr lang="en-US" sz="1000" dirty="0"/>
+            </a:p>
+          </p:txBody>
+        </p:sp>
+        <p:sp>
+          <p:nvSpPr>
+            <p:cNvPr id="21" name="TextBox 20">
+              <a:extLst>
+                <a:ext uri="{FF2B5EF4-FFF2-40B4-BE49-F238E27FC236}">
+                  <a16:creationId xmlns:a16="http://schemas.microsoft.com/office/drawing/2014/main" id="{292839C4-48B3-D144-FB54-8E7BA20C2823}"/>
+                </a:ext>
+              </a:extLst>
+            </p:cNvPr>
+            <p:cNvSpPr txBox="1"/>
+            <p:nvPr/>
+          </p:nvSpPr>
+          <p:spPr>
+            <a:xfrm>
+              <a:off x="3701957" y="6135063"/>
+              <a:ext cx="372292" cy="246221"/>
+            </a:xfrm>
+            <a:prstGeom prst="rect">
+              <a:avLst/>
+            </a:prstGeom>
+            <a:noFill/>
+          </p:spPr>
+          <p:txBody>
+            <a:bodyPr wrap="square" rtlCol="0">
+              <a:spAutoFit/>
+            </a:bodyPr>
+            <a:lstStyle/>
+            <a:p>
+              <a:r>
+                <a:rPr lang="en-US" sz="1000" b="0" i="0" u="none" strike="noStrike" dirty="0">
+                  <a:solidFill>
+                    <a:srgbClr val="808080"/>
+                  </a:solidFill>
+                  <a:effectLst/>
+                </a:rPr>
+                <a:t>DE</a:t>
+              </a:r>
+              <a:endParaRPr lang="en-US" sz="1000" dirty="0"/>
+            </a:p>
+          </p:txBody>
+        </p:sp>
+        <p:sp>
+          <p:nvSpPr>
+            <p:cNvPr id="22" name="TextBox 21">
+              <a:extLst>
+                <a:ext uri="{FF2B5EF4-FFF2-40B4-BE49-F238E27FC236}">
+                  <a16:creationId xmlns:a16="http://schemas.microsoft.com/office/drawing/2014/main" id="{C3D3E91C-85A1-8A62-F514-A796D2718DE7}"/>
+                </a:ext>
+              </a:extLst>
+            </p:cNvPr>
+            <p:cNvSpPr txBox="1"/>
+            <p:nvPr/>
+          </p:nvSpPr>
+          <p:spPr>
+            <a:xfrm>
+              <a:off x="4064762" y="6126625"/>
+              <a:ext cx="1755884" cy="246221"/>
+            </a:xfrm>
+            <a:prstGeom prst="rect">
+              <a:avLst/>
+            </a:prstGeom>
+            <a:noFill/>
+          </p:spPr>
+          <p:txBody>
+            <a:bodyPr wrap="square" rtlCol="0">
+              <a:spAutoFit/>
+            </a:bodyPr>
+            <a:lstStyle/>
+            <a:p>
+              <a:r>
+                <a:rPr lang="en-US" sz="1000" b="0" i="0" u="none" strike="noStrike" dirty="0">
+                  <a:solidFill>
+                    <a:srgbClr val="000000"/>
+                  </a:solidFill>
+                  <a:effectLst/>
+                </a:rPr>
+                <a:t>MNTJJDNJAARDFINWLIQTKJ</a:t>
+              </a:r>
+              <a:endParaRPr lang="en-US" sz="1000" dirty="0"/>
+            </a:p>
+          </p:txBody>
+        </p:sp>
+        <p:sp>
+          <p:nvSpPr>
+            <p:cNvPr id="23" name="TextBox 22">
+              <a:extLst>
+                <a:ext uri="{FF2B5EF4-FFF2-40B4-BE49-F238E27FC236}">
+                  <a16:creationId xmlns:a16="http://schemas.microsoft.com/office/drawing/2014/main" id="{8E1BBF9B-CEF9-1149-D666-EB6D1FBC20A9}"/>
+                </a:ext>
+              </a:extLst>
+            </p:cNvPr>
+            <p:cNvSpPr txBox="1"/>
+            <p:nvPr/>
+          </p:nvSpPr>
+          <p:spPr>
+            <a:xfrm>
+              <a:off x="5746823" y="6133159"/>
+              <a:ext cx="372292" cy="246221"/>
+            </a:xfrm>
+            <a:prstGeom prst="rect">
+              <a:avLst/>
+            </a:prstGeom>
+            <a:noFill/>
+          </p:spPr>
+          <p:txBody>
+            <a:bodyPr wrap="square" rtlCol="0">
+              <a:spAutoFit/>
+            </a:bodyPr>
+            <a:lstStyle/>
+            <a:p>
+              <a:r>
+                <a:rPr lang="en-US" sz="1000" b="0" i="0" u="none" strike="noStrike" dirty="0">
+                  <a:solidFill>
+                    <a:srgbClr val="808080"/>
+                  </a:solidFill>
+                  <a:effectLst/>
+                </a:rPr>
+                <a:t>TD</a:t>
+              </a:r>
+              <a:endParaRPr lang="en-US" sz="1000" dirty="0"/>
+            </a:p>
+          </p:txBody>
+        </p:sp>
+      </p:grpSp>
+    </p:spTree>
+    <p:extLst>
+      <p:ext uri="{BB962C8B-B14F-4D97-AF65-F5344CB8AC3E}">
+        <p14:creationId xmlns:p14="http://schemas.microsoft.com/office/powerpoint/2010/main" val="1955930211"/>
       </p:ext>
     </p:extLst>
   </p:cSld>
@@ -6716,4 +13508,319 @@
     </a:ext>
   </a:extLst>
 </a:theme>
+</file>
+
+<file path=ppt/theme/theme2.xml><?xml version="1.0" encoding="utf-8"?>
+<a:theme xmlns:a="http://schemas.openxmlformats.org/drawingml/2006/main" name="Office Theme">
+  <a:themeElements>
+    <a:clrScheme name="Office">
+      <a:dk1>
+        <a:sysClr val="windowText" lastClr="000000"/>
+      </a:dk1>
+      <a:lt1>
+        <a:sysClr val="window" lastClr="FFFFFF"/>
+      </a:lt1>
+      <a:dk2>
+        <a:srgbClr val="0E2841"/>
+      </a:dk2>
+      <a:lt2>
+        <a:srgbClr val="E8E8E8"/>
+      </a:lt2>
+      <a:accent1>
+        <a:srgbClr val="156082"/>
+      </a:accent1>
+      <a:accent2>
+        <a:srgbClr val="E97132"/>
+      </a:accent2>
+      <a:accent3>
+        <a:srgbClr val="196B24"/>
+      </a:accent3>
+      <a:accent4>
+        <a:srgbClr val="0F9ED5"/>
+      </a:accent4>
+      <a:accent5>
+        <a:srgbClr val="A02B93"/>
+      </a:accent5>
+      <a:accent6>
+        <a:srgbClr val="4EA72E"/>
+      </a:accent6>
+      <a:hlink>
+        <a:srgbClr val="467886"/>
+      </a:hlink>
+      <a:folHlink>
+        <a:srgbClr val="96607D"/>
+      </a:folHlink>
+    </a:clrScheme>
+    <a:fontScheme name="Office">
+      <a:majorFont>
+        <a:latin typeface="Aptos Display" panose="02110004020202020204"/>
+        <a:ea typeface=""/>
+        <a:cs typeface=""/>
+        <a:font script="Jpan" typeface="游ゴシック Light"/>
+        <a:font script="Hang" typeface="맑은 고딕"/>
+        <a:font script="Hans" typeface="等线 Light"/>
+        <a:font script="Hant" typeface="新細明體"/>
+        <a:font script="Arab" typeface="Times New Roman"/>
+        <a:font script="Hebr" typeface="Times New Roman"/>
+        <a:font script="Thai" typeface="Angsana New"/>
+        <a:font script="Ethi" typeface="Nyala"/>
+        <a:font script="Beng" typeface="Vrinda"/>
+        <a:font script="Gujr" typeface="Shruti"/>
+        <a:font script="Khmr" typeface="MoolBoran"/>
+        <a:font script="Knda" typeface="Tunga"/>
+        <a:font script="Guru" typeface="Raavi"/>
+        <a:font script="Cans" typeface="Euphemia"/>
+        <a:font script="Cher" typeface="Plantagenet Cherokee"/>
+        <a:font script="Yiii" typeface="Microsoft Yi Baiti"/>
+        <a:font script="Tibt" typeface="Microsoft Himalaya"/>
+        <a:font script="Thaa" typeface="MV Boli"/>
+        <a:font script="Deva" typeface="Mangal"/>
+        <a:font script="Telu" typeface="Gautami"/>
+        <a:font script="Taml" typeface="Latha"/>
+        <a:font script="Syrc" typeface="Estrangelo Edessa"/>
+        <a:font script="Orya" typeface="Kalinga"/>
+        <a:font script="Mlym" typeface="Kartika"/>
+        <a:font script="Laoo" typeface="DokChampa"/>
+        <a:font script="Sinh" typeface="Iskoola Pota"/>
+        <a:font script="Mong" typeface="Mongolian Baiti"/>
+        <a:font script="Viet" typeface="Times New Roman"/>
+        <a:font script="Uigh" typeface="Microsoft Uighur"/>
+        <a:font script="Geor" typeface="Sylfaen"/>
+        <a:font script="Armn" typeface="Arial"/>
+        <a:font script="Bugi" typeface="Leelawadee UI"/>
+        <a:font script="Bopo" typeface="Microsoft JhengHei"/>
+        <a:font script="Java" typeface="Javanese Text"/>
+        <a:font script="Lisu" typeface="Segoe UI"/>
+        <a:font script="Mymr" typeface="Myanmar Text"/>
+        <a:font script="Nkoo" typeface="Ebrima"/>
+        <a:font script="Olck" typeface="Nirmala UI"/>
+        <a:font script="Osma" typeface="Ebrima"/>
+        <a:font script="Phag" typeface="Phagspa"/>
+        <a:font script="Syrn" typeface="Estrangelo Edessa"/>
+        <a:font script="Syrj" typeface="Estrangelo Edessa"/>
+        <a:font script="Syre" typeface="Estrangelo Edessa"/>
+        <a:font script="Sora" typeface="Nirmala UI"/>
+        <a:font script="Tale" typeface="Microsoft Tai Le"/>
+        <a:font script="Talu" typeface="Microsoft New Tai Lue"/>
+        <a:font script="Tfng" typeface="Ebrima"/>
+      </a:majorFont>
+      <a:minorFont>
+        <a:latin typeface="Aptos" panose="02110004020202020204"/>
+        <a:ea typeface=""/>
+        <a:cs typeface=""/>
+        <a:font script="Jpan" typeface="游ゴシック"/>
+        <a:font script="Hang" typeface="맑은 고딕"/>
+        <a:font script="Hans" typeface="等线"/>
+        <a:font script="Hant" typeface="新細明體"/>
+        <a:font script="Arab" typeface="Arial"/>
+        <a:font script="Hebr" typeface="Arial"/>
+        <a:font script="Thai" typeface="Cordia New"/>
+        <a:font script="Ethi" typeface="Nyala"/>
+        <a:font script="Beng" typeface="Vrinda"/>
+        <a:font script="Gujr" typeface="Shruti"/>
+        <a:font script="Khmr" typeface="DaunPenh"/>
+        <a:font script="Knda" typeface="Tunga"/>
+        <a:font script="Guru" typeface="Raavi"/>
+        <a:font script="Cans" typeface="Euphemia"/>
+        <a:font script="Cher" typeface="Plantagenet Cherokee"/>
+        <a:font script="Yiii" typeface="Microsoft Yi Baiti"/>
+        <a:font script="Tibt" typeface="Microsoft Himalaya"/>
+        <a:font script="Thaa" typeface="MV Boli"/>
+        <a:font script="Deva" typeface="Mangal"/>
+        <a:font script="Telu" typeface="Gautami"/>
+        <a:font script="Taml" typeface="Latha"/>
+        <a:font script="Syrc" typeface="Estrangelo Edessa"/>
+        <a:font script="Orya" typeface="Kalinga"/>
+        <a:font script="Mlym" typeface="Kartika"/>
+        <a:font script="Laoo" typeface="DokChampa"/>
+        <a:font script="Sinh" typeface="Iskoola Pota"/>
+        <a:font script="Mong" typeface="Mongolian Baiti"/>
+        <a:font script="Viet" typeface="Arial"/>
+        <a:font script="Uigh" typeface="Microsoft Uighur"/>
+        <a:font script="Geor" typeface="Sylfaen"/>
+        <a:font script="Armn" typeface="Arial"/>
+        <a:font script="Bugi" typeface="Leelawadee UI"/>
+        <a:font script="Bopo" typeface="Microsoft JhengHei"/>
+        <a:font script="Java" typeface="Javanese Text"/>
+        <a:font script="Lisu" typeface="Segoe UI"/>
+        <a:font script="Mymr" typeface="Myanmar Text"/>
+        <a:font script="Nkoo" typeface="Ebrima"/>
+        <a:font script="Olck" typeface="Nirmala UI"/>
+        <a:font script="Osma" typeface="Ebrima"/>
+        <a:font script="Phag" typeface="Phagspa"/>
+        <a:font script="Syrn" typeface="Estrangelo Edessa"/>
+        <a:font script="Syrj" typeface="Estrangelo Edessa"/>
+        <a:font script="Syre" typeface="Estrangelo Edessa"/>
+        <a:font script="Sora" typeface="Nirmala UI"/>
+        <a:font script="Tale" typeface="Microsoft Tai Le"/>
+        <a:font script="Talu" typeface="Microsoft New Tai Lue"/>
+        <a:font script="Tfng" typeface="Ebrima"/>
+      </a:minorFont>
+    </a:fontScheme>
+    <a:fmtScheme name="Office">
+      <a:fillStyleLst>
+        <a:solidFill>
+          <a:schemeClr val="phClr"/>
+        </a:solidFill>
+        <a:gradFill rotWithShape="1">
+          <a:gsLst>
+            <a:gs pos="0">
+              <a:schemeClr val="phClr">
+                <a:lumMod val="110000"/>
+                <a:satMod val="105000"/>
+                <a:tint val="67000"/>
+              </a:schemeClr>
+            </a:gs>
+            <a:gs pos="50000">
+              <a:schemeClr val="phClr">
+                <a:lumMod val="105000"/>
+                <a:satMod val="103000"/>
+                <a:tint val="73000"/>
+              </a:schemeClr>
+            </a:gs>
+            <a:gs pos="100000">
+              <a:schemeClr val="phClr">
+                <a:lumMod val="105000"/>
+                <a:satMod val="109000"/>
+                <a:tint val="81000"/>
+              </a:schemeClr>
+            </a:gs>
+          </a:gsLst>
+          <a:lin ang="5400000" scaled="0"/>
+        </a:gradFill>
+        <a:gradFill rotWithShape="1">
+          <a:gsLst>
+            <a:gs pos="0">
+              <a:schemeClr val="phClr">
+                <a:satMod val="103000"/>
+                <a:lumMod val="102000"/>
+                <a:tint val="94000"/>
+              </a:schemeClr>
+            </a:gs>
+            <a:gs pos="50000">
+              <a:schemeClr val="phClr">
+                <a:satMod val="110000"/>
+                <a:lumMod val="100000"/>
+                <a:shade val="100000"/>
+              </a:schemeClr>
+            </a:gs>
+            <a:gs pos="100000">
+              <a:schemeClr val="phClr">
+                <a:lumMod val="99000"/>
+                <a:satMod val="120000"/>
+                <a:shade val="78000"/>
+              </a:schemeClr>
+            </a:gs>
+          </a:gsLst>
+          <a:lin ang="5400000" scaled="0"/>
+        </a:gradFill>
+      </a:fillStyleLst>
+      <a:lnStyleLst>
+        <a:ln w="12700" cap="flat" cmpd="sng" algn="ctr">
+          <a:solidFill>
+            <a:schemeClr val="phClr"/>
+          </a:solidFill>
+          <a:prstDash val="solid"/>
+          <a:miter lim="800000"/>
+        </a:ln>
+        <a:ln w="19050" cap="flat" cmpd="sng" algn="ctr">
+          <a:solidFill>
+            <a:schemeClr val="phClr"/>
+          </a:solidFill>
+          <a:prstDash val="solid"/>
+          <a:miter lim="800000"/>
+        </a:ln>
+        <a:ln w="25400" cap="flat" cmpd="sng" algn="ctr">
+          <a:solidFill>
+            <a:schemeClr val="phClr"/>
+          </a:solidFill>
+          <a:prstDash val="solid"/>
+          <a:miter lim="800000"/>
+        </a:ln>
+      </a:lnStyleLst>
+      <a:effectStyleLst>
+        <a:effectStyle>
+          <a:effectLst/>
+        </a:effectStyle>
+        <a:effectStyle>
+          <a:effectLst/>
+        </a:effectStyle>
+        <a:effectStyle>
+          <a:effectLst>
+            <a:outerShdw blurRad="57150" dist="19050" dir="5400000" algn="ctr" rotWithShape="0">
+              <a:srgbClr val="000000">
+                <a:alpha val="63000"/>
+              </a:srgbClr>
+            </a:outerShdw>
+          </a:effectLst>
+        </a:effectStyle>
+      </a:effectStyleLst>
+      <a:bgFillStyleLst>
+        <a:solidFill>
+          <a:schemeClr val="phClr"/>
+        </a:solidFill>
+        <a:solidFill>
+          <a:schemeClr val="phClr">
+            <a:tint val="95000"/>
+            <a:satMod val="170000"/>
+          </a:schemeClr>
+        </a:solidFill>
+        <a:gradFill rotWithShape="1">
+          <a:gsLst>
+            <a:gs pos="0">
+              <a:schemeClr val="phClr">
+                <a:tint val="93000"/>
+                <a:satMod val="150000"/>
+                <a:shade val="98000"/>
+                <a:lumMod val="102000"/>
+              </a:schemeClr>
+            </a:gs>
+            <a:gs pos="50000">
+              <a:schemeClr val="phClr">
+                <a:tint val="98000"/>
+                <a:satMod val="130000"/>
+                <a:shade val="90000"/>
+                <a:lumMod val="103000"/>
+              </a:schemeClr>
+            </a:gs>
+            <a:gs pos="100000">
+              <a:schemeClr val="phClr">
+                <a:shade val="63000"/>
+                <a:satMod val="120000"/>
+              </a:schemeClr>
+            </a:gs>
+          </a:gsLst>
+          <a:lin ang="5400000" scaled="0"/>
+        </a:gradFill>
+      </a:bgFillStyleLst>
+    </a:fmtScheme>
+  </a:themeElements>
+  <a:objectDefaults>
+    <a:lnDef>
+      <a:spPr/>
+      <a:bodyPr/>
+      <a:lstStyle/>
+      <a:style>
+        <a:lnRef idx="2">
+          <a:schemeClr val="accent1"/>
+        </a:lnRef>
+        <a:fillRef idx="0">
+          <a:schemeClr val="accent1"/>
+        </a:fillRef>
+        <a:effectRef idx="1">
+          <a:schemeClr val="accent1"/>
+        </a:effectRef>
+        <a:fontRef idx="minor">
+          <a:schemeClr val="tx1"/>
+        </a:fontRef>
+      </a:style>
+    </a:lnDef>
+  </a:objectDefaults>
+  <a:extraClrSchemeLst/>
+  <a:extLst>
+    <a:ext uri="{05A4C25C-085E-4340-85A3-A5531E510DB2}">
+      <thm15:themeFamily xmlns:thm15="http://schemas.microsoft.com/office/thememl/2012/main" name="Office Theme" id="{2E142A2C-CD16-42D6-873A-C26D2A0506FA}" vid="{1BDDFF52-6CD6-40A5-AB3C-68EB2F1E4D0A}"/>
+    </a:ext>
+  </a:extLst>
+</a:theme>
 </file>